--- a/docs/flitunion-company-profile.pptx
+++ b/docs/flitunion-company-profile.pptx
@@ -16437,8 +16437,8 @@
         </p:nvSpPr>
         <p:spPr>
           <a:xfrm>
-            <a:off x="1005840" y="3154680"/>
-            <a:ext cx="1280160" cy="384048"/>
+            <a:off x="1005840" y="3108960"/>
+            <a:ext cx="1280160" cy="310896"/>
           </a:xfrm>
           <a:prstGeom prst="rect">
             <a:avLst/>
@@ -16476,8 +16476,8 @@
         </p:nvSpPr>
         <p:spPr>
           <a:xfrm>
-            <a:off x="2286000" y="3154680"/>
-            <a:ext cx="3200400" cy="384048"/>
+            <a:off x="2286000" y="3108960"/>
+            <a:ext cx="3200400" cy="310896"/>
           </a:xfrm>
           <a:prstGeom prst="rect">
             <a:avLst/>
@@ -16518,8 +16518,8 @@
         </p:nvSpPr>
         <p:spPr>
           <a:xfrm>
-            <a:off x="1005840" y="3630168"/>
-            <a:ext cx="1280160" cy="566928"/>
+            <a:off x="1005840" y="3474720"/>
+            <a:ext cx="1280160" cy="310896"/>
           </a:xfrm>
           <a:prstGeom prst="rect">
             <a:avLst/>
@@ -16543,7 +16543,7 @@
                 <a:ea typeface="Malgun Gothic" pitchFamily="34" charset="-122"/>
                 <a:cs typeface="Malgun Gothic" pitchFamily="34" charset="-120"/>
               </a:rPr>
-              <a:t>사업 영역</a:t>
+              <a:t>대표자</a:t>
             </a:r>
             <a:endParaRPr lang="en-US" sz="1100" dirty="0"/>
           </a:p>
@@ -16557,8 +16557,8 @@
         </p:nvSpPr>
         <p:spPr>
           <a:xfrm>
-            <a:off x="2286000" y="3630168"/>
-            <a:ext cx="3200400" cy="566928"/>
+            <a:off x="2286000" y="3474720"/>
+            <a:ext cx="3200400" cy="310896"/>
           </a:xfrm>
           <a:prstGeom prst="rect">
             <a:avLst/>
@@ -16585,10 +16585,71 @@
                 <a:ea typeface="Malgun Gothic" pitchFamily="34" charset="-122"/>
                 <a:cs typeface="Malgun Gothic" pitchFamily="34" charset="-120"/>
               </a:rPr>
-              <a:t>플리마켓·야시장 운영 대행, 푸드트럭 섭외,</a:t>
+              <a:t>이아로</a:t>
             </a:r>
             <a:endParaRPr lang="en-US" sz="1100" dirty="0"/>
           </a:p>
+        </p:txBody>
+      </p:sp>
+      <p:sp>
+        <p:nvSpPr>
+          <p:cNvPr id="16" name="Text 14"/>
+          <p:cNvSpPr txBox="1"/>
+          <p:nvPr/>
+        </p:nvSpPr>
+        <p:spPr>
+          <a:xfrm>
+            <a:off x="1005840" y="3840480"/>
+            <a:ext cx="1280160" cy="310896"/>
+          </a:xfrm>
+          <a:prstGeom prst="rect">
+            <a:avLst/>
+          </a:prstGeom>
+          <a:noFill/>
+          <a:ln/>
+        </p:spPr>
+        <p:txBody>
+          <a:bodyPr wrap="square" lIns="0" tIns="0" rIns="0" bIns="0" rtlCol="0" anchor="t"/>
+          <a:lstStyle/>
+          <a:p>
+            <a:pPr indent="0" marL="0">
+              <a:buNone/>
+            </a:pPr>
+            <a:r>
+              <a:rPr lang="en-US" sz="1100" b="1" dirty="0">
+                <a:solidFill>
+                  <a:srgbClr val="3182F6"/>
+                </a:solidFill>
+                <a:latin typeface="Malgun Gothic" pitchFamily="34" charset="0"/>
+                <a:ea typeface="Malgun Gothic" pitchFamily="34" charset="-122"/>
+                <a:cs typeface="Malgun Gothic" pitchFamily="34" charset="-120"/>
+              </a:rPr>
+              <a:t>설립일</a:t>
+            </a:r>
+            <a:endParaRPr lang="en-US" sz="1100" dirty="0"/>
+          </a:p>
+        </p:txBody>
+      </p:sp>
+      <p:sp>
+        <p:nvSpPr>
+          <p:cNvPr id="17" name="Text 15"/>
+          <p:cNvSpPr txBox="1"/>
+          <p:nvPr/>
+        </p:nvSpPr>
+        <p:spPr>
+          <a:xfrm>
+            <a:off x="2286000" y="3840480"/>
+            <a:ext cx="3200400" cy="310896"/>
+          </a:xfrm>
+          <a:prstGeom prst="rect">
+            <a:avLst/>
+          </a:prstGeom>
+          <a:noFill/>
+          <a:ln/>
+        </p:spPr>
+        <p:txBody>
+          <a:bodyPr wrap="square" lIns="0" tIns="0" rIns="0" bIns="0" rtlCol="0" anchor="t"/>
+          <a:lstStyle/>
           <a:p>
             <a:pPr indent="0" marL="0">
               <a:lnSpc>
@@ -16605,7 +16666,7 @@
                 <a:ea typeface="Malgun Gothic" pitchFamily="34" charset="-122"/>
                 <a:cs typeface="Malgun Gothic" pitchFamily="34" charset="-120"/>
               </a:rPr>
-              <a:t>행사 물품 렌탈</a:t>
+              <a:t>2024년 8월</a:t>
             </a:r>
             <a:endParaRPr lang="en-US" sz="1100" dirty="0"/>
           </a:p>
@@ -16613,14 +16674,14 @@
       </p:sp>
       <p:sp>
         <p:nvSpPr>
-          <p:cNvPr id="16" name="Text 14"/>
-          <p:cNvSpPr txBox="1"/>
-          <p:nvPr/>
-        </p:nvSpPr>
-        <p:spPr>
-          <a:xfrm>
-            <a:off x="1005840" y="4288536"/>
-            <a:ext cx="1280160" cy="384048"/>
+          <p:cNvPr id="18" name="Text 16"/>
+          <p:cNvSpPr txBox="1"/>
+          <p:nvPr/>
+        </p:nvSpPr>
+        <p:spPr>
+          <a:xfrm>
+            <a:off x="1005840" y="4206240"/>
+            <a:ext cx="1280160" cy="502920"/>
           </a:xfrm>
           <a:prstGeom prst="rect">
             <a:avLst/>
@@ -16644,7 +16705,7 @@
                 <a:ea typeface="Malgun Gothic" pitchFamily="34" charset="-122"/>
                 <a:cs typeface="Malgun Gothic" pitchFamily="34" charset="-120"/>
               </a:rPr>
-              <a:t>운영 플랫폼</a:t>
+              <a:t>사업 영역</a:t>
             </a:r>
             <a:endParaRPr lang="en-US" sz="1100" dirty="0"/>
           </a:p>
@@ -16652,14 +16713,14 @@
       </p:sp>
       <p:sp>
         <p:nvSpPr>
-          <p:cNvPr id="17" name="Text 15"/>
-          <p:cNvSpPr txBox="1"/>
-          <p:nvPr/>
-        </p:nvSpPr>
-        <p:spPr>
-          <a:xfrm>
-            <a:off x="2286000" y="4288536"/>
-            <a:ext cx="3200400" cy="384048"/>
+          <p:cNvPr id="19" name="Text 17"/>
+          <p:cNvSpPr txBox="1"/>
+          <p:nvPr/>
+        </p:nvSpPr>
+        <p:spPr>
+          <a:xfrm>
+            <a:off x="2286000" y="4206240"/>
+            <a:ext cx="3200400" cy="502920"/>
           </a:xfrm>
           <a:prstGeom prst="rect">
             <a:avLst/>
@@ -16686,71 +16747,10 @@
                 <a:ea typeface="Malgun Gothic" pitchFamily="34" charset="-122"/>
                 <a:cs typeface="Malgun Gothic" pitchFamily="34" charset="-120"/>
               </a:rPr>
-              <a:t>플릿(Flit) 셀러 플랫폼 · app.flitunion.com</a:t>
+              <a:t>플리마켓·야시장 운영 대행, 푸드트럭 섭외,</a:t>
             </a:r>
             <a:endParaRPr lang="en-US" sz="1100" dirty="0"/>
           </a:p>
-        </p:txBody>
-      </p:sp>
-      <p:sp>
-        <p:nvSpPr>
-          <p:cNvPr id="18" name="Text 16"/>
-          <p:cNvSpPr txBox="1"/>
-          <p:nvPr/>
-        </p:nvSpPr>
-        <p:spPr>
-          <a:xfrm>
-            <a:off x="1005840" y="4764024"/>
-            <a:ext cx="1280160" cy="384048"/>
-          </a:xfrm>
-          <a:prstGeom prst="rect">
-            <a:avLst/>
-          </a:prstGeom>
-          <a:noFill/>
-          <a:ln/>
-        </p:spPr>
-        <p:txBody>
-          <a:bodyPr wrap="square" lIns="0" tIns="0" rIns="0" bIns="0" rtlCol="0" anchor="t"/>
-          <a:lstStyle/>
-          <a:p>
-            <a:pPr indent="0" marL="0">
-              <a:buNone/>
-            </a:pPr>
-            <a:r>
-              <a:rPr lang="en-US" sz="1100" b="1" dirty="0">
-                <a:solidFill>
-                  <a:srgbClr val="3182F6"/>
-                </a:solidFill>
-                <a:latin typeface="Malgun Gothic" pitchFamily="34" charset="0"/>
-                <a:ea typeface="Malgun Gothic" pitchFamily="34" charset="-122"/>
-                <a:cs typeface="Malgun Gothic" pitchFamily="34" charset="-120"/>
-              </a:rPr>
-              <a:t>서비스 지역</a:t>
-            </a:r>
-            <a:endParaRPr lang="en-US" sz="1100" dirty="0"/>
-          </a:p>
-        </p:txBody>
-      </p:sp>
-      <p:sp>
-        <p:nvSpPr>
-          <p:cNvPr id="19" name="Text 17"/>
-          <p:cNvSpPr txBox="1"/>
-          <p:nvPr/>
-        </p:nvSpPr>
-        <p:spPr>
-          <a:xfrm>
-            <a:off x="2286000" y="4764024"/>
-            <a:ext cx="3200400" cy="384048"/>
-          </a:xfrm>
-          <a:prstGeom prst="rect">
-            <a:avLst/>
-          </a:prstGeom>
-          <a:noFill/>
-          <a:ln/>
-        </p:spPr>
-        <p:txBody>
-          <a:bodyPr wrap="square" lIns="0" tIns="0" rIns="0" bIns="0" rtlCol="0" anchor="t"/>
-          <a:lstStyle/>
           <a:p>
             <a:pPr indent="0" marL="0">
               <a:lnSpc>
@@ -16767,7 +16767,7 @@
                 <a:ea typeface="Malgun Gothic" pitchFamily="34" charset="-122"/>
                 <a:cs typeface="Malgun Gothic" pitchFamily="34" charset="-120"/>
               </a:rPr>
-              <a:t>전국 (수도권 직영, 지방 현지 파트너 운영)</a:t>
+              <a:t>행사 물품 렌탈</a:t>
             </a:r>
             <a:endParaRPr lang="en-US" sz="1100" dirty="0"/>
           </a:p>
@@ -16781,8 +16781,8 @@
         </p:nvSpPr>
         <p:spPr>
           <a:xfrm>
-            <a:off x="1005840" y="5239512"/>
-            <a:ext cx="1280160" cy="384048"/>
+            <a:off x="1005840" y="4764024"/>
+            <a:ext cx="1280160" cy="310896"/>
           </a:xfrm>
           <a:prstGeom prst="rect">
             <a:avLst/>
@@ -16806,7 +16806,7 @@
                 <a:ea typeface="Malgun Gothic" pitchFamily="34" charset="-122"/>
                 <a:cs typeface="Malgun Gothic" pitchFamily="34" charset="-120"/>
               </a:rPr>
-              <a:t>홈페이지</a:t>
+              <a:t>운영 플랫폼</a:t>
             </a:r>
             <a:endParaRPr lang="en-US" sz="1100" dirty="0"/>
           </a:p>
@@ -16820,8 +16820,8 @@
         </p:nvSpPr>
         <p:spPr>
           <a:xfrm>
-            <a:off x="2286000" y="5239512"/>
-            <a:ext cx="3200400" cy="384048"/>
+            <a:off x="2286000" y="4764024"/>
+            <a:ext cx="3200400" cy="310896"/>
           </a:xfrm>
           <a:prstGeom prst="rect">
             <a:avLst/>
@@ -16848,7 +16848,7 @@
                 <a:ea typeface="Malgun Gothic" pitchFamily="34" charset="-122"/>
                 <a:cs typeface="Malgun Gothic" pitchFamily="34" charset="-120"/>
               </a:rPr>
-              <a:t>www.flitunion.com</a:t>
+              <a:t>플릿(Flit) 셀러 플랫폼 · app.flitunion.com</a:t>
             </a:r>
             <a:endParaRPr lang="en-US" sz="1100" dirty="0"/>
           </a:p>
@@ -16862,8 +16862,8 @@
         </p:nvSpPr>
         <p:spPr>
           <a:xfrm>
-            <a:off x="1005840" y="5715000"/>
-            <a:ext cx="1280160" cy="384048"/>
+            <a:off x="1005840" y="5129784"/>
+            <a:ext cx="1280160" cy="310896"/>
           </a:xfrm>
           <a:prstGeom prst="rect">
             <a:avLst/>
@@ -16887,7 +16887,7 @@
                 <a:ea typeface="Malgun Gothic" pitchFamily="34" charset="-122"/>
                 <a:cs typeface="Malgun Gothic" pitchFamily="34" charset="-120"/>
               </a:rPr>
-              <a:t>이메일</a:t>
+              <a:t>서비스 지역</a:t>
             </a:r>
             <a:endParaRPr lang="en-US" sz="1100" dirty="0"/>
           </a:p>
@@ -16901,8 +16901,8 @@
         </p:nvSpPr>
         <p:spPr>
           <a:xfrm>
-            <a:off x="2286000" y="5715000"/>
-            <a:ext cx="3200400" cy="384048"/>
+            <a:off x="2286000" y="5129784"/>
+            <a:ext cx="3200400" cy="310896"/>
           </a:xfrm>
           <a:prstGeom prst="rect">
             <a:avLst/>
@@ -16929,6 +16929,168 @@
                 <a:ea typeface="Malgun Gothic" pitchFamily="34" charset="-122"/>
                 <a:cs typeface="Malgun Gothic" pitchFamily="34" charset="-120"/>
               </a:rPr>
+              <a:t>전국 (수도권 직영, 지방 현지 파트너 운영)</a:t>
+            </a:r>
+            <a:endParaRPr lang="en-US" sz="1100" dirty="0"/>
+          </a:p>
+        </p:txBody>
+      </p:sp>
+      <p:sp>
+        <p:nvSpPr>
+          <p:cNvPr id="24" name="Text 22"/>
+          <p:cNvSpPr txBox="1"/>
+          <p:nvPr/>
+        </p:nvSpPr>
+        <p:spPr>
+          <a:xfrm>
+            <a:off x="1005840" y="5495544"/>
+            <a:ext cx="1280160" cy="310896"/>
+          </a:xfrm>
+          <a:prstGeom prst="rect">
+            <a:avLst/>
+          </a:prstGeom>
+          <a:noFill/>
+          <a:ln/>
+        </p:spPr>
+        <p:txBody>
+          <a:bodyPr wrap="square" lIns="0" tIns="0" rIns="0" bIns="0" rtlCol="0" anchor="t"/>
+          <a:lstStyle/>
+          <a:p>
+            <a:pPr indent="0" marL="0">
+              <a:buNone/>
+            </a:pPr>
+            <a:r>
+              <a:rPr lang="en-US" sz="1100" b="1" dirty="0">
+                <a:solidFill>
+                  <a:srgbClr val="3182F6"/>
+                </a:solidFill>
+                <a:latin typeface="Malgun Gothic" pitchFamily="34" charset="0"/>
+                <a:ea typeface="Malgun Gothic" pitchFamily="34" charset="-122"/>
+                <a:cs typeface="Malgun Gothic" pitchFamily="34" charset="-120"/>
+              </a:rPr>
+              <a:t>홈페이지</a:t>
+            </a:r>
+            <a:endParaRPr lang="en-US" sz="1100" dirty="0"/>
+          </a:p>
+        </p:txBody>
+      </p:sp>
+      <p:sp>
+        <p:nvSpPr>
+          <p:cNvPr id="25" name="Text 23"/>
+          <p:cNvSpPr txBox="1"/>
+          <p:nvPr/>
+        </p:nvSpPr>
+        <p:spPr>
+          <a:xfrm>
+            <a:off x="2286000" y="5495544"/>
+            <a:ext cx="3200400" cy="310896"/>
+          </a:xfrm>
+          <a:prstGeom prst="rect">
+            <a:avLst/>
+          </a:prstGeom>
+          <a:noFill/>
+          <a:ln/>
+        </p:spPr>
+        <p:txBody>
+          <a:bodyPr wrap="square" lIns="0" tIns="0" rIns="0" bIns="0" rtlCol="0" anchor="t"/>
+          <a:lstStyle/>
+          <a:p>
+            <a:pPr indent="0" marL="0">
+              <a:lnSpc>
+                <a:spcPct val="120000"/>
+              </a:lnSpc>
+              <a:buNone/>
+            </a:pPr>
+            <a:r>
+              <a:rPr lang="en-US" sz="1100" dirty="0">
+                <a:solidFill>
+                  <a:srgbClr val="0F172A"/>
+                </a:solidFill>
+                <a:latin typeface="Malgun Gothic" pitchFamily="34" charset="0"/>
+                <a:ea typeface="Malgun Gothic" pitchFamily="34" charset="-122"/>
+                <a:cs typeface="Malgun Gothic" pitchFamily="34" charset="-120"/>
+              </a:rPr>
+              <a:t>www.flitunion.com</a:t>
+            </a:r>
+            <a:endParaRPr lang="en-US" sz="1100" dirty="0"/>
+          </a:p>
+        </p:txBody>
+      </p:sp>
+      <p:sp>
+        <p:nvSpPr>
+          <p:cNvPr id="26" name="Text 24"/>
+          <p:cNvSpPr txBox="1"/>
+          <p:nvPr/>
+        </p:nvSpPr>
+        <p:spPr>
+          <a:xfrm>
+            <a:off x="1005840" y="5861304"/>
+            <a:ext cx="1280160" cy="310896"/>
+          </a:xfrm>
+          <a:prstGeom prst="rect">
+            <a:avLst/>
+          </a:prstGeom>
+          <a:noFill/>
+          <a:ln/>
+        </p:spPr>
+        <p:txBody>
+          <a:bodyPr wrap="square" lIns="0" tIns="0" rIns="0" bIns="0" rtlCol="0" anchor="t"/>
+          <a:lstStyle/>
+          <a:p>
+            <a:pPr indent="0" marL="0">
+              <a:buNone/>
+            </a:pPr>
+            <a:r>
+              <a:rPr lang="en-US" sz="1100" b="1" dirty="0">
+                <a:solidFill>
+                  <a:srgbClr val="3182F6"/>
+                </a:solidFill>
+                <a:latin typeface="Malgun Gothic" pitchFamily="34" charset="0"/>
+                <a:ea typeface="Malgun Gothic" pitchFamily="34" charset="-122"/>
+                <a:cs typeface="Malgun Gothic" pitchFamily="34" charset="-120"/>
+              </a:rPr>
+              <a:t>이메일</a:t>
+            </a:r>
+            <a:endParaRPr lang="en-US" sz="1100" dirty="0"/>
+          </a:p>
+        </p:txBody>
+      </p:sp>
+      <p:sp>
+        <p:nvSpPr>
+          <p:cNvPr id="27" name="Text 25"/>
+          <p:cNvSpPr txBox="1"/>
+          <p:nvPr/>
+        </p:nvSpPr>
+        <p:spPr>
+          <a:xfrm>
+            <a:off x="2286000" y="5861304"/>
+            <a:ext cx="3200400" cy="310896"/>
+          </a:xfrm>
+          <a:prstGeom prst="rect">
+            <a:avLst/>
+          </a:prstGeom>
+          <a:noFill/>
+          <a:ln/>
+        </p:spPr>
+        <p:txBody>
+          <a:bodyPr wrap="square" lIns="0" tIns="0" rIns="0" bIns="0" rtlCol="0" anchor="t"/>
+          <a:lstStyle/>
+          <a:p>
+            <a:pPr indent="0" marL="0">
+              <a:lnSpc>
+                <a:spcPct val="120000"/>
+              </a:lnSpc>
+              <a:buNone/>
+            </a:pPr>
+            <a:r>
+              <a:rPr lang="en-US" sz="1100" dirty="0">
+                <a:solidFill>
+                  <a:srgbClr val="0F172A"/>
+                </a:solidFill>
+                <a:latin typeface="Malgun Gothic" pitchFamily="34" charset="0"/>
+                <a:ea typeface="Malgun Gothic" pitchFamily="34" charset="-122"/>
+                <a:cs typeface="Malgun Gothic" pitchFamily="34" charset="-120"/>
+              </a:rPr>
               <a:t>hello@flitunion.com</a:t>
             </a:r>
             <a:endParaRPr lang="en-US" sz="1100" dirty="0"/>
@@ -16937,7 +17099,7 @@
       </p:sp>
       <p:sp>
         <p:nvSpPr>
-          <p:cNvPr id="24" name="Shape 22"/>
+          <p:cNvPr id="28" name="Shape 26"/>
           <p:cNvSpPr/>
           <p:nvPr/>
         </p:nvSpPr>
@@ -16964,7 +17126,7 @@
       </p:sp>
       <p:sp>
         <p:nvSpPr>
-          <p:cNvPr id="25" name="Text 23"/>
+          <p:cNvPr id="29" name="Text 27"/>
           <p:cNvSpPr txBox="1"/>
           <p:nvPr/>
         </p:nvSpPr>
@@ -17003,7 +17165,7 @@
       </p:sp>
       <p:sp>
         <p:nvSpPr>
-          <p:cNvPr id="26" name="Text 24"/>
+          <p:cNvPr id="30" name="Text 28"/>
           <p:cNvSpPr txBox="1"/>
           <p:nvPr/>
         </p:nvSpPr>
@@ -17042,7 +17204,7 @@
       </p:sp>
       <p:sp>
         <p:nvSpPr>
-          <p:cNvPr id="27" name="Text 25"/>
+          <p:cNvPr id="31" name="Text 29"/>
           <p:cNvSpPr txBox="1"/>
           <p:nvPr/>
         </p:nvSpPr>
@@ -17081,7 +17243,7 @@
       </p:sp>
       <p:sp>
         <p:nvSpPr>
-          <p:cNvPr id="28" name="Shape 26"/>
+          <p:cNvPr id="32" name="Shape 30"/>
           <p:cNvSpPr/>
           <p:nvPr/>
         </p:nvSpPr>
@@ -17108,7 +17270,7 @@
       </p:sp>
       <p:sp>
         <p:nvSpPr>
-          <p:cNvPr id="29" name="Text 27"/>
+          <p:cNvPr id="33" name="Text 31"/>
           <p:cNvSpPr txBox="1"/>
           <p:nvPr/>
         </p:nvSpPr>
@@ -17147,7 +17309,7 @@
       </p:sp>
       <p:sp>
         <p:nvSpPr>
-          <p:cNvPr id="30" name="Text 28"/>
+          <p:cNvPr id="34" name="Text 32"/>
           <p:cNvSpPr txBox="1"/>
           <p:nvPr/>
         </p:nvSpPr>
@@ -17186,7 +17348,7 @@
       </p:sp>
       <p:sp>
         <p:nvSpPr>
-          <p:cNvPr id="31" name="Text 29"/>
+          <p:cNvPr id="35" name="Text 33"/>
           <p:cNvSpPr txBox="1"/>
           <p:nvPr/>
         </p:nvSpPr>
@@ -17225,7 +17387,7 @@
       </p:sp>
       <p:sp>
         <p:nvSpPr>
-          <p:cNvPr id="32" name="Shape 30"/>
+          <p:cNvPr id="36" name="Shape 34"/>
           <p:cNvSpPr/>
           <p:nvPr/>
         </p:nvSpPr>
@@ -17252,7 +17414,7 @@
       </p:sp>
       <p:sp>
         <p:nvSpPr>
-          <p:cNvPr id="33" name="Text 31"/>
+          <p:cNvPr id="37" name="Text 35"/>
           <p:cNvSpPr txBox="1"/>
           <p:nvPr/>
         </p:nvSpPr>
@@ -17291,7 +17453,7 @@
       </p:sp>
       <p:sp>
         <p:nvSpPr>
-          <p:cNvPr id="34" name="Text 32"/>
+          <p:cNvPr id="38" name="Text 36"/>
           <p:cNvSpPr txBox="1"/>
           <p:nvPr/>
         </p:nvSpPr>
@@ -17330,7 +17492,7 @@
       </p:sp>
       <p:sp>
         <p:nvSpPr>
-          <p:cNvPr id="35" name="Text 33"/>
+          <p:cNvPr id="39" name="Text 37"/>
           <p:cNvSpPr txBox="1"/>
           <p:nvPr/>
         </p:nvSpPr>
@@ -17369,7 +17531,7 @@
       </p:sp>
       <p:sp>
         <p:nvSpPr>
-          <p:cNvPr id="36" name="Shape 34"/>
+          <p:cNvPr id="40" name="Shape 38"/>
           <p:cNvSpPr/>
           <p:nvPr/>
         </p:nvSpPr>
@@ -17396,7 +17558,7 @@
       </p:sp>
       <p:sp>
         <p:nvSpPr>
-          <p:cNvPr id="37" name="Text 35"/>
+          <p:cNvPr id="41" name="Text 39"/>
           <p:cNvSpPr txBox="1"/>
           <p:nvPr/>
         </p:nvSpPr>
@@ -17435,7 +17597,7 @@
       </p:sp>
       <p:sp>
         <p:nvSpPr>
-          <p:cNvPr id="38" name="Text 36"/>
+          <p:cNvPr id="42" name="Text 40"/>
           <p:cNvSpPr txBox="1"/>
           <p:nvPr/>
         </p:nvSpPr>
@@ -17474,7 +17636,7 @@
       </p:sp>
       <p:sp>
         <p:nvSpPr>
-          <p:cNvPr id="39" name="Text 37"/>
+          <p:cNvPr id="43" name="Text 41"/>
           <p:cNvSpPr txBox="1"/>
           <p:nvPr/>
         </p:nvSpPr>

--- a/docs/flitunion-company-profile.pptx
+++ b/docs/flitunion-company-profile.pptx
@@ -16398,7 +16398,7 @@
         </p:nvSpPr>
         <p:spPr>
           <a:xfrm>
-            <a:off x="1005840" y="2651760"/>
+            <a:off x="1005840" y="2587752"/>
             <a:ext cx="2743200" cy="320040"/>
           </a:xfrm>
           <a:prstGeom prst="rect">
@@ -16437,24 +16437,24 @@
         </p:nvSpPr>
         <p:spPr>
           <a:xfrm>
-            <a:off x="1005840" y="3108960"/>
-            <a:ext cx="1280160" cy="310896"/>
-          </a:xfrm>
-          <a:prstGeom prst="rect">
-            <a:avLst/>
-          </a:prstGeom>
-          <a:noFill/>
-          <a:ln/>
-        </p:spPr>
-        <p:txBody>
-          <a:bodyPr wrap="square" lIns="0" tIns="0" rIns="0" bIns="0" rtlCol="0" anchor="t"/>
-          <a:lstStyle/>
-          <a:p>
-            <a:pPr indent="0" marL="0">
-              <a:buNone/>
-            </a:pPr>
-            <a:r>
-              <a:rPr lang="en-US" sz="1100" b="1" dirty="0">
+            <a:off x="1005840" y="2990088"/>
+            <a:ext cx="1280160" cy="283464"/>
+          </a:xfrm>
+          <a:prstGeom prst="rect">
+            <a:avLst/>
+          </a:prstGeom>
+          <a:noFill/>
+          <a:ln/>
+        </p:spPr>
+        <p:txBody>
+          <a:bodyPr wrap="square" lIns="0" tIns="0" rIns="0" bIns="0" rtlCol="0" anchor="t"/>
+          <a:lstStyle/>
+          <a:p>
+            <a:pPr indent="0" marL="0">
+              <a:buNone/>
+            </a:pPr>
+            <a:r>
+              <a:rPr lang="en-US" sz="1050" b="1" dirty="0">
                 <a:solidFill>
                   <a:srgbClr val="3182F6"/>
                 </a:solidFill>
@@ -16464,7 +16464,7 @@
               </a:rPr>
               <a:t>회사명</a:t>
             </a:r>
-            <a:endParaRPr lang="en-US" sz="1100" dirty="0"/>
+            <a:endParaRPr lang="en-US" sz="1050" dirty="0"/>
           </a:p>
         </p:txBody>
       </p:sp>
@@ -16476,27 +16476,24 @@
         </p:nvSpPr>
         <p:spPr>
           <a:xfrm>
-            <a:off x="2286000" y="3108960"/>
-            <a:ext cx="3200400" cy="310896"/>
-          </a:xfrm>
-          <a:prstGeom prst="rect">
-            <a:avLst/>
-          </a:prstGeom>
-          <a:noFill/>
-          <a:ln/>
-        </p:spPr>
-        <p:txBody>
-          <a:bodyPr wrap="square" lIns="0" tIns="0" rIns="0" bIns="0" rtlCol="0" anchor="t"/>
-          <a:lstStyle/>
-          <a:p>
-            <a:pPr indent="0" marL="0">
-              <a:lnSpc>
-                <a:spcPct val="120000"/>
-              </a:lnSpc>
-              <a:buNone/>
-            </a:pPr>
-            <a:r>
-              <a:rPr lang="en-US" sz="1100" dirty="0">
+            <a:off x="2286000" y="2990088"/>
+            <a:ext cx="3200400" cy="283464"/>
+          </a:xfrm>
+          <a:prstGeom prst="rect">
+            <a:avLst/>
+          </a:prstGeom>
+          <a:noFill/>
+          <a:ln/>
+        </p:spPr>
+        <p:txBody>
+          <a:bodyPr wrap="square" lIns="0" tIns="0" rIns="0" bIns="0" rtlCol="0" anchor="t"/>
+          <a:lstStyle/>
+          <a:p>
+            <a:pPr indent="0" marL="0">
+              <a:buNone/>
+            </a:pPr>
+            <a:r>
+              <a:rPr lang="en-US" sz="1050" dirty="0">
                 <a:solidFill>
                   <a:srgbClr val="0F172A"/>
                 </a:solidFill>
@@ -16506,7 +16503,7 @@
               </a:rPr>
               <a:t>플릿 유니온 (Flit Union)</a:t>
             </a:r>
-            <a:endParaRPr lang="en-US" sz="1100" dirty="0"/>
+            <a:endParaRPr lang="en-US" sz="1050" dirty="0"/>
           </a:p>
         </p:txBody>
       </p:sp>
@@ -16518,24 +16515,24 @@
         </p:nvSpPr>
         <p:spPr>
           <a:xfrm>
-            <a:off x="1005840" y="3474720"/>
-            <a:ext cx="1280160" cy="310896"/>
-          </a:xfrm>
-          <a:prstGeom prst="rect">
-            <a:avLst/>
-          </a:prstGeom>
-          <a:noFill/>
-          <a:ln/>
-        </p:spPr>
-        <p:txBody>
-          <a:bodyPr wrap="square" lIns="0" tIns="0" rIns="0" bIns="0" rtlCol="0" anchor="t"/>
-          <a:lstStyle/>
-          <a:p>
-            <a:pPr indent="0" marL="0">
-              <a:buNone/>
-            </a:pPr>
-            <a:r>
-              <a:rPr lang="en-US" sz="1100" b="1" dirty="0">
+            <a:off x="1005840" y="3310128"/>
+            <a:ext cx="1280160" cy="283464"/>
+          </a:xfrm>
+          <a:prstGeom prst="rect">
+            <a:avLst/>
+          </a:prstGeom>
+          <a:noFill/>
+          <a:ln/>
+        </p:spPr>
+        <p:txBody>
+          <a:bodyPr wrap="square" lIns="0" tIns="0" rIns="0" bIns="0" rtlCol="0" anchor="t"/>
+          <a:lstStyle/>
+          <a:p>
+            <a:pPr indent="0" marL="0">
+              <a:buNone/>
+            </a:pPr>
+            <a:r>
+              <a:rPr lang="en-US" sz="1050" b="1" dirty="0">
                 <a:solidFill>
                   <a:srgbClr val="3182F6"/>
                 </a:solidFill>
@@ -16545,7 +16542,7 @@
               </a:rPr>
               <a:t>대표자</a:t>
             </a:r>
-            <a:endParaRPr lang="en-US" sz="1100" dirty="0"/>
+            <a:endParaRPr lang="en-US" sz="1050" dirty="0"/>
           </a:p>
         </p:txBody>
       </p:sp>
@@ -16557,27 +16554,24 @@
         </p:nvSpPr>
         <p:spPr>
           <a:xfrm>
-            <a:off x="2286000" y="3474720"/>
-            <a:ext cx="3200400" cy="310896"/>
-          </a:xfrm>
-          <a:prstGeom prst="rect">
-            <a:avLst/>
-          </a:prstGeom>
-          <a:noFill/>
-          <a:ln/>
-        </p:spPr>
-        <p:txBody>
-          <a:bodyPr wrap="square" lIns="0" tIns="0" rIns="0" bIns="0" rtlCol="0" anchor="t"/>
-          <a:lstStyle/>
-          <a:p>
-            <a:pPr indent="0" marL="0">
-              <a:lnSpc>
-                <a:spcPct val="120000"/>
-              </a:lnSpc>
-              <a:buNone/>
-            </a:pPr>
-            <a:r>
-              <a:rPr lang="en-US" sz="1100" dirty="0">
+            <a:off x="2286000" y="3310128"/>
+            <a:ext cx="3200400" cy="283464"/>
+          </a:xfrm>
+          <a:prstGeom prst="rect">
+            <a:avLst/>
+          </a:prstGeom>
+          <a:noFill/>
+          <a:ln/>
+        </p:spPr>
+        <p:txBody>
+          <a:bodyPr wrap="square" lIns="0" tIns="0" rIns="0" bIns="0" rtlCol="0" anchor="t"/>
+          <a:lstStyle/>
+          <a:p>
+            <a:pPr indent="0" marL="0">
+              <a:buNone/>
+            </a:pPr>
+            <a:r>
+              <a:rPr lang="en-US" sz="1050" dirty="0">
                 <a:solidFill>
                   <a:srgbClr val="0F172A"/>
                 </a:solidFill>
@@ -16587,7 +16581,7 @@
               </a:rPr>
               <a:t>이아로</a:t>
             </a:r>
-            <a:endParaRPr lang="en-US" sz="1100" dirty="0"/>
+            <a:endParaRPr lang="en-US" sz="1050" dirty="0"/>
           </a:p>
         </p:txBody>
       </p:sp>
@@ -16599,24 +16593,24 @@
         </p:nvSpPr>
         <p:spPr>
           <a:xfrm>
-            <a:off x="1005840" y="3840480"/>
-            <a:ext cx="1280160" cy="310896"/>
-          </a:xfrm>
-          <a:prstGeom prst="rect">
-            <a:avLst/>
-          </a:prstGeom>
-          <a:noFill/>
-          <a:ln/>
-        </p:spPr>
-        <p:txBody>
-          <a:bodyPr wrap="square" lIns="0" tIns="0" rIns="0" bIns="0" rtlCol="0" anchor="t"/>
-          <a:lstStyle/>
-          <a:p>
-            <a:pPr indent="0" marL="0">
-              <a:buNone/>
-            </a:pPr>
-            <a:r>
-              <a:rPr lang="en-US" sz="1100" b="1" dirty="0">
+            <a:off x="1005840" y="3630168"/>
+            <a:ext cx="1280160" cy="283464"/>
+          </a:xfrm>
+          <a:prstGeom prst="rect">
+            <a:avLst/>
+          </a:prstGeom>
+          <a:noFill/>
+          <a:ln/>
+        </p:spPr>
+        <p:txBody>
+          <a:bodyPr wrap="square" lIns="0" tIns="0" rIns="0" bIns="0" rtlCol="0" anchor="t"/>
+          <a:lstStyle/>
+          <a:p>
+            <a:pPr indent="0" marL="0">
+              <a:buNone/>
+            </a:pPr>
+            <a:r>
+              <a:rPr lang="en-US" sz="1050" b="1" dirty="0">
                 <a:solidFill>
                   <a:srgbClr val="3182F6"/>
                 </a:solidFill>
@@ -16626,7 +16620,7 @@
               </a:rPr>
               <a:t>설립일</a:t>
             </a:r>
-            <a:endParaRPr lang="en-US" sz="1100" dirty="0"/>
+            <a:endParaRPr lang="en-US" sz="1050" dirty="0"/>
           </a:p>
         </p:txBody>
       </p:sp>
@@ -16638,27 +16632,24 @@
         </p:nvSpPr>
         <p:spPr>
           <a:xfrm>
-            <a:off x="2286000" y="3840480"/>
-            <a:ext cx="3200400" cy="310896"/>
-          </a:xfrm>
-          <a:prstGeom prst="rect">
-            <a:avLst/>
-          </a:prstGeom>
-          <a:noFill/>
-          <a:ln/>
-        </p:spPr>
-        <p:txBody>
-          <a:bodyPr wrap="square" lIns="0" tIns="0" rIns="0" bIns="0" rtlCol="0" anchor="t"/>
-          <a:lstStyle/>
-          <a:p>
-            <a:pPr indent="0" marL="0">
-              <a:lnSpc>
-                <a:spcPct val="120000"/>
-              </a:lnSpc>
-              <a:buNone/>
-            </a:pPr>
-            <a:r>
-              <a:rPr lang="en-US" sz="1100" dirty="0">
+            <a:off x="2286000" y="3630168"/>
+            <a:ext cx="3200400" cy="283464"/>
+          </a:xfrm>
+          <a:prstGeom prst="rect">
+            <a:avLst/>
+          </a:prstGeom>
+          <a:noFill/>
+          <a:ln/>
+        </p:spPr>
+        <p:txBody>
+          <a:bodyPr wrap="square" lIns="0" tIns="0" rIns="0" bIns="0" rtlCol="0" anchor="t"/>
+          <a:lstStyle/>
+          <a:p>
+            <a:pPr indent="0" marL="0">
+              <a:buNone/>
+            </a:pPr>
+            <a:r>
+              <a:rPr lang="en-US" sz="1050" dirty="0">
                 <a:solidFill>
                   <a:srgbClr val="0F172A"/>
                 </a:solidFill>
@@ -16668,7 +16659,7 @@
               </a:rPr>
               <a:t>2024년 8월</a:t>
             </a:r>
-            <a:endParaRPr lang="en-US" sz="1100" dirty="0"/>
+            <a:endParaRPr lang="en-US" sz="1050" dirty="0"/>
           </a:p>
         </p:txBody>
       </p:sp>
@@ -16680,24 +16671,24 @@
         </p:nvSpPr>
         <p:spPr>
           <a:xfrm>
-            <a:off x="1005840" y="4206240"/>
-            <a:ext cx="1280160" cy="502920"/>
-          </a:xfrm>
-          <a:prstGeom prst="rect">
-            <a:avLst/>
-          </a:prstGeom>
-          <a:noFill/>
-          <a:ln/>
-        </p:spPr>
-        <p:txBody>
-          <a:bodyPr wrap="square" lIns="0" tIns="0" rIns="0" bIns="0" rtlCol="0" anchor="t"/>
-          <a:lstStyle/>
-          <a:p>
-            <a:pPr indent="0" marL="0">
-              <a:buNone/>
-            </a:pPr>
-            <a:r>
-              <a:rPr lang="en-US" sz="1100" b="1" dirty="0">
+            <a:off x="1005840" y="3950208"/>
+            <a:ext cx="1280160" cy="283464"/>
+          </a:xfrm>
+          <a:prstGeom prst="rect">
+            <a:avLst/>
+          </a:prstGeom>
+          <a:noFill/>
+          <a:ln/>
+        </p:spPr>
+        <p:txBody>
+          <a:bodyPr wrap="square" lIns="0" tIns="0" rIns="0" bIns="0" rtlCol="0" anchor="t"/>
+          <a:lstStyle/>
+          <a:p>
+            <a:pPr indent="0" marL="0">
+              <a:buNone/>
+            </a:pPr>
+            <a:r>
+              <a:rPr lang="en-US" sz="1050" b="1" dirty="0">
                 <a:solidFill>
                   <a:srgbClr val="3182F6"/>
                 </a:solidFill>
@@ -16705,41 +16696,194 @@
                 <a:ea typeface="Malgun Gothic" pitchFamily="34" charset="-122"/>
                 <a:cs typeface="Malgun Gothic" pitchFamily="34" charset="-120"/>
               </a:rPr>
+              <a:t>사업자등록번호</a:t>
+            </a:r>
+            <a:endParaRPr lang="en-US" sz="1050" dirty="0"/>
+          </a:p>
+        </p:txBody>
+      </p:sp>
+      <p:sp>
+        <p:nvSpPr>
+          <p:cNvPr id="19" name="Text 17"/>
+          <p:cNvSpPr txBox="1"/>
+          <p:nvPr/>
+        </p:nvSpPr>
+        <p:spPr>
+          <a:xfrm>
+            <a:off x="2286000" y="3950208"/>
+            <a:ext cx="3200400" cy="283464"/>
+          </a:xfrm>
+          <a:prstGeom prst="rect">
+            <a:avLst/>
+          </a:prstGeom>
+          <a:noFill/>
+          <a:ln/>
+        </p:spPr>
+        <p:txBody>
+          <a:bodyPr wrap="square" lIns="0" tIns="0" rIns="0" bIns="0" rtlCol="0" anchor="t"/>
+          <a:lstStyle/>
+          <a:p>
+            <a:pPr indent="0" marL="0">
+              <a:buNone/>
+            </a:pPr>
+            <a:r>
+              <a:rPr lang="en-US" sz="1050" dirty="0">
+                <a:solidFill>
+                  <a:srgbClr val="0F172A"/>
+                </a:solidFill>
+                <a:latin typeface="Malgun Gothic" pitchFamily="34" charset="0"/>
+                <a:ea typeface="Malgun Gothic" pitchFamily="34" charset="-122"/>
+                <a:cs typeface="Malgun Gothic" pitchFamily="34" charset="-120"/>
+              </a:rPr>
+              <a:t>655-26-02147</a:t>
+            </a:r>
+            <a:endParaRPr lang="en-US" sz="1050" dirty="0"/>
+          </a:p>
+        </p:txBody>
+      </p:sp>
+      <p:sp>
+        <p:nvSpPr>
+          <p:cNvPr id="20" name="Text 18"/>
+          <p:cNvSpPr txBox="1"/>
+          <p:nvPr/>
+        </p:nvSpPr>
+        <p:spPr>
+          <a:xfrm>
+            <a:off x="1005840" y="4270248"/>
+            <a:ext cx="1280160" cy="283464"/>
+          </a:xfrm>
+          <a:prstGeom prst="rect">
+            <a:avLst/>
+          </a:prstGeom>
+          <a:noFill/>
+          <a:ln/>
+        </p:spPr>
+        <p:txBody>
+          <a:bodyPr wrap="square" lIns="0" tIns="0" rIns="0" bIns="0" rtlCol="0" anchor="t"/>
+          <a:lstStyle/>
+          <a:p>
+            <a:pPr indent="0" marL="0">
+              <a:buNone/>
+            </a:pPr>
+            <a:r>
+              <a:rPr lang="en-US" sz="1050" b="1" dirty="0">
+                <a:solidFill>
+                  <a:srgbClr val="3182F6"/>
+                </a:solidFill>
+                <a:latin typeface="Malgun Gothic" pitchFamily="34" charset="0"/>
+                <a:ea typeface="Malgun Gothic" pitchFamily="34" charset="-122"/>
+                <a:cs typeface="Malgun Gothic" pitchFamily="34" charset="-120"/>
+              </a:rPr>
+              <a:t>소재지</a:t>
+            </a:r>
+            <a:endParaRPr lang="en-US" sz="1050" dirty="0"/>
+          </a:p>
+        </p:txBody>
+      </p:sp>
+      <p:sp>
+        <p:nvSpPr>
+          <p:cNvPr id="21" name="Text 19"/>
+          <p:cNvSpPr txBox="1"/>
+          <p:nvPr/>
+        </p:nvSpPr>
+        <p:spPr>
+          <a:xfrm>
+            <a:off x="2286000" y="4270248"/>
+            <a:ext cx="3200400" cy="283464"/>
+          </a:xfrm>
+          <a:prstGeom prst="rect">
+            <a:avLst/>
+          </a:prstGeom>
+          <a:noFill/>
+          <a:ln/>
+        </p:spPr>
+        <p:txBody>
+          <a:bodyPr wrap="square" lIns="0" tIns="0" rIns="0" bIns="0" rtlCol="0" anchor="t"/>
+          <a:lstStyle/>
+          <a:p>
+            <a:pPr indent="0" marL="0">
+              <a:buNone/>
+            </a:pPr>
+            <a:r>
+              <a:rPr lang="en-US" sz="1050" dirty="0">
+                <a:solidFill>
+                  <a:srgbClr val="0F172A"/>
+                </a:solidFill>
+                <a:latin typeface="Malgun Gothic" pitchFamily="34" charset="0"/>
+                <a:ea typeface="Malgun Gothic" pitchFamily="34" charset="-122"/>
+                <a:cs typeface="Malgun Gothic" pitchFamily="34" charset="-120"/>
+              </a:rPr>
+              <a:t>서울특별시 도봉구</a:t>
+            </a:r>
+            <a:endParaRPr lang="en-US" sz="1050" dirty="0"/>
+          </a:p>
+        </p:txBody>
+      </p:sp>
+      <p:sp>
+        <p:nvSpPr>
+          <p:cNvPr id="22" name="Text 20"/>
+          <p:cNvSpPr txBox="1"/>
+          <p:nvPr/>
+        </p:nvSpPr>
+        <p:spPr>
+          <a:xfrm>
+            <a:off x="1005840" y="4590288"/>
+            <a:ext cx="1280160" cy="283464"/>
+          </a:xfrm>
+          <a:prstGeom prst="rect">
+            <a:avLst/>
+          </a:prstGeom>
+          <a:noFill/>
+          <a:ln/>
+        </p:spPr>
+        <p:txBody>
+          <a:bodyPr wrap="square" lIns="0" tIns="0" rIns="0" bIns="0" rtlCol="0" anchor="t"/>
+          <a:lstStyle/>
+          <a:p>
+            <a:pPr indent="0" marL="0">
+              <a:buNone/>
+            </a:pPr>
+            <a:r>
+              <a:rPr lang="en-US" sz="1050" b="1" dirty="0">
+                <a:solidFill>
+                  <a:srgbClr val="3182F6"/>
+                </a:solidFill>
+                <a:latin typeface="Malgun Gothic" pitchFamily="34" charset="0"/>
+                <a:ea typeface="Malgun Gothic" pitchFamily="34" charset="-122"/>
+                <a:cs typeface="Malgun Gothic" pitchFamily="34" charset="-120"/>
+              </a:rPr>
               <a:t>사업 영역</a:t>
             </a:r>
-            <a:endParaRPr lang="en-US" sz="1100" dirty="0"/>
-          </a:p>
-        </p:txBody>
-      </p:sp>
-      <p:sp>
-        <p:nvSpPr>
-          <p:cNvPr id="19" name="Text 17"/>
-          <p:cNvSpPr txBox="1"/>
-          <p:nvPr/>
-        </p:nvSpPr>
-        <p:spPr>
-          <a:xfrm>
-            <a:off x="2286000" y="4206240"/>
-            <a:ext cx="3200400" cy="502920"/>
-          </a:xfrm>
-          <a:prstGeom prst="rect">
-            <a:avLst/>
-          </a:prstGeom>
-          <a:noFill/>
-          <a:ln/>
-        </p:spPr>
-        <p:txBody>
-          <a:bodyPr wrap="square" lIns="0" tIns="0" rIns="0" bIns="0" rtlCol="0" anchor="t"/>
-          <a:lstStyle/>
-          <a:p>
-            <a:pPr indent="0" marL="0">
-              <a:lnSpc>
-                <a:spcPct val="120000"/>
-              </a:lnSpc>
-              <a:buNone/>
-            </a:pPr>
-            <a:r>
-              <a:rPr lang="en-US" sz="1100" dirty="0">
+            <a:endParaRPr lang="en-US" sz="1050" dirty="0"/>
+          </a:p>
+        </p:txBody>
+      </p:sp>
+      <p:sp>
+        <p:nvSpPr>
+          <p:cNvPr id="23" name="Text 21"/>
+          <p:cNvSpPr txBox="1"/>
+          <p:nvPr/>
+        </p:nvSpPr>
+        <p:spPr>
+          <a:xfrm>
+            <a:off x="2286000" y="4590288"/>
+            <a:ext cx="3200400" cy="283464"/>
+          </a:xfrm>
+          <a:prstGeom prst="rect">
+            <a:avLst/>
+          </a:prstGeom>
+          <a:noFill/>
+          <a:ln/>
+        </p:spPr>
+        <p:txBody>
+          <a:bodyPr wrap="square" lIns="0" tIns="0" rIns="0" bIns="0" rtlCol="0" anchor="t"/>
+          <a:lstStyle/>
+          <a:p>
+            <a:pPr indent="0" marL="0">
+              <a:buNone/>
+            </a:pPr>
+            <a:r>
+              <a:rPr lang="en-US" sz="1050" dirty="0">
                 <a:solidFill>
                   <a:srgbClr val="0F172A"/>
                 </a:solidFill>
@@ -16747,19 +16891,77 @@
                 <a:ea typeface="Malgun Gothic" pitchFamily="34" charset="-122"/>
                 <a:cs typeface="Malgun Gothic" pitchFamily="34" charset="-120"/>
               </a:rPr>
-              <a:t>플리마켓·야시장 운영 대행, 푸드트럭 섭외,</a:t>
-            </a:r>
-            <a:endParaRPr lang="en-US" sz="1100" dirty="0"/>
-          </a:p>
-          <a:p>
-            <a:pPr indent="0" marL="0">
-              <a:lnSpc>
-                <a:spcPct val="120000"/>
-              </a:lnSpc>
-              <a:buNone/>
-            </a:pPr>
-            <a:r>
-              <a:rPr lang="en-US" sz="1100" dirty="0">
+              <a:t>마켓 운영 대행 · 푸드트럭 섭외 · 장비 렌탈</a:t>
+            </a:r>
+            <a:endParaRPr lang="en-US" sz="1050" dirty="0"/>
+          </a:p>
+        </p:txBody>
+      </p:sp>
+      <p:sp>
+        <p:nvSpPr>
+          <p:cNvPr id="24" name="Text 22"/>
+          <p:cNvSpPr txBox="1"/>
+          <p:nvPr/>
+        </p:nvSpPr>
+        <p:spPr>
+          <a:xfrm>
+            <a:off x="1005840" y="4910328"/>
+            <a:ext cx="1280160" cy="283464"/>
+          </a:xfrm>
+          <a:prstGeom prst="rect">
+            <a:avLst/>
+          </a:prstGeom>
+          <a:noFill/>
+          <a:ln/>
+        </p:spPr>
+        <p:txBody>
+          <a:bodyPr wrap="square" lIns="0" tIns="0" rIns="0" bIns="0" rtlCol="0" anchor="t"/>
+          <a:lstStyle/>
+          <a:p>
+            <a:pPr indent="0" marL="0">
+              <a:buNone/>
+            </a:pPr>
+            <a:r>
+              <a:rPr lang="en-US" sz="1050" b="1" dirty="0">
+                <a:solidFill>
+                  <a:srgbClr val="3182F6"/>
+                </a:solidFill>
+                <a:latin typeface="Malgun Gothic" pitchFamily="34" charset="0"/>
+                <a:ea typeface="Malgun Gothic" pitchFamily="34" charset="-122"/>
+                <a:cs typeface="Malgun Gothic" pitchFamily="34" charset="-120"/>
+              </a:rPr>
+              <a:t>운영 플랫폼</a:t>
+            </a:r>
+            <a:endParaRPr lang="en-US" sz="1050" dirty="0"/>
+          </a:p>
+        </p:txBody>
+      </p:sp>
+      <p:sp>
+        <p:nvSpPr>
+          <p:cNvPr id="25" name="Text 23"/>
+          <p:cNvSpPr txBox="1"/>
+          <p:nvPr/>
+        </p:nvSpPr>
+        <p:spPr>
+          <a:xfrm>
+            <a:off x="2286000" y="4910328"/>
+            <a:ext cx="3200400" cy="283464"/>
+          </a:xfrm>
+          <a:prstGeom prst="rect">
+            <a:avLst/>
+          </a:prstGeom>
+          <a:noFill/>
+          <a:ln/>
+        </p:spPr>
+        <p:txBody>
+          <a:bodyPr wrap="square" lIns="0" tIns="0" rIns="0" bIns="0" rtlCol="0" anchor="t"/>
+          <a:lstStyle/>
+          <a:p>
+            <a:pPr indent="0" marL="0">
+              <a:buNone/>
+            </a:pPr>
+            <a:r>
+              <a:rPr lang="en-US" sz="1050" dirty="0">
                 <a:solidFill>
                   <a:srgbClr val="0F172A"/>
                 </a:solidFill>
@@ -16767,38 +16969,38 @@
                 <a:ea typeface="Malgun Gothic" pitchFamily="34" charset="-122"/>
                 <a:cs typeface="Malgun Gothic" pitchFamily="34" charset="-120"/>
               </a:rPr>
-              <a:t>행사 물품 렌탈</a:t>
-            </a:r>
-            <a:endParaRPr lang="en-US" sz="1100" dirty="0"/>
-          </a:p>
-        </p:txBody>
-      </p:sp>
-      <p:sp>
-        <p:nvSpPr>
-          <p:cNvPr id="20" name="Text 18"/>
-          <p:cNvSpPr txBox="1"/>
-          <p:nvPr/>
-        </p:nvSpPr>
-        <p:spPr>
-          <a:xfrm>
-            <a:off x="1005840" y="4764024"/>
-            <a:ext cx="1280160" cy="310896"/>
-          </a:xfrm>
-          <a:prstGeom prst="rect">
-            <a:avLst/>
-          </a:prstGeom>
-          <a:noFill/>
-          <a:ln/>
-        </p:spPr>
-        <p:txBody>
-          <a:bodyPr wrap="square" lIns="0" tIns="0" rIns="0" bIns="0" rtlCol="0" anchor="t"/>
-          <a:lstStyle/>
-          <a:p>
-            <a:pPr indent="0" marL="0">
-              <a:buNone/>
-            </a:pPr>
-            <a:r>
-              <a:rPr lang="en-US" sz="1100" b="1" dirty="0">
+              <a:t>플릿(Flit) 셀러 플랫폼 · app.flitunion.com</a:t>
+            </a:r>
+            <a:endParaRPr lang="en-US" sz="1050" dirty="0"/>
+          </a:p>
+        </p:txBody>
+      </p:sp>
+      <p:sp>
+        <p:nvSpPr>
+          <p:cNvPr id="26" name="Text 24"/>
+          <p:cNvSpPr txBox="1"/>
+          <p:nvPr/>
+        </p:nvSpPr>
+        <p:spPr>
+          <a:xfrm>
+            <a:off x="1005840" y="5230368"/>
+            <a:ext cx="1280160" cy="283464"/>
+          </a:xfrm>
+          <a:prstGeom prst="rect">
+            <a:avLst/>
+          </a:prstGeom>
+          <a:noFill/>
+          <a:ln/>
+        </p:spPr>
+        <p:txBody>
+          <a:bodyPr wrap="square" lIns="0" tIns="0" rIns="0" bIns="0" rtlCol="0" anchor="t"/>
+          <a:lstStyle/>
+          <a:p>
+            <a:pPr indent="0" marL="0">
+              <a:buNone/>
+            </a:pPr>
+            <a:r>
+              <a:rPr lang="en-US" sz="1050" b="1" dirty="0">
                 <a:solidFill>
                   <a:srgbClr val="3182F6"/>
                 </a:solidFill>
@@ -16806,41 +17008,38 @@
                 <a:ea typeface="Malgun Gothic" pitchFamily="34" charset="-122"/>
                 <a:cs typeface="Malgun Gothic" pitchFamily="34" charset="-120"/>
               </a:rPr>
-              <a:t>운영 플랫폼</a:t>
-            </a:r>
-            <a:endParaRPr lang="en-US" sz="1100" dirty="0"/>
-          </a:p>
-        </p:txBody>
-      </p:sp>
-      <p:sp>
-        <p:nvSpPr>
-          <p:cNvPr id="21" name="Text 19"/>
-          <p:cNvSpPr txBox="1"/>
-          <p:nvPr/>
-        </p:nvSpPr>
-        <p:spPr>
-          <a:xfrm>
-            <a:off x="2286000" y="4764024"/>
-            <a:ext cx="3200400" cy="310896"/>
-          </a:xfrm>
-          <a:prstGeom prst="rect">
-            <a:avLst/>
-          </a:prstGeom>
-          <a:noFill/>
-          <a:ln/>
-        </p:spPr>
-        <p:txBody>
-          <a:bodyPr wrap="square" lIns="0" tIns="0" rIns="0" bIns="0" rtlCol="0" anchor="t"/>
-          <a:lstStyle/>
-          <a:p>
-            <a:pPr indent="0" marL="0">
-              <a:lnSpc>
-                <a:spcPct val="120000"/>
-              </a:lnSpc>
-              <a:buNone/>
-            </a:pPr>
-            <a:r>
-              <a:rPr lang="en-US" sz="1100" dirty="0">
+              <a:t>서비스 지역</a:t>
+            </a:r>
+            <a:endParaRPr lang="en-US" sz="1050" dirty="0"/>
+          </a:p>
+        </p:txBody>
+      </p:sp>
+      <p:sp>
+        <p:nvSpPr>
+          <p:cNvPr id="27" name="Text 25"/>
+          <p:cNvSpPr txBox="1"/>
+          <p:nvPr/>
+        </p:nvSpPr>
+        <p:spPr>
+          <a:xfrm>
+            <a:off x="2286000" y="5230368"/>
+            <a:ext cx="3200400" cy="283464"/>
+          </a:xfrm>
+          <a:prstGeom prst="rect">
+            <a:avLst/>
+          </a:prstGeom>
+          <a:noFill/>
+          <a:ln/>
+        </p:spPr>
+        <p:txBody>
+          <a:bodyPr wrap="square" lIns="0" tIns="0" rIns="0" bIns="0" rtlCol="0" anchor="t"/>
+          <a:lstStyle/>
+          <a:p>
+            <a:pPr indent="0" marL="0">
+              <a:buNone/>
+            </a:pPr>
+            <a:r>
+              <a:rPr lang="en-US" sz="1050" dirty="0">
                 <a:solidFill>
                   <a:srgbClr val="0F172A"/>
                 </a:solidFill>
@@ -16848,38 +17047,38 @@
                 <a:ea typeface="Malgun Gothic" pitchFamily="34" charset="-122"/>
                 <a:cs typeface="Malgun Gothic" pitchFamily="34" charset="-120"/>
               </a:rPr>
-              <a:t>플릿(Flit) 셀러 플랫폼 · app.flitunion.com</a:t>
-            </a:r>
-            <a:endParaRPr lang="en-US" sz="1100" dirty="0"/>
-          </a:p>
-        </p:txBody>
-      </p:sp>
-      <p:sp>
-        <p:nvSpPr>
-          <p:cNvPr id="22" name="Text 20"/>
-          <p:cNvSpPr txBox="1"/>
-          <p:nvPr/>
-        </p:nvSpPr>
-        <p:spPr>
-          <a:xfrm>
-            <a:off x="1005840" y="5129784"/>
-            <a:ext cx="1280160" cy="310896"/>
-          </a:xfrm>
-          <a:prstGeom prst="rect">
-            <a:avLst/>
-          </a:prstGeom>
-          <a:noFill/>
-          <a:ln/>
-        </p:spPr>
-        <p:txBody>
-          <a:bodyPr wrap="square" lIns="0" tIns="0" rIns="0" bIns="0" rtlCol="0" anchor="t"/>
-          <a:lstStyle/>
-          <a:p>
-            <a:pPr indent="0" marL="0">
-              <a:buNone/>
-            </a:pPr>
-            <a:r>
-              <a:rPr lang="en-US" sz="1100" b="1" dirty="0">
+              <a:t>전국 (수도권 직영, 지방 현지 파트너 운영)</a:t>
+            </a:r>
+            <a:endParaRPr lang="en-US" sz="1050" dirty="0"/>
+          </a:p>
+        </p:txBody>
+      </p:sp>
+      <p:sp>
+        <p:nvSpPr>
+          <p:cNvPr id="28" name="Text 26"/>
+          <p:cNvSpPr txBox="1"/>
+          <p:nvPr/>
+        </p:nvSpPr>
+        <p:spPr>
+          <a:xfrm>
+            <a:off x="1005840" y="5550408"/>
+            <a:ext cx="1280160" cy="283464"/>
+          </a:xfrm>
+          <a:prstGeom prst="rect">
+            <a:avLst/>
+          </a:prstGeom>
+          <a:noFill/>
+          <a:ln/>
+        </p:spPr>
+        <p:txBody>
+          <a:bodyPr wrap="square" lIns="0" tIns="0" rIns="0" bIns="0" rtlCol="0" anchor="t"/>
+          <a:lstStyle/>
+          <a:p>
+            <a:pPr indent="0" marL="0">
+              <a:buNone/>
+            </a:pPr>
+            <a:r>
+              <a:rPr lang="en-US" sz="1050" b="1" dirty="0">
                 <a:solidFill>
                   <a:srgbClr val="3182F6"/>
                 </a:solidFill>
@@ -16887,41 +17086,38 @@
                 <a:ea typeface="Malgun Gothic" pitchFamily="34" charset="-122"/>
                 <a:cs typeface="Malgun Gothic" pitchFamily="34" charset="-120"/>
               </a:rPr>
-              <a:t>서비스 지역</a:t>
-            </a:r>
-            <a:endParaRPr lang="en-US" sz="1100" dirty="0"/>
-          </a:p>
-        </p:txBody>
-      </p:sp>
-      <p:sp>
-        <p:nvSpPr>
-          <p:cNvPr id="23" name="Text 21"/>
-          <p:cNvSpPr txBox="1"/>
-          <p:nvPr/>
-        </p:nvSpPr>
-        <p:spPr>
-          <a:xfrm>
-            <a:off x="2286000" y="5129784"/>
-            <a:ext cx="3200400" cy="310896"/>
-          </a:xfrm>
-          <a:prstGeom prst="rect">
-            <a:avLst/>
-          </a:prstGeom>
-          <a:noFill/>
-          <a:ln/>
-        </p:spPr>
-        <p:txBody>
-          <a:bodyPr wrap="square" lIns="0" tIns="0" rIns="0" bIns="0" rtlCol="0" anchor="t"/>
-          <a:lstStyle/>
-          <a:p>
-            <a:pPr indent="0" marL="0">
-              <a:lnSpc>
-                <a:spcPct val="120000"/>
-              </a:lnSpc>
-              <a:buNone/>
-            </a:pPr>
-            <a:r>
-              <a:rPr lang="en-US" sz="1100" dirty="0">
+              <a:t>홈페이지</a:t>
+            </a:r>
+            <a:endParaRPr lang="en-US" sz="1050" dirty="0"/>
+          </a:p>
+        </p:txBody>
+      </p:sp>
+      <p:sp>
+        <p:nvSpPr>
+          <p:cNvPr id="29" name="Text 27"/>
+          <p:cNvSpPr txBox="1"/>
+          <p:nvPr/>
+        </p:nvSpPr>
+        <p:spPr>
+          <a:xfrm>
+            <a:off x="2286000" y="5550408"/>
+            <a:ext cx="3200400" cy="283464"/>
+          </a:xfrm>
+          <a:prstGeom prst="rect">
+            <a:avLst/>
+          </a:prstGeom>
+          <a:noFill/>
+          <a:ln/>
+        </p:spPr>
+        <p:txBody>
+          <a:bodyPr wrap="square" lIns="0" tIns="0" rIns="0" bIns="0" rtlCol="0" anchor="t"/>
+          <a:lstStyle/>
+          <a:p>
+            <a:pPr indent="0" marL="0">
+              <a:buNone/>
+            </a:pPr>
+            <a:r>
+              <a:rPr lang="en-US" sz="1050" dirty="0">
                 <a:solidFill>
                   <a:srgbClr val="0F172A"/>
                 </a:solidFill>
@@ -16929,38 +17125,38 @@
                 <a:ea typeface="Malgun Gothic" pitchFamily="34" charset="-122"/>
                 <a:cs typeface="Malgun Gothic" pitchFamily="34" charset="-120"/>
               </a:rPr>
-              <a:t>전국 (수도권 직영, 지방 현지 파트너 운영)</a:t>
-            </a:r>
-            <a:endParaRPr lang="en-US" sz="1100" dirty="0"/>
-          </a:p>
-        </p:txBody>
-      </p:sp>
-      <p:sp>
-        <p:nvSpPr>
-          <p:cNvPr id="24" name="Text 22"/>
-          <p:cNvSpPr txBox="1"/>
-          <p:nvPr/>
-        </p:nvSpPr>
-        <p:spPr>
-          <a:xfrm>
-            <a:off x="1005840" y="5495544"/>
-            <a:ext cx="1280160" cy="310896"/>
-          </a:xfrm>
-          <a:prstGeom prst="rect">
-            <a:avLst/>
-          </a:prstGeom>
-          <a:noFill/>
-          <a:ln/>
-        </p:spPr>
-        <p:txBody>
-          <a:bodyPr wrap="square" lIns="0" tIns="0" rIns="0" bIns="0" rtlCol="0" anchor="t"/>
-          <a:lstStyle/>
-          <a:p>
-            <a:pPr indent="0" marL="0">
-              <a:buNone/>
-            </a:pPr>
-            <a:r>
-              <a:rPr lang="en-US" sz="1100" b="1" dirty="0">
+              <a:t>www.flitunion.com</a:t>
+            </a:r>
+            <a:endParaRPr lang="en-US" sz="1050" dirty="0"/>
+          </a:p>
+        </p:txBody>
+      </p:sp>
+      <p:sp>
+        <p:nvSpPr>
+          <p:cNvPr id="30" name="Text 28"/>
+          <p:cNvSpPr txBox="1"/>
+          <p:nvPr/>
+        </p:nvSpPr>
+        <p:spPr>
+          <a:xfrm>
+            <a:off x="1005840" y="5870448"/>
+            <a:ext cx="1280160" cy="283464"/>
+          </a:xfrm>
+          <a:prstGeom prst="rect">
+            <a:avLst/>
+          </a:prstGeom>
+          <a:noFill/>
+          <a:ln/>
+        </p:spPr>
+        <p:txBody>
+          <a:bodyPr wrap="square" lIns="0" tIns="0" rIns="0" bIns="0" rtlCol="0" anchor="t"/>
+          <a:lstStyle/>
+          <a:p>
+            <a:pPr indent="0" marL="0">
+              <a:buNone/>
+            </a:pPr>
+            <a:r>
+              <a:rPr lang="en-US" sz="1050" b="1" dirty="0">
                 <a:solidFill>
                   <a:srgbClr val="3182F6"/>
                 </a:solidFill>
@@ -16968,41 +17164,38 @@
                 <a:ea typeface="Malgun Gothic" pitchFamily="34" charset="-122"/>
                 <a:cs typeface="Malgun Gothic" pitchFamily="34" charset="-120"/>
               </a:rPr>
-              <a:t>홈페이지</a:t>
-            </a:r>
-            <a:endParaRPr lang="en-US" sz="1100" dirty="0"/>
-          </a:p>
-        </p:txBody>
-      </p:sp>
-      <p:sp>
-        <p:nvSpPr>
-          <p:cNvPr id="25" name="Text 23"/>
-          <p:cNvSpPr txBox="1"/>
-          <p:nvPr/>
-        </p:nvSpPr>
-        <p:spPr>
-          <a:xfrm>
-            <a:off x="2286000" y="5495544"/>
-            <a:ext cx="3200400" cy="310896"/>
-          </a:xfrm>
-          <a:prstGeom prst="rect">
-            <a:avLst/>
-          </a:prstGeom>
-          <a:noFill/>
-          <a:ln/>
-        </p:spPr>
-        <p:txBody>
-          <a:bodyPr wrap="square" lIns="0" tIns="0" rIns="0" bIns="0" rtlCol="0" anchor="t"/>
-          <a:lstStyle/>
-          <a:p>
-            <a:pPr indent="0" marL="0">
-              <a:lnSpc>
-                <a:spcPct val="120000"/>
-              </a:lnSpc>
-              <a:buNone/>
-            </a:pPr>
-            <a:r>
-              <a:rPr lang="en-US" sz="1100" dirty="0">
+              <a:t>이메일</a:t>
+            </a:r>
+            <a:endParaRPr lang="en-US" sz="1050" dirty="0"/>
+          </a:p>
+        </p:txBody>
+      </p:sp>
+      <p:sp>
+        <p:nvSpPr>
+          <p:cNvPr id="31" name="Text 29"/>
+          <p:cNvSpPr txBox="1"/>
+          <p:nvPr/>
+        </p:nvSpPr>
+        <p:spPr>
+          <a:xfrm>
+            <a:off x="2286000" y="5870448"/>
+            <a:ext cx="3200400" cy="283464"/>
+          </a:xfrm>
+          <a:prstGeom prst="rect">
+            <a:avLst/>
+          </a:prstGeom>
+          <a:noFill/>
+          <a:ln/>
+        </p:spPr>
+        <p:txBody>
+          <a:bodyPr wrap="square" lIns="0" tIns="0" rIns="0" bIns="0" rtlCol="0" anchor="t"/>
+          <a:lstStyle/>
+          <a:p>
+            <a:pPr indent="0" marL="0">
+              <a:buNone/>
+            </a:pPr>
+            <a:r>
+              <a:rPr lang="en-US" sz="1050" dirty="0">
                 <a:solidFill>
                   <a:srgbClr val="0F172A"/>
                 </a:solidFill>
@@ -17010,96 +17203,15 @@
                 <a:ea typeface="Malgun Gothic" pitchFamily="34" charset="-122"/>
                 <a:cs typeface="Malgun Gothic" pitchFamily="34" charset="-120"/>
               </a:rPr>
-              <a:t>www.flitunion.com</a:t>
-            </a:r>
-            <a:endParaRPr lang="en-US" sz="1100" dirty="0"/>
-          </a:p>
-        </p:txBody>
-      </p:sp>
-      <p:sp>
-        <p:nvSpPr>
-          <p:cNvPr id="26" name="Text 24"/>
-          <p:cNvSpPr txBox="1"/>
-          <p:nvPr/>
-        </p:nvSpPr>
-        <p:spPr>
-          <a:xfrm>
-            <a:off x="1005840" y="5861304"/>
-            <a:ext cx="1280160" cy="310896"/>
-          </a:xfrm>
-          <a:prstGeom prst="rect">
-            <a:avLst/>
-          </a:prstGeom>
-          <a:noFill/>
-          <a:ln/>
-        </p:spPr>
-        <p:txBody>
-          <a:bodyPr wrap="square" lIns="0" tIns="0" rIns="0" bIns="0" rtlCol="0" anchor="t"/>
-          <a:lstStyle/>
-          <a:p>
-            <a:pPr indent="0" marL="0">
-              <a:buNone/>
-            </a:pPr>
-            <a:r>
-              <a:rPr lang="en-US" sz="1100" b="1" dirty="0">
-                <a:solidFill>
-                  <a:srgbClr val="3182F6"/>
-                </a:solidFill>
-                <a:latin typeface="Malgun Gothic" pitchFamily="34" charset="0"/>
-                <a:ea typeface="Malgun Gothic" pitchFamily="34" charset="-122"/>
-                <a:cs typeface="Malgun Gothic" pitchFamily="34" charset="-120"/>
-              </a:rPr>
-              <a:t>이메일</a:t>
-            </a:r>
-            <a:endParaRPr lang="en-US" sz="1100" dirty="0"/>
-          </a:p>
-        </p:txBody>
-      </p:sp>
-      <p:sp>
-        <p:nvSpPr>
-          <p:cNvPr id="27" name="Text 25"/>
-          <p:cNvSpPr txBox="1"/>
-          <p:nvPr/>
-        </p:nvSpPr>
-        <p:spPr>
-          <a:xfrm>
-            <a:off x="2286000" y="5861304"/>
-            <a:ext cx="3200400" cy="310896"/>
-          </a:xfrm>
-          <a:prstGeom prst="rect">
-            <a:avLst/>
-          </a:prstGeom>
-          <a:noFill/>
-          <a:ln/>
-        </p:spPr>
-        <p:txBody>
-          <a:bodyPr wrap="square" lIns="0" tIns="0" rIns="0" bIns="0" rtlCol="0" anchor="t"/>
-          <a:lstStyle/>
-          <a:p>
-            <a:pPr indent="0" marL="0">
-              <a:lnSpc>
-                <a:spcPct val="120000"/>
-              </a:lnSpc>
-              <a:buNone/>
-            </a:pPr>
-            <a:r>
-              <a:rPr lang="en-US" sz="1100" dirty="0">
-                <a:solidFill>
-                  <a:srgbClr val="0F172A"/>
-                </a:solidFill>
-                <a:latin typeface="Malgun Gothic" pitchFamily="34" charset="0"/>
-                <a:ea typeface="Malgun Gothic" pitchFamily="34" charset="-122"/>
-                <a:cs typeface="Malgun Gothic" pitchFamily="34" charset="-120"/>
-              </a:rPr>
               <a:t>hello@flitunion.com</a:t>
             </a:r>
-            <a:endParaRPr lang="en-US" sz="1100" dirty="0"/>
-          </a:p>
-        </p:txBody>
-      </p:sp>
-      <p:sp>
-        <p:nvSpPr>
-          <p:cNvPr id="28" name="Shape 26"/>
+            <a:endParaRPr lang="en-US" sz="1050" dirty="0"/>
+          </a:p>
+        </p:txBody>
+      </p:sp>
+      <p:sp>
+        <p:nvSpPr>
+          <p:cNvPr id="32" name="Shape 30"/>
           <p:cNvSpPr/>
           <p:nvPr/>
         </p:nvSpPr>
@@ -17126,7 +17238,7 @@
       </p:sp>
       <p:sp>
         <p:nvSpPr>
-          <p:cNvPr id="29" name="Text 27"/>
+          <p:cNvPr id="33" name="Text 31"/>
           <p:cNvSpPr txBox="1"/>
           <p:nvPr/>
         </p:nvSpPr>
@@ -17165,7 +17277,7 @@
       </p:sp>
       <p:sp>
         <p:nvSpPr>
-          <p:cNvPr id="30" name="Text 28"/>
+          <p:cNvPr id="34" name="Text 32"/>
           <p:cNvSpPr txBox="1"/>
           <p:nvPr/>
         </p:nvSpPr>
@@ -17204,7 +17316,7 @@
       </p:sp>
       <p:sp>
         <p:nvSpPr>
-          <p:cNvPr id="31" name="Text 29"/>
+          <p:cNvPr id="35" name="Text 33"/>
           <p:cNvSpPr txBox="1"/>
           <p:nvPr/>
         </p:nvSpPr>
@@ -17243,7 +17355,7 @@
       </p:sp>
       <p:sp>
         <p:nvSpPr>
-          <p:cNvPr id="32" name="Shape 30"/>
+          <p:cNvPr id="36" name="Shape 34"/>
           <p:cNvSpPr/>
           <p:nvPr/>
         </p:nvSpPr>
@@ -17270,7 +17382,7 @@
       </p:sp>
       <p:sp>
         <p:nvSpPr>
-          <p:cNvPr id="33" name="Text 31"/>
+          <p:cNvPr id="37" name="Text 35"/>
           <p:cNvSpPr txBox="1"/>
           <p:nvPr/>
         </p:nvSpPr>
@@ -17309,7 +17421,7 @@
       </p:sp>
       <p:sp>
         <p:nvSpPr>
-          <p:cNvPr id="34" name="Text 32"/>
+          <p:cNvPr id="38" name="Text 36"/>
           <p:cNvSpPr txBox="1"/>
           <p:nvPr/>
         </p:nvSpPr>
@@ -17348,7 +17460,7 @@
       </p:sp>
       <p:sp>
         <p:nvSpPr>
-          <p:cNvPr id="35" name="Text 33"/>
+          <p:cNvPr id="39" name="Text 37"/>
           <p:cNvSpPr txBox="1"/>
           <p:nvPr/>
         </p:nvSpPr>
@@ -17387,7 +17499,7 @@
       </p:sp>
       <p:sp>
         <p:nvSpPr>
-          <p:cNvPr id="36" name="Shape 34"/>
+          <p:cNvPr id="40" name="Shape 38"/>
           <p:cNvSpPr/>
           <p:nvPr/>
         </p:nvSpPr>
@@ -17414,7 +17526,7 @@
       </p:sp>
       <p:sp>
         <p:nvSpPr>
-          <p:cNvPr id="37" name="Text 35"/>
+          <p:cNvPr id="41" name="Text 39"/>
           <p:cNvSpPr txBox="1"/>
           <p:nvPr/>
         </p:nvSpPr>
@@ -17453,7 +17565,7 @@
       </p:sp>
       <p:sp>
         <p:nvSpPr>
-          <p:cNvPr id="38" name="Text 36"/>
+          <p:cNvPr id="42" name="Text 40"/>
           <p:cNvSpPr txBox="1"/>
           <p:nvPr/>
         </p:nvSpPr>
@@ -17492,7 +17604,7 @@
       </p:sp>
       <p:sp>
         <p:nvSpPr>
-          <p:cNvPr id="39" name="Text 37"/>
+          <p:cNvPr id="43" name="Text 41"/>
           <p:cNvSpPr txBox="1"/>
           <p:nvPr/>
         </p:nvSpPr>
@@ -17531,7 +17643,7 @@
       </p:sp>
       <p:sp>
         <p:nvSpPr>
-          <p:cNvPr id="40" name="Shape 38"/>
+          <p:cNvPr id="44" name="Shape 42"/>
           <p:cNvSpPr/>
           <p:nvPr/>
         </p:nvSpPr>
@@ -17558,7 +17670,7 @@
       </p:sp>
       <p:sp>
         <p:nvSpPr>
-          <p:cNvPr id="41" name="Text 39"/>
+          <p:cNvPr id="45" name="Text 43"/>
           <p:cNvSpPr txBox="1"/>
           <p:nvPr/>
         </p:nvSpPr>
@@ -17597,7 +17709,7 @@
       </p:sp>
       <p:sp>
         <p:nvSpPr>
-          <p:cNvPr id="42" name="Text 40"/>
+          <p:cNvPr id="46" name="Text 44"/>
           <p:cNvSpPr txBox="1"/>
           <p:nvPr/>
         </p:nvSpPr>
@@ -17636,7 +17748,7 @@
       </p:sp>
       <p:sp>
         <p:nvSpPr>
-          <p:cNvPr id="43" name="Text 41"/>
+          <p:cNvPr id="47" name="Text 45"/>
           <p:cNvSpPr txBox="1"/>
           <p:nvPr/>
         </p:nvSpPr>

--- a/docs/flitunion-company-profile.pptx
+++ b/docs/flitunion-company-profile.pptx
@@ -8045,12 +8045,12 @@
         </p:nvSpPr>
         <p:spPr>
           <a:xfrm>
-            <a:off x="640080" y="2377440"/>
-            <a:ext cx="2556434" cy="1783080"/>
+            <a:off x="640080" y="2286000"/>
+            <a:ext cx="2577008" cy="1858756"/>
           </a:xfrm>
           <a:prstGeom prst="roundRect">
             <a:avLst>
-              <a:gd name="adj" fmla="val 5128"/>
+              <a:gd name="adj" fmla="val 4919"/>
             </a:avLst>
           </a:prstGeom>
           <a:solidFill>
@@ -8072,8 +8072,98 @@
         </p:nvSpPr>
         <p:spPr>
           <a:xfrm>
-            <a:off x="868680" y="2606040"/>
-            <a:ext cx="1051560" cy="256032"/>
+            <a:off x="640080" y="2286000"/>
+            <a:ext cx="2577008" cy="1236964"/>
+          </a:xfrm>
+          <a:prstGeom prst="roundRect">
+            <a:avLst>
+              <a:gd name="adj" fmla="val 7392"/>
+            </a:avLst>
+          </a:prstGeom>
+          <a:solidFill>
+            <a:srgbClr val="12305F"/>
+          </a:solidFill>
+          <a:ln w="12700">
+            <a:solidFill>
+              <a:srgbClr val="1F5FD0"/>
+            </a:solidFill>
+            <a:prstDash val="dash"/>
+          </a:ln>
+        </p:spPr>
+      </p:sp>
+      <p:pic>
+        <p:nvPicPr>
+          <p:cNvPr id="12" name="Image 0" descr="preencoded.png">    </p:cNvPr>
+          <p:cNvPicPr>
+            <a:picLocks noChangeAspect="1"/>
+          </p:cNvPicPr>
+          <p:nvPr/>
+        </p:nvPicPr>
+        <p:blipFill>
+          <a:blip r:embed="rId1"/>
+          <a:stretch>
+            <a:fillRect/>
+          </a:stretch>
+        </p:blipFill>
+        <p:spPr>
+          <a:xfrm>
+            <a:off x="1743039" y="2609209"/>
+            <a:ext cx="371089" cy="371089"/>
+          </a:xfrm>
+          <a:prstGeom prst="rect">
+            <a:avLst/>
+          </a:prstGeom>
+        </p:spPr>
+      </p:pic>
+      <p:sp>
+        <p:nvSpPr>
+          <p:cNvPr id="13" name="Text 10"/>
+          <p:cNvSpPr txBox="1"/>
+          <p:nvPr/>
+        </p:nvSpPr>
+        <p:spPr>
+          <a:xfrm>
+            <a:off x="640080" y="3016874"/>
+            <a:ext cx="2577008" cy="228600"/>
+          </a:xfrm>
+          <a:prstGeom prst="rect">
+            <a:avLst/>
+          </a:prstGeom>
+          <a:noFill/>
+          <a:ln/>
+        </p:spPr>
+        <p:txBody>
+          <a:bodyPr wrap="square" lIns="0" tIns="0" rIns="0" bIns="0" rtlCol="0" anchor="t"/>
+          <a:lstStyle/>
+          <a:p>
+            <a:pPr algn="ctr" indent="0" marL="0">
+              <a:buNone/>
+            </a:pPr>
+            <a:r>
+              <a:rPr lang="en-US" sz="850" dirty="0">
+                <a:solidFill>
+                  <a:srgbClr val="93C5FD"/>
+                </a:solidFill>
+                <a:latin typeface="Malgun Gothic" pitchFamily="34" charset="0"/>
+                <a:ea typeface="Malgun Gothic" pitchFamily="34" charset="-122"/>
+                <a:cs typeface="Malgun Gothic" pitchFamily="34" charset="-120"/>
+              </a:rPr>
+              <a:t>현장 사진</a:t>
+            </a:r>
+            <a:endParaRPr lang="en-US" sz="850" dirty="0"/>
+          </a:p>
+        </p:txBody>
+      </p:sp>
+      <p:sp>
+        <p:nvSpPr>
+          <p:cNvPr id="14" name="Shape 11"/>
+          <p:cNvSpPr/>
+          <p:nvPr/>
+        </p:nvSpPr>
+        <p:spPr>
+          <a:xfrm>
+            <a:off x="777240" y="2423160"/>
+            <a:ext cx="914400" cy="237744"/>
           </a:xfrm>
           <a:prstGeom prst="roundRect">
             <a:avLst>
@@ -8093,14 +8183,14 @@
       </p:sp>
       <p:sp>
         <p:nvSpPr>
-          <p:cNvPr id="12" name="Text 10"/>
-          <p:cNvSpPr txBox="1"/>
-          <p:nvPr/>
-        </p:nvSpPr>
-        <p:spPr>
-          <a:xfrm>
-            <a:off x="868680" y="2606040"/>
-            <a:ext cx="1051560" cy="256032"/>
+          <p:cNvPr id="15" name="Text 12"/>
+          <p:cNvSpPr txBox="1"/>
+          <p:nvPr/>
+        </p:nvSpPr>
+        <p:spPr>
+          <a:xfrm>
+            <a:off x="777240" y="2423160"/>
+            <a:ext cx="914400" cy="237744"/>
           </a:xfrm>
           <a:prstGeom prst="rect">
             <a:avLst/>
@@ -8116,7 +8206,7 @@
               <a:buNone/>
             </a:pPr>
             <a:r>
-              <a:rPr lang="en-US" sz="850" b="1" dirty="0">
+              <a:rPr lang="en-US" sz="800" b="1" dirty="0">
                 <a:solidFill>
                   <a:srgbClr val="FFFFFF"/>
                 </a:solidFill>
@@ -8126,32 +8216,71 @@
               </a:rPr>
               <a:t>야시장</a:t>
             </a:r>
-            <a:endParaRPr lang="en-US" sz="850" dirty="0"/>
-          </a:p>
-        </p:txBody>
-      </p:sp>
-      <p:sp>
-        <p:nvSpPr>
-          <p:cNvPr id="13" name="Text 11"/>
-          <p:cNvSpPr txBox="1"/>
-          <p:nvPr/>
-        </p:nvSpPr>
-        <p:spPr>
-          <a:xfrm>
-            <a:off x="2011680" y="2606040"/>
-            <a:ext cx="1001954" cy="256032"/>
-          </a:xfrm>
-          <a:prstGeom prst="rect">
-            <a:avLst/>
-          </a:prstGeom>
-          <a:noFill/>
-          <a:ln/>
-        </p:spPr>
-        <p:txBody>
-          <a:bodyPr wrap="square" lIns="0" tIns="0" rIns="0" bIns="0" rtlCol="0" anchor="ctr"/>
-          <a:lstStyle/>
-          <a:p>
-            <a:pPr algn="r" indent="0" marL="0">
+            <a:endParaRPr lang="en-US" sz="800" dirty="0"/>
+          </a:p>
+        </p:txBody>
+      </p:sp>
+      <p:sp>
+        <p:nvSpPr>
+          <p:cNvPr id="16" name="Text 13"/>
+          <p:cNvSpPr txBox="1"/>
+          <p:nvPr/>
+        </p:nvSpPr>
+        <p:spPr>
+          <a:xfrm>
+            <a:off x="822960" y="3632692"/>
+            <a:ext cx="2211248" cy="274320"/>
+          </a:xfrm>
+          <a:prstGeom prst="rect">
+            <a:avLst/>
+          </a:prstGeom>
+          <a:noFill/>
+          <a:ln/>
+        </p:spPr>
+        <p:txBody>
+          <a:bodyPr wrap="square" lIns="0" tIns="0" rIns="0" bIns="0" rtlCol="0" anchor="t"/>
+          <a:lstStyle/>
+          <a:p>
+            <a:pPr indent="0" marL="0">
+              <a:buNone/>
+            </a:pPr>
+            <a:r>
+              <a:rPr lang="en-US" sz="1050" b="1" dirty="0">
+                <a:solidFill>
+                  <a:srgbClr val="0F172A"/>
+                </a:solidFill>
+                <a:latin typeface="Malgun Gothic" pitchFamily="34" charset="0"/>
+                <a:ea typeface="Malgun Gothic" pitchFamily="34" charset="-122"/>
+                <a:cs typeface="Malgun Gothic" pitchFamily="34" charset="-120"/>
+              </a:rPr>
+              <a:t>원주 소재 대학교 야시장 운영</a:t>
+            </a:r>
+            <a:endParaRPr lang="en-US" sz="1050" dirty="0"/>
+          </a:p>
+        </p:txBody>
+      </p:sp>
+      <p:sp>
+        <p:nvSpPr>
+          <p:cNvPr id="17" name="Text 14"/>
+          <p:cNvSpPr txBox="1"/>
+          <p:nvPr/>
+        </p:nvSpPr>
+        <p:spPr>
+          <a:xfrm>
+            <a:off x="822960" y="3888724"/>
+            <a:ext cx="2211248" cy="228600"/>
+          </a:xfrm>
+          <a:prstGeom prst="rect">
+            <a:avLst/>
+          </a:prstGeom>
+          <a:noFill/>
+          <a:ln/>
+        </p:spPr>
+        <p:txBody>
+          <a:bodyPr wrap="square" lIns="0" tIns="0" rIns="0" bIns="0" rtlCol="0" anchor="t"/>
+          <a:lstStyle/>
+          <a:p>
+            <a:pPr indent="0" marL="0">
               <a:buNone/>
             </a:pPr>
             <a:r>
@@ -8171,99 +8300,18 @@
       </p:sp>
       <p:sp>
         <p:nvSpPr>
-          <p:cNvPr id="14" name="Text 12"/>
-          <p:cNvSpPr txBox="1"/>
-          <p:nvPr/>
-        </p:nvSpPr>
-        <p:spPr>
-          <a:xfrm>
-            <a:off x="868680" y="2971800"/>
-            <a:ext cx="2099234" cy="320040"/>
-          </a:xfrm>
-          <a:prstGeom prst="rect">
-            <a:avLst/>
-          </a:prstGeom>
-          <a:noFill/>
-          <a:ln/>
-        </p:spPr>
-        <p:txBody>
-          <a:bodyPr wrap="square" lIns="0" tIns="0" rIns="0" bIns="0" rtlCol="0" anchor="t"/>
-          <a:lstStyle/>
-          <a:p>
-            <a:pPr indent="0" marL="0">
-              <a:buNone/>
-            </a:pPr>
-            <a:r>
-              <a:rPr lang="en-US" sz="1150" b="1" dirty="0">
-                <a:solidFill>
-                  <a:srgbClr val="0F172A"/>
-                </a:solidFill>
-                <a:latin typeface="Malgun Gothic" pitchFamily="34" charset="0"/>
-                <a:ea typeface="Malgun Gothic" pitchFamily="34" charset="-122"/>
-                <a:cs typeface="Malgun Gothic" pitchFamily="34" charset="-120"/>
-              </a:rPr>
-              <a:t>원주 소재 대학교 야시장 운영</a:t>
-            </a:r>
-            <a:endParaRPr lang="en-US" sz="1150" dirty="0"/>
-          </a:p>
-        </p:txBody>
-      </p:sp>
-      <p:sp>
-        <p:nvSpPr>
-          <p:cNvPr id="15" name="Text 13"/>
-          <p:cNvSpPr txBox="1"/>
-          <p:nvPr/>
-        </p:nvSpPr>
-        <p:spPr>
-          <a:xfrm>
-            <a:off x="868680" y="3310128"/>
-            <a:ext cx="2099234" cy="777240"/>
-          </a:xfrm>
-          <a:prstGeom prst="rect">
-            <a:avLst/>
-          </a:prstGeom>
-          <a:noFill/>
-          <a:ln/>
-        </p:spPr>
-        <p:txBody>
-          <a:bodyPr wrap="square" lIns="0" tIns="0" rIns="0" bIns="0" rtlCol="0" anchor="t"/>
-          <a:lstStyle/>
-          <a:p>
-            <a:pPr indent="0" marL="0">
-              <a:lnSpc>
-                <a:spcPct val="120000"/>
-              </a:lnSpc>
-              <a:buNone/>
-            </a:pPr>
-            <a:r>
-              <a:rPr lang="en-US" sz="950" dirty="0">
-                <a:solidFill>
-                  <a:srgbClr val="475569"/>
-                </a:solidFill>
-                <a:latin typeface="Malgun Gothic" pitchFamily="34" charset="0"/>
-                <a:ea typeface="Malgun Gothic" pitchFamily="34" charset="-122"/>
-                <a:cs typeface="Malgun Gothic" pitchFamily="34" charset="-120"/>
-              </a:rPr>
-              <a:t>축제 기간 저녁 시간대 푸드트럭과 플리마켓 셀러를 결합한 복합 야간 마켓을 운영하였습니다.</a:t>
-            </a:r>
-            <a:endParaRPr lang="en-US" sz="950" dirty="0"/>
-          </a:p>
-        </p:txBody>
-      </p:sp>
-      <p:sp>
-        <p:nvSpPr>
-          <p:cNvPr id="16" name="Shape 14"/>
+          <p:cNvPr id="18" name="Shape 15"/>
           <p:cNvSpPr/>
           <p:nvPr/>
         </p:nvSpPr>
         <p:spPr>
           <a:xfrm>
-            <a:off x="3425114" y="2377440"/>
-            <a:ext cx="2556434" cy="1783080"/>
+            <a:off x="3418256" y="2286000"/>
+            <a:ext cx="2577008" cy="1858756"/>
           </a:xfrm>
           <a:prstGeom prst="roundRect">
             <a:avLst>
-              <a:gd name="adj" fmla="val 5128"/>
+              <a:gd name="adj" fmla="val 4919"/>
             </a:avLst>
           </a:prstGeom>
           <a:solidFill>
@@ -8279,14 +8327,104 @@
       </p:sp>
       <p:sp>
         <p:nvSpPr>
-          <p:cNvPr id="17" name="Shape 15"/>
+          <p:cNvPr id="19" name="Shape 16"/>
           <p:cNvSpPr/>
           <p:nvPr/>
         </p:nvSpPr>
         <p:spPr>
           <a:xfrm>
-            <a:off x="3653714" y="2606040"/>
-            <a:ext cx="1051560" cy="256032"/>
+            <a:off x="3418256" y="2286000"/>
+            <a:ext cx="2577008" cy="1236964"/>
+          </a:xfrm>
+          <a:prstGeom prst="roundRect">
+            <a:avLst>
+              <a:gd name="adj" fmla="val 7392"/>
+            </a:avLst>
+          </a:prstGeom>
+          <a:solidFill>
+            <a:srgbClr val="12305F"/>
+          </a:solidFill>
+          <a:ln w="12700">
+            <a:solidFill>
+              <a:srgbClr val="1F5FD0"/>
+            </a:solidFill>
+            <a:prstDash val="dash"/>
+          </a:ln>
+        </p:spPr>
+      </p:sp>
+      <p:pic>
+        <p:nvPicPr>
+          <p:cNvPr id="20" name="Image 1" descr="preencoded.png">    </p:cNvPr>
+          <p:cNvPicPr>
+            <a:picLocks noChangeAspect="1"/>
+          </p:cNvPicPr>
+          <p:nvPr/>
+        </p:nvPicPr>
+        <p:blipFill>
+          <a:blip r:embed="rId2"/>
+          <a:stretch>
+            <a:fillRect/>
+          </a:stretch>
+        </p:blipFill>
+        <p:spPr>
+          <a:xfrm>
+            <a:off x="4521215" y="2609209"/>
+            <a:ext cx="371089" cy="371089"/>
+          </a:xfrm>
+          <a:prstGeom prst="rect">
+            <a:avLst/>
+          </a:prstGeom>
+        </p:spPr>
+      </p:pic>
+      <p:sp>
+        <p:nvSpPr>
+          <p:cNvPr id="21" name="Text 17"/>
+          <p:cNvSpPr txBox="1"/>
+          <p:nvPr/>
+        </p:nvSpPr>
+        <p:spPr>
+          <a:xfrm>
+            <a:off x="3418256" y="3016874"/>
+            <a:ext cx="2577008" cy="228600"/>
+          </a:xfrm>
+          <a:prstGeom prst="rect">
+            <a:avLst/>
+          </a:prstGeom>
+          <a:noFill/>
+          <a:ln/>
+        </p:spPr>
+        <p:txBody>
+          <a:bodyPr wrap="square" lIns="0" tIns="0" rIns="0" bIns="0" rtlCol="0" anchor="t"/>
+          <a:lstStyle/>
+          <a:p>
+            <a:pPr algn="ctr" indent="0" marL="0">
+              <a:buNone/>
+            </a:pPr>
+            <a:r>
+              <a:rPr lang="en-US" sz="850" dirty="0">
+                <a:solidFill>
+                  <a:srgbClr val="93C5FD"/>
+                </a:solidFill>
+                <a:latin typeface="Malgun Gothic" pitchFamily="34" charset="0"/>
+                <a:ea typeface="Malgun Gothic" pitchFamily="34" charset="-122"/>
+                <a:cs typeface="Malgun Gothic" pitchFamily="34" charset="-120"/>
+              </a:rPr>
+              <a:t>현장 사진</a:t>
+            </a:r>
+            <a:endParaRPr lang="en-US" sz="850" dirty="0"/>
+          </a:p>
+        </p:txBody>
+      </p:sp>
+      <p:sp>
+        <p:nvSpPr>
+          <p:cNvPr id="22" name="Shape 18"/>
+          <p:cNvSpPr/>
+          <p:nvPr/>
+        </p:nvSpPr>
+        <p:spPr>
+          <a:xfrm>
+            <a:off x="3555416" y="2423160"/>
+            <a:ext cx="914400" cy="237744"/>
           </a:xfrm>
           <a:prstGeom prst="roundRect">
             <a:avLst>
@@ -8306,14 +8444,14 @@
       </p:sp>
       <p:sp>
         <p:nvSpPr>
-          <p:cNvPr id="18" name="Text 16"/>
-          <p:cNvSpPr txBox="1"/>
-          <p:nvPr/>
-        </p:nvSpPr>
-        <p:spPr>
-          <a:xfrm>
-            <a:off x="3653714" y="2606040"/>
-            <a:ext cx="1051560" cy="256032"/>
+          <p:cNvPr id="23" name="Text 19"/>
+          <p:cNvSpPr txBox="1"/>
+          <p:nvPr/>
+        </p:nvSpPr>
+        <p:spPr>
+          <a:xfrm>
+            <a:off x="3555416" y="2423160"/>
+            <a:ext cx="914400" cy="237744"/>
           </a:xfrm>
           <a:prstGeom prst="rect">
             <a:avLst/>
@@ -8329,7 +8467,7 @@
               <a:buNone/>
             </a:pPr>
             <a:r>
-              <a:rPr lang="en-US" sz="850" b="1" dirty="0">
+              <a:rPr lang="en-US" sz="800" b="1" dirty="0">
                 <a:solidFill>
                   <a:srgbClr val="FFFFFF"/>
                 </a:solidFill>
@@ -8339,32 +8477,71 @@
               </a:rPr>
               <a:t>캠퍼스 마켓</a:t>
             </a:r>
-            <a:endParaRPr lang="en-US" sz="850" dirty="0"/>
-          </a:p>
-        </p:txBody>
-      </p:sp>
-      <p:sp>
-        <p:nvSpPr>
-          <p:cNvPr id="19" name="Text 17"/>
-          <p:cNvSpPr txBox="1"/>
-          <p:nvPr/>
-        </p:nvSpPr>
-        <p:spPr>
-          <a:xfrm>
-            <a:off x="4796714" y="2606040"/>
-            <a:ext cx="1001954" cy="256032"/>
-          </a:xfrm>
-          <a:prstGeom prst="rect">
-            <a:avLst/>
-          </a:prstGeom>
-          <a:noFill/>
-          <a:ln/>
-        </p:spPr>
-        <p:txBody>
-          <a:bodyPr wrap="square" lIns="0" tIns="0" rIns="0" bIns="0" rtlCol="0" anchor="ctr"/>
-          <a:lstStyle/>
-          <a:p>
-            <a:pPr algn="r" indent="0" marL="0">
+            <a:endParaRPr lang="en-US" sz="800" dirty="0"/>
+          </a:p>
+        </p:txBody>
+      </p:sp>
+      <p:sp>
+        <p:nvSpPr>
+          <p:cNvPr id="24" name="Text 20"/>
+          <p:cNvSpPr txBox="1"/>
+          <p:nvPr/>
+        </p:nvSpPr>
+        <p:spPr>
+          <a:xfrm>
+            <a:off x="3601136" y="3632692"/>
+            <a:ext cx="2211248" cy="274320"/>
+          </a:xfrm>
+          <a:prstGeom prst="rect">
+            <a:avLst/>
+          </a:prstGeom>
+          <a:noFill/>
+          <a:ln/>
+        </p:spPr>
+        <p:txBody>
+          <a:bodyPr wrap="square" lIns="0" tIns="0" rIns="0" bIns="0" rtlCol="0" anchor="t"/>
+          <a:lstStyle/>
+          <a:p>
+            <a:pPr indent="0" marL="0">
+              <a:buNone/>
+            </a:pPr>
+            <a:r>
+              <a:rPr lang="en-US" sz="1050" b="1" dirty="0">
+                <a:solidFill>
+                  <a:srgbClr val="0F172A"/>
+                </a:solidFill>
+                <a:latin typeface="Malgun Gothic" pitchFamily="34" charset="0"/>
+                <a:ea typeface="Malgun Gothic" pitchFamily="34" charset="-122"/>
+                <a:cs typeface="Malgun Gothic" pitchFamily="34" charset="-120"/>
+              </a:rPr>
+              <a:t>대구 소재 대학교 플리마켓 운영</a:t>
+            </a:r>
+            <a:endParaRPr lang="en-US" sz="1050" dirty="0"/>
+          </a:p>
+        </p:txBody>
+      </p:sp>
+      <p:sp>
+        <p:nvSpPr>
+          <p:cNvPr id="25" name="Text 21"/>
+          <p:cNvSpPr txBox="1"/>
+          <p:nvPr/>
+        </p:nvSpPr>
+        <p:spPr>
+          <a:xfrm>
+            <a:off x="3601136" y="3888724"/>
+            <a:ext cx="2211248" cy="228600"/>
+          </a:xfrm>
+          <a:prstGeom prst="rect">
+            <a:avLst/>
+          </a:prstGeom>
+          <a:noFill/>
+          <a:ln/>
+        </p:spPr>
+        <p:txBody>
+          <a:bodyPr wrap="square" lIns="0" tIns="0" rIns="0" bIns="0" rtlCol="0" anchor="t"/>
+          <a:lstStyle/>
+          <a:p>
+            <a:pPr indent="0" marL="0">
               <a:buNone/>
             </a:pPr>
             <a:r>
@@ -8384,99 +8561,18 @@
       </p:sp>
       <p:sp>
         <p:nvSpPr>
-          <p:cNvPr id="20" name="Text 18"/>
-          <p:cNvSpPr txBox="1"/>
-          <p:nvPr/>
-        </p:nvSpPr>
-        <p:spPr>
-          <a:xfrm>
-            <a:off x="3653714" y="2971800"/>
-            <a:ext cx="2099234" cy="320040"/>
-          </a:xfrm>
-          <a:prstGeom prst="rect">
-            <a:avLst/>
-          </a:prstGeom>
-          <a:noFill/>
-          <a:ln/>
-        </p:spPr>
-        <p:txBody>
-          <a:bodyPr wrap="square" lIns="0" tIns="0" rIns="0" bIns="0" rtlCol="0" anchor="t"/>
-          <a:lstStyle/>
-          <a:p>
-            <a:pPr indent="0" marL="0">
-              <a:buNone/>
-            </a:pPr>
-            <a:r>
-              <a:rPr lang="en-US" sz="1150" b="1" dirty="0">
-                <a:solidFill>
-                  <a:srgbClr val="0F172A"/>
-                </a:solidFill>
-                <a:latin typeface="Malgun Gothic" pitchFamily="34" charset="0"/>
-                <a:ea typeface="Malgun Gothic" pitchFamily="34" charset="-122"/>
-                <a:cs typeface="Malgun Gothic" pitchFamily="34" charset="-120"/>
-              </a:rPr>
-              <a:t>대구 소재 대학교 플리마켓 운영</a:t>
-            </a:r>
-            <a:endParaRPr lang="en-US" sz="1150" dirty="0"/>
-          </a:p>
-        </p:txBody>
-      </p:sp>
-      <p:sp>
-        <p:nvSpPr>
-          <p:cNvPr id="21" name="Text 19"/>
-          <p:cNvSpPr txBox="1"/>
-          <p:nvPr/>
-        </p:nvSpPr>
-        <p:spPr>
-          <a:xfrm>
-            <a:off x="3653714" y="3310128"/>
-            <a:ext cx="2099234" cy="777240"/>
-          </a:xfrm>
-          <a:prstGeom prst="rect">
-            <a:avLst/>
-          </a:prstGeom>
-          <a:noFill/>
-          <a:ln/>
-        </p:spPr>
-        <p:txBody>
-          <a:bodyPr wrap="square" lIns="0" tIns="0" rIns="0" bIns="0" rtlCol="0" anchor="t"/>
-          <a:lstStyle/>
-          <a:p>
-            <a:pPr indent="0" marL="0">
-              <a:lnSpc>
-                <a:spcPct val="120000"/>
-              </a:lnSpc>
-              <a:buNone/>
-            </a:pPr>
-            <a:r>
-              <a:rPr lang="en-US" sz="950" dirty="0">
-                <a:solidFill>
-                  <a:srgbClr val="475569"/>
-                </a:solidFill>
-                <a:latin typeface="Malgun Gothic" pitchFamily="34" charset="0"/>
-                <a:ea typeface="Malgun Gothic" pitchFamily="34" charset="-122"/>
-                <a:cs typeface="Malgun Gothic" pitchFamily="34" charset="-120"/>
-              </a:rPr>
-              <a:t>학생 창업 셀러와 외부 플릿 인증 셀러를 조합하여 전 과정을 대행하였습니다.</a:t>
-            </a:r>
-            <a:endParaRPr lang="en-US" sz="950" dirty="0"/>
-          </a:p>
-        </p:txBody>
-      </p:sp>
-      <p:sp>
-        <p:nvSpPr>
-          <p:cNvPr id="22" name="Shape 20"/>
+          <p:cNvPr id="26" name="Shape 22"/>
           <p:cNvSpPr/>
           <p:nvPr/>
         </p:nvSpPr>
         <p:spPr>
           <a:xfrm>
-            <a:off x="6210148" y="2377440"/>
-            <a:ext cx="2556434" cy="1783080"/>
+            <a:off x="6196432" y="2286000"/>
+            <a:ext cx="2577008" cy="1858756"/>
           </a:xfrm>
           <a:prstGeom prst="roundRect">
             <a:avLst>
-              <a:gd name="adj" fmla="val 5128"/>
+              <a:gd name="adj" fmla="val 4919"/>
             </a:avLst>
           </a:prstGeom>
           <a:solidFill>
@@ -8492,14 +8588,104 @@
       </p:sp>
       <p:sp>
         <p:nvSpPr>
-          <p:cNvPr id="23" name="Shape 21"/>
+          <p:cNvPr id="27" name="Shape 23"/>
           <p:cNvSpPr/>
           <p:nvPr/>
         </p:nvSpPr>
         <p:spPr>
           <a:xfrm>
-            <a:off x="6438748" y="2606040"/>
-            <a:ext cx="1051560" cy="256032"/>
+            <a:off x="6196432" y="2286000"/>
+            <a:ext cx="2577008" cy="1236964"/>
+          </a:xfrm>
+          <a:prstGeom prst="roundRect">
+            <a:avLst>
+              <a:gd name="adj" fmla="val 7392"/>
+            </a:avLst>
+          </a:prstGeom>
+          <a:solidFill>
+            <a:srgbClr val="12305F"/>
+          </a:solidFill>
+          <a:ln w="12700">
+            <a:solidFill>
+              <a:srgbClr val="1F5FD0"/>
+            </a:solidFill>
+            <a:prstDash val="dash"/>
+          </a:ln>
+        </p:spPr>
+      </p:sp>
+      <p:pic>
+        <p:nvPicPr>
+          <p:cNvPr id="28" name="Image 2" descr="preencoded.png">    </p:cNvPr>
+          <p:cNvPicPr>
+            <a:picLocks noChangeAspect="1"/>
+          </p:cNvPicPr>
+          <p:nvPr/>
+        </p:nvPicPr>
+        <p:blipFill>
+          <a:blip r:embed="rId3"/>
+          <a:stretch>
+            <a:fillRect/>
+          </a:stretch>
+        </p:blipFill>
+        <p:spPr>
+          <a:xfrm>
+            <a:off x="7299391" y="2609209"/>
+            <a:ext cx="371089" cy="371089"/>
+          </a:xfrm>
+          <a:prstGeom prst="rect">
+            <a:avLst/>
+          </a:prstGeom>
+        </p:spPr>
+      </p:pic>
+      <p:sp>
+        <p:nvSpPr>
+          <p:cNvPr id="29" name="Text 24"/>
+          <p:cNvSpPr txBox="1"/>
+          <p:nvPr/>
+        </p:nvSpPr>
+        <p:spPr>
+          <a:xfrm>
+            <a:off x="6196432" y="3016874"/>
+            <a:ext cx="2577008" cy="228600"/>
+          </a:xfrm>
+          <a:prstGeom prst="rect">
+            <a:avLst/>
+          </a:prstGeom>
+          <a:noFill/>
+          <a:ln/>
+        </p:spPr>
+        <p:txBody>
+          <a:bodyPr wrap="square" lIns="0" tIns="0" rIns="0" bIns="0" rtlCol="0" anchor="t"/>
+          <a:lstStyle/>
+          <a:p>
+            <a:pPr algn="ctr" indent="0" marL="0">
+              <a:buNone/>
+            </a:pPr>
+            <a:r>
+              <a:rPr lang="en-US" sz="850" dirty="0">
+                <a:solidFill>
+                  <a:srgbClr val="93C5FD"/>
+                </a:solidFill>
+                <a:latin typeface="Malgun Gothic" pitchFamily="34" charset="0"/>
+                <a:ea typeface="Malgun Gothic" pitchFamily="34" charset="-122"/>
+                <a:cs typeface="Malgun Gothic" pitchFamily="34" charset="-120"/>
+              </a:rPr>
+              <a:t>현장 사진</a:t>
+            </a:r>
+            <a:endParaRPr lang="en-US" sz="850" dirty="0"/>
+          </a:p>
+        </p:txBody>
+      </p:sp>
+      <p:sp>
+        <p:nvSpPr>
+          <p:cNvPr id="30" name="Shape 25"/>
+          <p:cNvSpPr/>
+          <p:nvPr/>
+        </p:nvSpPr>
+        <p:spPr>
+          <a:xfrm>
+            <a:off x="6333592" y="2423160"/>
+            <a:ext cx="914400" cy="237744"/>
           </a:xfrm>
           <a:prstGeom prst="roundRect">
             <a:avLst>
@@ -8519,14 +8705,14 @@
       </p:sp>
       <p:sp>
         <p:nvSpPr>
-          <p:cNvPr id="24" name="Text 22"/>
-          <p:cNvSpPr txBox="1"/>
-          <p:nvPr/>
-        </p:nvSpPr>
-        <p:spPr>
-          <a:xfrm>
-            <a:off x="6438748" y="2606040"/>
-            <a:ext cx="1051560" cy="256032"/>
+          <p:cNvPr id="31" name="Text 26"/>
+          <p:cNvSpPr txBox="1"/>
+          <p:nvPr/>
+        </p:nvSpPr>
+        <p:spPr>
+          <a:xfrm>
+            <a:off x="6333592" y="2423160"/>
+            <a:ext cx="914400" cy="237744"/>
           </a:xfrm>
           <a:prstGeom prst="rect">
             <a:avLst/>
@@ -8542,7 +8728,7 @@
               <a:buNone/>
             </a:pPr>
             <a:r>
-              <a:rPr lang="en-US" sz="850" b="1" dirty="0">
+              <a:rPr lang="en-US" sz="800" b="1" dirty="0">
                 <a:solidFill>
                   <a:srgbClr val="FFFFFF"/>
                 </a:solidFill>
@@ -8552,32 +8738,71 @@
               </a:rPr>
               <a:t>대형 축제</a:t>
             </a:r>
-            <a:endParaRPr lang="en-US" sz="850" dirty="0"/>
-          </a:p>
-        </p:txBody>
-      </p:sp>
-      <p:sp>
-        <p:nvSpPr>
-          <p:cNvPr id="25" name="Text 23"/>
-          <p:cNvSpPr txBox="1"/>
-          <p:nvPr/>
-        </p:nvSpPr>
-        <p:spPr>
-          <a:xfrm>
-            <a:off x="7581748" y="2606040"/>
-            <a:ext cx="1001954" cy="256032"/>
-          </a:xfrm>
-          <a:prstGeom prst="rect">
-            <a:avLst/>
-          </a:prstGeom>
-          <a:noFill/>
-          <a:ln/>
-        </p:spPr>
-        <p:txBody>
-          <a:bodyPr wrap="square" lIns="0" tIns="0" rIns="0" bIns="0" rtlCol="0" anchor="ctr"/>
-          <a:lstStyle/>
-          <a:p>
-            <a:pPr algn="r" indent="0" marL="0">
+            <a:endParaRPr lang="en-US" sz="800" dirty="0"/>
+          </a:p>
+        </p:txBody>
+      </p:sp>
+      <p:sp>
+        <p:nvSpPr>
+          <p:cNvPr id="32" name="Text 27"/>
+          <p:cNvSpPr txBox="1"/>
+          <p:nvPr/>
+        </p:nvSpPr>
+        <p:spPr>
+          <a:xfrm>
+            <a:off x="6379312" y="3632692"/>
+            <a:ext cx="2211248" cy="274320"/>
+          </a:xfrm>
+          <a:prstGeom prst="rect">
+            <a:avLst/>
+          </a:prstGeom>
+          <a:noFill/>
+          <a:ln/>
+        </p:spPr>
+        <p:txBody>
+          <a:bodyPr wrap="square" lIns="0" tIns="0" rIns="0" bIns="0" rtlCol="0" anchor="t"/>
+          <a:lstStyle/>
+          <a:p>
+            <a:pPr indent="0" marL="0">
+              <a:buNone/>
+            </a:pPr>
+            <a:r>
+              <a:rPr lang="en-US" sz="1050" b="1" dirty="0">
+                <a:solidFill>
+                  <a:srgbClr val="0F172A"/>
+                </a:solidFill>
+                <a:latin typeface="Malgun Gothic" pitchFamily="34" charset="0"/>
+                <a:ea typeface="Malgun Gothic" pitchFamily="34" charset="-122"/>
+                <a:cs typeface="Malgun Gothic" pitchFamily="34" charset="-120"/>
+              </a:rPr>
+              <a:t>서울 소재 대형 축제 부스 운영</a:t>
+            </a:r>
+            <a:endParaRPr lang="en-US" sz="1050" dirty="0"/>
+          </a:p>
+        </p:txBody>
+      </p:sp>
+      <p:sp>
+        <p:nvSpPr>
+          <p:cNvPr id="33" name="Text 28"/>
+          <p:cNvSpPr txBox="1"/>
+          <p:nvPr/>
+        </p:nvSpPr>
+        <p:spPr>
+          <a:xfrm>
+            <a:off x="6379312" y="3888724"/>
+            <a:ext cx="2211248" cy="228600"/>
+          </a:xfrm>
+          <a:prstGeom prst="rect">
+            <a:avLst/>
+          </a:prstGeom>
+          <a:noFill/>
+          <a:ln/>
+        </p:spPr>
+        <p:txBody>
+          <a:bodyPr wrap="square" lIns="0" tIns="0" rIns="0" bIns="0" rtlCol="0" anchor="t"/>
+          <a:lstStyle/>
+          <a:p>
+            <a:pPr indent="0" marL="0">
               <a:buNone/>
             </a:pPr>
             <a:r>
@@ -8597,99 +8822,18 @@
       </p:sp>
       <p:sp>
         <p:nvSpPr>
-          <p:cNvPr id="26" name="Text 24"/>
-          <p:cNvSpPr txBox="1"/>
-          <p:nvPr/>
-        </p:nvSpPr>
-        <p:spPr>
-          <a:xfrm>
-            <a:off x="6438748" y="2971800"/>
-            <a:ext cx="2099234" cy="320040"/>
-          </a:xfrm>
-          <a:prstGeom prst="rect">
-            <a:avLst/>
-          </a:prstGeom>
-          <a:noFill/>
-          <a:ln/>
-        </p:spPr>
-        <p:txBody>
-          <a:bodyPr wrap="square" lIns="0" tIns="0" rIns="0" bIns="0" rtlCol="0" anchor="t"/>
-          <a:lstStyle/>
-          <a:p>
-            <a:pPr indent="0" marL="0">
-              <a:buNone/>
-            </a:pPr>
-            <a:r>
-              <a:rPr lang="en-US" sz="1150" b="1" dirty="0">
-                <a:solidFill>
-                  <a:srgbClr val="0F172A"/>
-                </a:solidFill>
-                <a:latin typeface="Malgun Gothic" pitchFamily="34" charset="0"/>
-                <a:ea typeface="Malgun Gothic" pitchFamily="34" charset="-122"/>
-                <a:cs typeface="Malgun Gothic" pitchFamily="34" charset="-120"/>
-              </a:rPr>
-              <a:t>서울 소재 대형 축제 부스 운영</a:t>
-            </a:r>
-            <a:endParaRPr lang="en-US" sz="1150" dirty="0"/>
-          </a:p>
-        </p:txBody>
-      </p:sp>
-      <p:sp>
-        <p:nvSpPr>
-          <p:cNvPr id="27" name="Text 25"/>
-          <p:cNvSpPr txBox="1"/>
-          <p:nvPr/>
-        </p:nvSpPr>
-        <p:spPr>
-          <a:xfrm>
-            <a:off x="6438748" y="3310128"/>
-            <a:ext cx="2099234" cy="777240"/>
-          </a:xfrm>
-          <a:prstGeom prst="rect">
-            <a:avLst/>
-          </a:prstGeom>
-          <a:noFill/>
-          <a:ln/>
-        </p:spPr>
-        <p:txBody>
-          <a:bodyPr wrap="square" lIns="0" tIns="0" rIns="0" bIns="0" rtlCol="0" anchor="t"/>
-          <a:lstStyle/>
-          <a:p>
-            <a:pPr indent="0" marL="0">
-              <a:lnSpc>
-                <a:spcPct val="120000"/>
-              </a:lnSpc>
-              <a:buNone/>
-            </a:pPr>
-            <a:r>
-              <a:rPr lang="en-US" sz="950" dirty="0">
-                <a:solidFill>
-                  <a:srgbClr val="475569"/>
-                </a:solidFill>
-                <a:latin typeface="Malgun Gothic" pitchFamily="34" charset="0"/>
-                <a:ea typeface="Malgun Gothic" pitchFamily="34" charset="-122"/>
-                <a:cs typeface="Malgun Gothic" pitchFamily="34" charset="-120"/>
-              </a:rPr>
-              <a:t>대규모 인파 동선에 맞춘 부스 배치와 안전 관리 체계를 수립하여 운영하였습니다.</a:t>
-            </a:r>
-            <a:endParaRPr lang="en-US" sz="950" dirty="0"/>
-          </a:p>
-        </p:txBody>
-      </p:sp>
-      <p:sp>
-        <p:nvSpPr>
-          <p:cNvPr id="28" name="Shape 26"/>
+          <p:cNvPr id="34" name="Shape 29"/>
           <p:cNvSpPr/>
           <p:nvPr/>
         </p:nvSpPr>
         <p:spPr>
           <a:xfrm>
-            <a:off x="8995181" y="2377440"/>
-            <a:ext cx="2556434" cy="1783080"/>
+            <a:off x="8974607" y="2286000"/>
+            <a:ext cx="2577008" cy="1858756"/>
           </a:xfrm>
           <a:prstGeom prst="roundRect">
             <a:avLst>
-              <a:gd name="adj" fmla="val 5128"/>
+              <a:gd name="adj" fmla="val 4919"/>
             </a:avLst>
           </a:prstGeom>
           <a:solidFill>
@@ -8705,14 +8849,104 @@
       </p:sp>
       <p:sp>
         <p:nvSpPr>
-          <p:cNvPr id="29" name="Shape 27"/>
+          <p:cNvPr id="35" name="Shape 30"/>
           <p:cNvSpPr/>
           <p:nvPr/>
         </p:nvSpPr>
         <p:spPr>
           <a:xfrm>
-            <a:off x="9223781" y="2606040"/>
-            <a:ext cx="1051560" cy="256032"/>
+            <a:off x="8974607" y="2286000"/>
+            <a:ext cx="2577008" cy="1236964"/>
+          </a:xfrm>
+          <a:prstGeom prst="roundRect">
+            <a:avLst>
+              <a:gd name="adj" fmla="val 7392"/>
+            </a:avLst>
+          </a:prstGeom>
+          <a:solidFill>
+            <a:srgbClr val="12305F"/>
+          </a:solidFill>
+          <a:ln w="12700">
+            <a:solidFill>
+              <a:srgbClr val="1F5FD0"/>
+            </a:solidFill>
+            <a:prstDash val="dash"/>
+          </a:ln>
+        </p:spPr>
+      </p:sp>
+      <p:pic>
+        <p:nvPicPr>
+          <p:cNvPr id="36" name="Image 3" descr="preencoded.png">    </p:cNvPr>
+          <p:cNvPicPr>
+            <a:picLocks noChangeAspect="1"/>
+          </p:cNvPicPr>
+          <p:nvPr/>
+        </p:nvPicPr>
+        <p:blipFill>
+          <a:blip r:embed="rId4"/>
+          <a:stretch>
+            <a:fillRect/>
+          </a:stretch>
+        </p:blipFill>
+        <p:spPr>
+          <a:xfrm>
+            <a:off x="10077567" y="2609209"/>
+            <a:ext cx="371089" cy="371089"/>
+          </a:xfrm>
+          <a:prstGeom prst="rect">
+            <a:avLst/>
+          </a:prstGeom>
+        </p:spPr>
+      </p:pic>
+      <p:sp>
+        <p:nvSpPr>
+          <p:cNvPr id="37" name="Text 31"/>
+          <p:cNvSpPr txBox="1"/>
+          <p:nvPr/>
+        </p:nvSpPr>
+        <p:spPr>
+          <a:xfrm>
+            <a:off x="8974607" y="3016874"/>
+            <a:ext cx="2577008" cy="228600"/>
+          </a:xfrm>
+          <a:prstGeom prst="rect">
+            <a:avLst/>
+          </a:prstGeom>
+          <a:noFill/>
+          <a:ln/>
+        </p:spPr>
+        <p:txBody>
+          <a:bodyPr wrap="square" lIns="0" tIns="0" rIns="0" bIns="0" rtlCol="0" anchor="t"/>
+          <a:lstStyle/>
+          <a:p>
+            <a:pPr algn="ctr" indent="0" marL="0">
+              <a:buNone/>
+            </a:pPr>
+            <a:r>
+              <a:rPr lang="en-US" sz="850" dirty="0">
+                <a:solidFill>
+                  <a:srgbClr val="93C5FD"/>
+                </a:solidFill>
+                <a:latin typeface="Malgun Gothic" pitchFamily="34" charset="0"/>
+                <a:ea typeface="Malgun Gothic" pitchFamily="34" charset="-122"/>
+                <a:cs typeface="Malgun Gothic" pitchFamily="34" charset="-120"/>
+              </a:rPr>
+              <a:t>현장 사진</a:t>
+            </a:r>
+            <a:endParaRPr lang="en-US" sz="850" dirty="0"/>
+          </a:p>
+        </p:txBody>
+      </p:sp>
+      <p:sp>
+        <p:nvSpPr>
+          <p:cNvPr id="38" name="Shape 32"/>
+          <p:cNvSpPr/>
+          <p:nvPr/>
+        </p:nvSpPr>
+        <p:spPr>
+          <a:xfrm>
+            <a:off x="9111767" y="2423160"/>
+            <a:ext cx="914400" cy="237744"/>
           </a:xfrm>
           <a:prstGeom prst="roundRect">
             <a:avLst>
@@ -8732,14 +8966,14 @@
       </p:sp>
       <p:sp>
         <p:nvSpPr>
-          <p:cNvPr id="30" name="Text 28"/>
-          <p:cNvSpPr txBox="1"/>
-          <p:nvPr/>
-        </p:nvSpPr>
-        <p:spPr>
-          <a:xfrm>
-            <a:off x="9223781" y="2606040"/>
-            <a:ext cx="1051560" cy="256032"/>
+          <p:cNvPr id="39" name="Text 33"/>
+          <p:cNvSpPr txBox="1"/>
+          <p:nvPr/>
+        </p:nvSpPr>
+        <p:spPr>
+          <a:xfrm>
+            <a:off x="9111767" y="2423160"/>
+            <a:ext cx="914400" cy="237744"/>
           </a:xfrm>
           <a:prstGeom prst="rect">
             <a:avLst/>
@@ -8755,7 +8989,7 @@
               <a:buNone/>
             </a:pPr>
             <a:r>
-              <a:rPr lang="en-US" sz="850" b="1" dirty="0">
+              <a:rPr lang="en-US" sz="800" b="1" dirty="0">
                 <a:solidFill>
                   <a:srgbClr val="FFFFFF"/>
                 </a:solidFill>
@@ -8765,32 +8999,71 @@
               </a:rPr>
               <a:t>야시장</a:t>
             </a:r>
-            <a:endParaRPr lang="en-US" sz="850" dirty="0"/>
-          </a:p>
-        </p:txBody>
-      </p:sp>
-      <p:sp>
-        <p:nvSpPr>
-          <p:cNvPr id="31" name="Text 29"/>
-          <p:cNvSpPr txBox="1"/>
-          <p:nvPr/>
-        </p:nvSpPr>
-        <p:spPr>
-          <a:xfrm>
-            <a:off x="10366781" y="2606040"/>
-            <a:ext cx="1001954" cy="256032"/>
-          </a:xfrm>
-          <a:prstGeom prst="rect">
-            <a:avLst/>
-          </a:prstGeom>
-          <a:noFill/>
-          <a:ln/>
-        </p:spPr>
-        <p:txBody>
-          <a:bodyPr wrap="square" lIns="0" tIns="0" rIns="0" bIns="0" rtlCol="0" anchor="ctr"/>
-          <a:lstStyle/>
-          <a:p>
-            <a:pPr algn="r" indent="0" marL="0">
+            <a:endParaRPr lang="en-US" sz="800" dirty="0"/>
+          </a:p>
+        </p:txBody>
+      </p:sp>
+      <p:sp>
+        <p:nvSpPr>
+          <p:cNvPr id="40" name="Text 34"/>
+          <p:cNvSpPr txBox="1"/>
+          <p:nvPr/>
+        </p:nvSpPr>
+        <p:spPr>
+          <a:xfrm>
+            <a:off x="9157487" y="3632692"/>
+            <a:ext cx="2211248" cy="274320"/>
+          </a:xfrm>
+          <a:prstGeom prst="rect">
+            <a:avLst/>
+          </a:prstGeom>
+          <a:noFill/>
+          <a:ln/>
+        </p:spPr>
+        <p:txBody>
+          <a:bodyPr wrap="square" lIns="0" tIns="0" rIns="0" bIns="0" rtlCol="0" anchor="t"/>
+          <a:lstStyle/>
+          <a:p>
+            <a:pPr indent="0" marL="0">
+              <a:buNone/>
+            </a:pPr>
+            <a:r>
+              <a:rPr lang="en-US" sz="1050" b="1" dirty="0">
+                <a:solidFill>
+                  <a:srgbClr val="0F172A"/>
+                </a:solidFill>
+                <a:latin typeface="Malgun Gothic" pitchFamily="34" charset="0"/>
+                <a:ea typeface="Malgun Gothic" pitchFamily="34" charset="-122"/>
+                <a:cs typeface="Malgun Gothic" pitchFamily="34" charset="-120"/>
+              </a:rPr>
+              <a:t>서울 소재 아파트 야시장 운영</a:t>
+            </a:r>
+            <a:endParaRPr lang="en-US" sz="1050" dirty="0"/>
+          </a:p>
+        </p:txBody>
+      </p:sp>
+      <p:sp>
+        <p:nvSpPr>
+          <p:cNvPr id="41" name="Text 35"/>
+          <p:cNvSpPr txBox="1"/>
+          <p:nvPr/>
+        </p:nvSpPr>
+        <p:spPr>
+          <a:xfrm>
+            <a:off x="9157487" y="3888724"/>
+            <a:ext cx="2211248" cy="228600"/>
+          </a:xfrm>
+          <a:prstGeom prst="rect">
+            <a:avLst/>
+          </a:prstGeom>
+          <a:noFill/>
+          <a:ln/>
+        </p:spPr>
+        <p:txBody>
+          <a:bodyPr wrap="square" lIns="0" tIns="0" rIns="0" bIns="0" rtlCol="0" anchor="t"/>
+          <a:lstStyle/>
+          <a:p>
+            <a:pPr indent="0" marL="0">
               <a:buNone/>
             </a:pPr>
             <a:r>
@@ -8810,99 +9083,18 @@
       </p:sp>
       <p:sp>
         <p:nvSpPr>
-          <p:cNvPr id="32" name="Text 30"/>
-          <p:cNvSpPr txBox="1"/>
-          <p:nvPr/>
-        </p:nvSpPr>
-        <p:spPr>
-          <a:xfrm>
-            <a:off x="9223781" y="2971800"/>
-            <a:ext cx="2099234" cy="320040"/>
-          </a:xfrm>
-          <a:prstGeom prst="rect">
-            <a:avLst/>
-          </a:prstGeom>
-          <a:noFill/>
-          <a:ln/>
-        </p:spPr>
-        <p:txBody>
-          <a:bodyPr wrap="square" lIns="0" tIns="0" rIns="0" bIns="0" rtlCol="0" anchor="t"/>
-          <a:lstStyle/>
-          <a:p>
-            <a:pPr indent="0" marL="0">
-              <a:buNone/>
-            </a:pPr>
-            <a:r>
-              <a:rPr lang="en-US" sz="1150" b="1" dirty="0">
-                <a:solidFill>
-                  <a:srgbClr val="0F172A"/>
-                </a:solidFill>
-                <a:latin typeface="Malgun Gothic" pitchFamily="34" charset="0"/>
-                <a:ea typeface="Malgun Gothic" pitchFamily="34" charset="-122"/>
-                <a:cs typeface="Malgun Gothic" pitchFamily="34" charset="-120"/>
-              </a:rPr>
-              <a:t>서울 소재 아파트 야시장 운영</a:t>
-            </a:r>
-            <a:endParaRPr lang="en-US" sz="1150" dirty="0"/>
-          </a:p>
-        </p:txBody>
-      </p:sp>
-      <p:sp>
-        <p:nvSpPr>
-          <p:cNvPr id="33" name="Text 31"/>
-          <p:cNvSpPr txBox="1"/>
-          <p:nvPr/>
-        </p:nvSpPr>
-        <p:spPr>
-          <a:xfrm>
-            <a:off x="9223781" y="3310128"/>
-            <a:ext cx="2099234" cy="777240"/>
-          </a:xfrm>
-          <a:prstGeom prst="rect">
-            <a:avLst/>
-          </a:prstGeom>
-          <a:noFill/>
-          <a:ln/>
-        </p:spPr>
-        <p:txBody>
-          <a:bodyPr wrap="square" lIns="0" tIns="0" rIns="0" bIns="0" rtlCol="0" anchor="t"/>
-          <a:lstStyle/>
-          <a:p>
-            <a:pPr indent="0" marL="0">
-              <a:lnSpc>
-                <a:spcPct val="120000"/>
-              </a:lnSpc>
-              <a:buNone/>
-            </a:pPr>
-            <a:r>
-              <a:rPr lang="en-US" sz="950" dirty="0">
-                <a:solidFill>
-                  <a:srgbClr val="475569"/>
-                </a:solidFill>
-                <a:latin typeface="Malgun Gothic" pitchFamily="34" charset="0"/>
-                <a:ea typeface="Malgun Gothic" pitchFamily="34" charset="-122"/>
-                <a:cs typeface="Malgun Gothic" pitchFamily="34" charset="-120"/>
-              </a:rPr>
-              <a:t>단지 내 유휴 공간을 활용한 주민 참여형 야시장을 관리사무소와 협업하여 운영하였습니다.</a:t>
-            </a:r>
-            <a:endParaRPr lang="en-US" sz="950" dirty="0"/>
-          </a:p>
-        </p:txBody>
-      </p:sp>
-      <p:sp>
-        <p:nvSpPr>
-          <p:cNvPr id="34" name="Shape 32"/>
+          <p:cNvPr id="42" name="Shape 36"/>
           <p:cNvSpPr/>
           <p:nvPr/>
         </p:nvSpPr>
         <p:spPr>
           <a:xfrm>
-            <a:off x="640080" y="4389120"/>
-            <a:ext cx="2556434" cy="1783080"/>
+            <a:off x="640080" y="4327636"/>
+            <a:ext cx="2577008" cy="1858756"/>
           </a:xfrm>
           <a:prstGeom prst="roundRect">
             <a:avLst>
-              <a:gd name="adj" fmla="val 5128"/>
+              <a:gd name="adj" fmla="val 4919"/>
             </a:avLst>
           </a:prstGeom>
           <a:solidFill>
@@ -8918,14 +9110,104 @@
       </p:sp>
       <p:sp>
         <p:nvSpPr>
-          <p:cNvPr id="35" name="Shape 33"/>
+          <p:cNvPr id="43" name="Shape 37"/>
           <p:cNvSpPr/>
           <p:nvPr/>
         </p:nvSpPr>
         <p:spPr>
           <a:xfrm>
-            <a:off x="868680" y="4617720"/>
-            <a:ext cx="1051560" cy="256032"/>
+            <a:off x="640080" y="4327636"/>
+            <a:ext cx="2577008" cy="1236964"/>
+          </a:xfrm>
+          <a:prstGeom prst="roundRect">
+            <a:avLst>
+              <a:gd name="adj" fmla="val 7392"/>
+            </a:avLst>
+          </a:prstGeom>
+          <a:solidFill>
+            <a:srgbClr val="12305F"/>
+          </a:solidFill>
+          <a:ln w="12700">
+            <a:solidFill>
+              <a:srgbClr val="1F5FD0"/>
+            </a:solidFill>
+            <a:prstDash val="dash"/>
+          </a:ln>
+        </p:spPr>
+      </p:sp>
+      <p:pic>
+        <p:nvPicPr>
+          <p:cNvPr id="44" name="Image 4" descr="preencoded.png">    </p:cNvPr>
+          <p:cNvPicPr>
+            <a:picLocks noChangeAspect="1"/>
+          </p:cNvPicPr>
+          <p:nvPr/>
+        </p:nvPicPr>
+        <p:blipFill>
+          <a:blip r:embed="rId5"/>
+          <a:stretch>
+            <a:fillRect/>
+          </a:stretch>
+        </p:blipFill>
+        <p:spPr>
+          <a:xfrm>
+            <a:off x="1743039" y="4650845"/>
+            <a:ext cx="371089" cy="371089"/>
+          </a:xfrm>
+          <a:prstGeom prst="rect">
+            <a:avLst/>
+          </a:prstGeom>
+        </p:spPr>
+      </p:pic>
+      <p:sp>
+        <p:nvSpPr>
+          <p:cNvPr id="45" name="Text 38"/>
+          <p:cNvSpPr txBox="1"/>
+          <p:nvPr/>
+        </p:nvSpPr>
+        <p:spPr>
+          <a:xfrm>
+            <a:off x="640080" y="5058510"/>
+            <a:ext cx="2577008" cy="228600"/>
+          </a:xfrm>
+          <a:prstGeom prst="rect">
+            <a:avLst/>
+          </a:prstGeom>
+          <a:noFill/>
+          <a:ln/>
+        </p:spPr>
+        <p:txBody>
+          <a:bodyPr wrap="square" lIns="0" tIns="0" rIns="0" bIns="0" rtlCol="0" anchor="t"/>
+          <a:lstStyle/>
+          <a:p>
+            <a:pPr algn="ctr" indent="0" marL="0">
+              <a:buNone/>
+            </a:pPr>
+            <a:r>
+              <a:rPr lang="en-US" sz="850" dirty="0">
+                <a:solidFill>
+                  <a:srgbClr val="93C5FD"/>
+                </a:solidFill>
+                <a:latin typeface="Malgun Gothic" pitchFamily="34" charset="0"/>
+                <a:ea typeface="Malgun Gothic" pitchFamily="34" charset="-122"/>
+                <a:cs typeface="Malgun Gothic" pitchFamily="34" charset="-120"/>
+              </a:rPr>
+              <a:t>현장 사진</a:t>
+            </a:r>
+            <a:endParaRPr lang="en-US" sz="850" dirty="0"/>
+          </a:p>
+        </p:txBody>
+      </p:sp>
+      <p:sp>
+        <p:nvSpPr>
+          <p:cNvPr id="46" name="Shape 39"/>
+          <p:cNvSpPr/>
+          <p:nvPr/>
+        </p:nvSpPr>
+        <p:spPr>
+          <a:xfrm>
+            <a:off x="777240" y="4464796"/>
+            <a:ext cx="914400" cy="237744"/>
           </a:xfrm>
           <a:prstGeom prst="roundRect">
             <a:avLst>
@@ -8945,14 +9227,14 @@
       </p:sp>
       <p:sp>
         <p:nvSpPr>
-          <p:cNvPr id="36" name="Text 34"/>
-          <p:cNvSpPr txBox="1"/>
-          <p:nvPr/>
-        </p:nvSpPr>
-        <p:spPr>
-          <a:xfrm>
-            <a:off x="868680" y="4617720"/>
-            <a:ext cx="1051560" cy="256032"/>
+          <p:cNvPr id="47" name="Text 40"/>
+          <p:cNvSpPr txBox="1"/>
+          <p:nvPr/>
+        </p:nvSpPr>
+        <p:spPr>
+          <a:xfrm>
+            <a:off x="777240" y="4464796"/>
+            <a:ext cx="914400" cy="237744"/>
           </a:xfrm>
           <a:prstGeom prst="rect">
             <a:avLst/>
@@ -8968,7 +9250,7 @@
               <a:buNone/>
             </a:pPr>
             <a:r>
-              <a:rPr lang="en-US" sz="850" b="1" dirty="0">
+              <a:rPr lang="en-US" sz="800" b="1" dirty="0">
                 <a:solidFill>
                   <a:srgbClr val="FFFFFF"/>
                 </a:solidFill>
@@ -8978,32 +9260,71 @@
               </a:rPr>
               <a:t>야시장</a:t>
             </a:r>
-            <a:endParaRPr lang="en-US" sz="850" dirty="0"/>
-          </a:p>
-        </p:txBody>
-      </p:sp>
-      <p:sp>
-        <p:nvSpPr>
-          <p:cNvPr id="37" name="Text 35"/>
-          <p:cNvSpPr txBox="1"/>
-          <p:nvPr/>
-        </p:nvSpPr>
-        <p:spPr>
-          <a:xfrm>
-            <a:off x="2011680" y="4617720"/>
-            <a:ext cx="1001954" cy="256032"/>
-          </a:xfrm>
-          <a:prstGeom prst="rect">
-            <a:avLst/>
-          </a:prstGeom>
-          <a:noFill/>
-          <a:ln/>
-        </p:spPr>
-        <p:txBody>
-          <a:bodyPr wrap="square" lIns="0" tIns="0" rIns="0" bIns="0" rtlCol="0" anchor="ctr"/>
-          <a:lstStyle/>
-          <a:p>
-            <a:pPr algn="r" indent="0" marL="0">
+            <a:endParaRPr lang="en-US" sz="800" dirty="0"/>
+          </a:p>
+        </p:txBody>
+      </p:sp>
+      <p:sp>
+        <p:nvSpPr>
+          <p:cNvPr id="48" name="Text 41"/>
+          <p:cNvSpPr txBox="1"/>
+          <p:nvPr/>
+        </p:nvSpPr>
+        <p:spPr>
+          <a:xfrm>
+            <a:off x="822960" y="5674327"/>
+            <a:ext cx="2211248" cy="274320"/>
+          </a:xfrm>
+          <a:prstGeom prst="rect">
+            <a:avLst/>
+          </a:prstGeom>
+          <a:noFill/>
+          <a:ln/>
+        </p:spPr>
+        <p:txBody>
+          <a:bodyPr wrap="square" lIns="0" tIns="0" rIns="0" bIns="0" rtlCol="0" anchor="t"/>
+          <a:lstStyle/>
+          <a:p>
+            <a:pPr indent="0" marL="0">
+              <a:buNone/>
+            </a:pPr>
+            <a:r>
+              <a:rPr lang="en-US" sz="1050" b="1" dirty="0">
+                <a:solidFill>
+                  <a:srgbClr val="0F172A"/>
+                </a:solidFill>
+                <a:latin typeface="Malgun Gothic" pitchFamily="34" charset="0"/>
+                <a:ea typeface="Malgun Gothic" pitchFamily="34" charset="-122"/>
+                <a:cs typeface="Malgun Gothic" pitchFamily="34" charset="-120"/>
+              </a:rPr>
+              <a:t>하남 소재 아파트 야시장 운영</a:t>
+            </a:r>
+            <a:endParaRPr lang="en-US" sz="1050" dirty="0"/>
+          </a:p>
+        </p:txBody>
+      </p:sp>
+      <p:sp>
+        <p:nvSpPr>
+          <p:cNvPr id="49" name="Text 42"/>
+          <p:cNvSpPr txBox="1"/>
+          <p:nvPr/>
+        </p:nvSpPr>
+        <p:spPr>
+          <a:xfrm>
+            <a:off x="822960" y="5930359"/>
+            <a:ext cx="2211248" cy="228600"/>
+          </a:xfrm>
+          <a:prstGeom prst="rect">
+            <a:avLst/>
+          </a:prstGeom>
+          <a:noFill/>
+          <a:ln/>
+        </p:spPr>
+        <p:txBody>
+          <a:bodyPr wrap="square" lIns="0" tIns="0" rIns="0" bIns="0" rtlCol="0" anchor="t"/>
+          <a:lstStyle/>
+          <a:p>
+            <a:pPr indent="0" marL="0">
               <a:buNone/>
             </a:pPr>
             <a:r>
@@ -9023,99 +9344,18 @@
       </p:sp>
       <p:sp>
         <p:nvSpPr>
-          <p:cNvPr id="38" name="Text 36"/>
-          <p:cNvSpPr txBox="1"/>
-          <p:nvPr/>
-        </p:nvSpPr>
-        <p:spPr>
-          <a:xfrm>
-            <a:off x="868680" y="4983480"/>
-            <a:ext cx="2099234" cy="320040"/>
-          </a:xfrm>
-          <a:prstGeom prst="rect">
-            <a:avLst/>
-          </a:prstGeom>
-          <a:noFill/>
-          <a:ln/>
-        </p:spPr>
-        <p:txBody>
-          <a:bodyPr wrap="square" lIns="0" tIns="0" rIns="0" bIns="0" rtlCol="0" anchor="t"/>
-          <a:lstStyle/>
-          <a:p>
-            <a:pPr indent="0" marL="0">
-              <a:buNone/>
-            </a:pPr>
-            <a:r>
-              <a:rPr lang="en-US" sz="1150" b="1" dirty="0">
-                <a:solidFill>
-                  <a:srgbClr val="0F172A"/>
-                </a:solidFill>
-                <a:latin typeface="Malgun Gothic" pitchFamily="34" charset="0"/>
-                <a:ea typeface="Malgun Gothic" pitchFamily="34" charset="-122"/>
-                <a:cs typeface="Malgun Gothic" pitchFamily="34" charset="-120"/>
-              </a:rPr>
-              <a:t>하남 소재 아파트 야시장 운영</a:t>
-            </a:r>
-            <a:endParaRPr lang="en-US" sz="1150" dirty="0"/>
-          </a:p>
-        </p:txBody>
-      </p:sp>
-      <p:sp>
-        <p:nvSpPr>
-          <p:cNvPr id="39" name="Text 37"/>
-          <p:cNvSpPr txBox="1"/>
-          <p:nvPr/>
-        </p:nvSpPr>
-        <p:spPr>
-          <a:xfrm>
-            <a:off x="868680" y="5321808"/>
-            <a:ext cx="2099234" cy="777240"/>
-          </a:xfrm>
-          <a:prstGeom prst="rect">
-            <a:avLst/>
-          </a:prstGeom>
-          <a:noFill/>
-          <a:ln/>
-        </p:spPr>
-        <p:txBody>
-          <a:bodyPr wrap="square" lIns="0" tIns="0" rIns="0" bIns="0" rtlCol="0" anchor="t"/>
-          <a:lstStyle/>
-          <a:p>
-            <a:pPr indent="0" marL="0">
-              <a:lnSpc>
-                <a:spcPct val="120000"/>
-              </a:lnSpc>
-              <a:buNone/>
-            </a:pPr>
-            <a:r>
-              <a:rPr lang="en-US" sz="950" dirty="0">
-                <a:solidFill>
-                  <a:srgbClr val="475569"/>
-                </a:solidFill>
-                <a:latin typeface="Malgun Gothic" pitchFamily="34" charset="0"/>
-                <a:ea typeface="Malgun Gothic" pitchFamily="34" charset="-122"/>
-                <a:cs typeface="Malgun Gothic" pitchFamily="34" charset="-120"/>
-              </a:rPr>
-              <a:t>가족 단위 방문객을 고려한 키즈 체험·먹거리 콘텐츠로 높은 참여율을 기록하였습니다.</a:t>
-            </a:r>
-            <a:endParaRPr lang="en-US" sz="950" dirty="0"/>
-          </a:p>
-        </p:txBody>
-      </p:sp>
-      <p:sp>
-        <p:nvSpPr>
-          <p:cNvPr id="40" name="Shape 38"/>
+          <p:cNvPr id="50" name="Shape 43"/>
           <p:cNvSpPr/>
           <p:nvPr/>
         </p:nvSpPr>
         <p:spPr>
           <a:xfrm>
-            <a:off x="3425114" y="4389120"/>
-            <a:ext cx="2556434" cy="1783080"/>
+            <a:off x="3418256" y="4327636"/>
+            <a:ext cx="2577008" cy="1858756"/>
           </a:xfrm>
           <a:prstGeom prst="roundRect">
             <a:avLst>
-              <a:gd name="adj" fmla="val 5128"/>
+              <a:gd name="adj" fmla="val 4919"/>
             </a:avLst>
           </a:prstGeom>
           <a:solidFill>
@@ -9131,14 +9371,104 @@
       </p:sp>
       <p:sp>
         <p:nvSpPr>
-          <p:cNvPr id="41" name="Shape 39"/>
+          <p:cNvPr id="51" name="Shape 44"/>
           <p:cNvSpPr/>
           <p:nvPr/>
         </p:nvSpPr>
         <p:spPr>
           <a:xfrm>
-            <a:off x="3653714" y="4617720"/>
-            <a:ext cx="1051560" cy="256032"/>
+            <a:off x="3418256" y="4327636"/>
+            <a:ext cx="2577008" cy="1236964"/>
+          </a:xfrm>
+          <a:prstGeom prst="roundRect">
+            <a:avLst>
+              <a:gd name="adj" fmla="val 7392"/>
+            </a:avLst>
+          </a:prstGeom>
+          <a:solidFill>
+            <a:srgbClr val="12305F"/>
+          </a:solidFill>
+          <a:ln w="12700">
+            <a:solidFill>
+              <a:srgbClr val="1F5FD0"/>
+            </a:solidFill>
+            <a:prstDash val="dash"/>
+          </a:ln>
+        </p:spPr>
+      </p:sp>
+      <p:pic>
+        <p:nvPicPr>
+          <p:cNvPr id="52" name="Image 5" descr="preencoded.png">    </p:cNvPr>
+          <p:cNvPicPr>
+            <a:picLocks noChangeAspect="1"/>
+          </p:cNvPicPr>
+          <p:nvPr/>
+        </p:nvPicPr>
+        <p:blipFill>
+          <a:blip r:embed="rId6"/>
+          <a:stretch>
+            <a:fillRect/>
+          </a:stretch>
+        </p:blipFill>
+        <p:spPr>
+          <a:xfrm>
+            <a:off x="4521215" y="4650845"/>
+            <a:ext cx="371089" cy="371089"/>
+          </a:xfrm>
+          <a:prstGeom prst="rect">
+            <a:avLst/>
+          </a:prstGeom>
+        </p:spPr>
+      </p:pic>
+      <p:sp>
+        <p:nvSpPr>
+          <p:cNvPr id="53" name="Text 45"/>
+          <p:cNvSpPr txBox="1"/>
+          <p:nvPr/>
+        </p:nvSpPr>
+        <p:spPr>
+          <a:xfrm>
+            <a:off x="3418256" y="5058510"/>
+            <a:ext cx="2577008" cy="228600"/>
+          </a:xfrm>
+          <a:prstGeom prst="rect">
+            <a:avLst/>
+          </a:prstGeom>
+          <a:noFill/>
+          <a:ln/>
+        </p:spPr>
+        <p:txBody>
+          <a:bodyPr wrap="square" lIns="0" tIns="0" rIns="0" bIns="0" rtlCol="0" anchor="t"/>
+          <a:lstStyle/>
+          <a:p>
+            <a:pPr algn="ctr" indent="0" marL="0">
+              <a:buNone/>
+            </a:pPr>
+            <a:r>
+              <a:rPr lang="en-US" sz="850" dirty="0">
+                <a:solidFill>
+                  <a:srgbClr val="93C5FD"/>
+                </a:solidFill>
+                <a:latin typeface="Malgun Gothic" pitchFamily="34" charset="0"/>
+                <a:ea typeface="Malgun Gothic" pitchFamily="34" charset="-122"/>
+                <a:cs typeface="Malgun Gothic" pitchFamily="34" charset="-120"/>
+              </a:rPr>
+              <a:t>현장 사진</a:t>
+            </a:r>
+            <a:endParaRPr lang="en-US" sz="850" dirty="0"/>
+          </a:p>
+        </p:txBody>
+      </p:sp>
+      <p:sp>
+        <p:nvSpPr>
+          <p:cNvPr id="54" name="Shape 46"/>
+          <p:cNvSpPr/>
+          <p:nvPr/>
+        </p:nvSpPr>
+        <p:spPr>
+          <a:xfrm>
+            <a:off x="3555416" y="4464796"/>
+            <a:ext cx="914400" cy="237744"/>
           </a:xfrm>
           <a:prstGeom prst="roundRect">
             <a:avLst>
@@ -9158,14 +9488,14 @@
       </p:sp>
       <p:sp>
         <p:nvSpPr>
-          <p:cNvPr id="42" name="Text 40"/>
-          <p:cNvSpPr txBox="1"/>
-          <p:nvPr/>
-        </p:nvSpPr>
-        <p:spPr>
-          <a:xfrm>
-            <a:off x="3653714" y="4617720"/>
-            <a:ext cx="1051560" cy="256032"/>
+          <p:cNvPr id="55" name="Text 47"/>
+          <p:cNvSpPr txBox="1"/>
+          <p:nvPr/>
+        </p:nvSpPr>
+        <p:spPr>
+          <a:xfrm>
+            <a:off x="3555416" y="4464796"/>
+            <a:ext cx="914400" cy="237744"/>
           </a:xfrm>
           <a:prstGeom prst="rect">
             <a:avLst/>
@@ -9181,7 +9511,7 @@
               <a:buNone/>
             </a:pPr>
             <a:r>
-              <a:rPr lang="en-US" sz="850" b="1" dirty="0">
+              <a:rPr lang="en-US" sz="800" b="1" dirty="0">
                 <a:solidFill>
                   <a:srgbClr val="FFFFFF"/>
                 </a:solidFill>
@@ -9191,32 +9521,71 @@
               </a:rPr>
               <a:t>캠퍼스 마켓</a:t>
             </a:r>
-            <a:endParaRPr lang="en-US" sz="850" dirty="0"/>
-          </a:p>
-        </p:txBody>
-      </p:sp>
-      <p:sp>
-        <p:nvSpPr>
-          <p:cNvPr id="43" name="Text 41"/>
-          <p:cNvSpPr txBox="1"/>
-          <p:nvPr/>
-        </p:nvSpPr>
-        <p:spPr>
-          <a:xfrm>
-            <a:off x="4796714" y="4617720"/>
-            <a:ext cx="1001954" cy="256032"/>
-          </a:xfrm>
-          <a:prstGeom prst="rect">
-            <a:avLst/>
-          </a:prstGeom>
-          <a:noFill/>
-          <a:ln/>
-        </p:spPr>
-        <p:txBody>
-          <a:bodyPr wrap="square" lIns="0" tIns="0" rIns="0" bIns="0" rtlCol="0" anchor="ctr"/>
-          <a:lstStyle/>
-          <a:p>
-            <a:pPr algn="r" indent="0" marL="0">
+            <a:endParaRPr lang="en-US" sz="800" dirty="0"/>
+          </a:p>
+        </p:txBody>
+      </p:sp>
+      <p:sp>
+        <p:nvSpPr>
+          <p:cNvPr id="56" name="Text 48"/>
+          <p:cNvSpPr txBox="1"/>
+          <p:nvPr/>
+        </p:nvSpPr>
+        <p:spPr>
+          <a:xfrm>
+            <a:off x="3601136" y="5674327"/>
+            <a:ext cx="2211248" cy="274320"/>
+          </a:xfrm>
+          <a:prstGeom prst="rect">
+            <a:avLst/>
+          </a:prstGeom>
+          <a:noFill/>
+          <a:ln/>
+        </p:spPr>
+        <p:txBody>
+          <a:bodyPr wrap="square" lIns="0" tIns="0" rIns="0" bIns="0" rtlCol="0" anchor="t"/>
+          <a:lstStyle/>
+          <a:p>
+            <a:pPr indent="0" marL="0">
+              <a:buNone/>
+            </a:pPr>
+            <a:r>
+              <a:rPr lang="en-US" sz="1050" b="1" dirty="0">
+                <a:solidFill>
+                  <a:srgbClr val="0F172A"/>
+                </a:solidFill>
+                <a:latin typeface="Malgun Gothic" pitchFamily="34" charset="0"/>
+                <a:ea typeface="Malgun Gothic" pitchFamily="34" charset="-122"/>
+                <a:cs typeface="Malgun Gothic" pitchFamily="34" charset="-120"/>
+              </a:rPr>
+              <a:t>서울 소재 대학교 플리마켓 운영</a:t>
+            </a:r>
+            <a:endParaRPr lang="en-US" sz="1050" dirty="0"/>
+          </a:p>
+        </p:txBody>
+      </p:sp>
+      <p:sp>
+        <p:nvSpPr>
+          <p:cNvPr id="57" name="Text 49"/>
+          <p:cNvSpPr txBox="1"/>
+          <p:nvPr/>
+        </p:nvSpPr>
+        <p:spPr>
+          <a:xfrm>
+            <a:off x="3601136" y="5930359"/>
+            <a:ext cx="2211248" cy="228600"/>
+          </a:xfrm>
+          <a:prstGeom prst="rect">
+            <a:avLst/>
+          </a:prstGeom>
+          <a:noFill/>
+          <a:ln/>
+        </p:spPr>
+        <p:txBody>
+          <a:bodyPr wrap="square" lIns="0" tIns="0" rIns="0" bIns="0" rtlCol="0" anchor="t"/>
+          <a:lstStyle/>
+          <a:p>
+            <a:pPr indent="0" marL="0">
               <a:buNone/>
             </a:pPr>
             <a:r>
@@ -9236,99 +9605,18 @@
       </p:sp>
       <p:sp>
         <p:nvSpPr>
-          <p:cNvPr id="44" name="Text 42"/>
-          <p:cNvSpPr txBox="1"/>
-          <p:nvPr/>
-        </p:nvSpPr>
-        <p:spPr>
-          <a:xfrm>
-            <a:off x="3653714" y="4983480"/>
-            <a:ext cx="2099234" cy="320040"/>
-          </a:xfrm>
-          <a:prstGeom prst="rect">
-            <a:avLst/>
-          </a:prstGeom>
-          <a:noFill/>
-          <a:ln/>
-        </p:spPr>
-        <p:txBody>
-          <a:bodyPr wrap="square" lIns="0" tIns="0" rIns="0" bIns="0" rtlCol="0" anchor="t"/>
-          <a:lstStyle/>
-          <a:p>
-            <a:pPr indent="0" marL="0">
-              <a:buNone/>
-            </a:pPr>
-            <a:r>
-              <a:rPr lang="en-US" sz="1150" b="1" dirty="0">
-                <a:solidFill>
-                  <a:srgbClr val="0F172A"/>
-                </a:solidFill>
-                <a:latin typeface="Malgun Gothic" pitchFamily="34" charset="0"/>
-                <a:ea typeface="Malgun Gothic" pitchFamily="34" charset="-122"/>
-                <a:cs typeface="Malgun Gothic" pitchFamily="34" charset="-120"/>
-              </a:rPr>
-              <a:t>서울 소재 대학교 플리마켓 운영</a:t>
-            </a:r>
-            <a:endParaRPr lang="en-US" sz="1150" dirty="0"/>
-          </a:p>
-        </p:txBody>
-      </p:sp>
-      <p:sp>
-        <p:nvSpPr>
-          <p:cNvPr id="45" name="Text 43"/>
-          <p:cNvSpPr txBox="1"/>
-          <p:nvPr/>
-        </p:nvSpPr>
-        <p:spPr>
-          <a:xfrm>
-            <a:off x="3653714" y="5321808"/>
-            <a:ext cx="2099234" cy="777240"/>
-          </a:xfrm>
-          <a:prstGeom prst="rect">
-            <a:avLst/>
-          </a:prstGeom>
-          <a:noFill/>
-          <a:ln/>
-        </p:spPr>
-        <p:txBody>
-          <a:bodyPr wrap="square" lIns="0" tIns="0" rIns="0" bIns="0" rtlCol="0" anchor="t"/>
-          <a:lstStyle/>
-          <a:p>
-            <a:pPr indent="0" marL="0">
-              <a:lnSpc>
-                <a:spcPct val="120000"/>
-              </a:lnSpc>
-              <a:buNone/>
-            </a:pPr>
-            <a:r>
-              <a:rPr lang="en-US" sz="950" dirty="0">
-                <a:solidFill>
-                  <a:srgbClr val="475569"/>
-                </a:solidFill>
-                <a:latin typeface="Malgun Gothic" pitchFamily="34" charset="0"/>
-                <a:ea typeface="Malgun Gothic" pitchFamily="34" charset="-122"/>
-                <a:cs typeface="Malgun Gothic" pitchFamily="34" charset="-120"/>
-              </a:rPr>
-              <a:t>학생 창업팀 우선 선발과 플릿 셀러 조합으로 품질 높은 캠퍼스 마켓을 구현하였습니다.</a:t>
-            </a:r>
-            <a:endParaRPr lang="en-US" sz="950" dirty="0"/>
-          </a:p>
-        </p:txBody>
-      </p:sp>
-      <p:sp>
-        <p:nvSpPr>
-          <p:cNvPr id="46" name="Shape 44"/>
+          <p:cNvPr id="58" name="Shape 50"/>
           <p:cNvSpPr/>
           <p:nvPr/>
         </p:nvSpPr>
         <p:spPr>
           <a:xfrm>
-            <a:off x="6210148" y="4389120"/>
-            <a:ext cx="2556434" cy="1783080"/>
+            <a:off x="6196432" y="4327636"/>
+            <a:ext cx="2577008" cy="1858756"/>
           </a:xfrm>
           <a:prstGeom prst="roundRect">
             <a:avLst>
-              <a:gd name="adj" fmla="val 5128"/>
+              <a:gd name="adj" fmla="val 4919"/>
             </a:avLst>
           </a:prstGeom>
           <a:solidFill>
@@ -9344,14 +9632,104 @@
       </p:sp>
       <p:sp>
         <p:nvSpPr>
-          <p:cNvPr id="47" name="Shape 45"/>
+          <p:cNvPr id="59" name="Shape 51"/>
           <p:cNvSpPr/>
           <p:nvPr/>
         </p:nvSpPr>
         <p:spPr>
           <a:xfrm>
-            <a:off x="6438748" y="4617720"/>
-            <a:ext cx="1051560" cy="256032"/>
+            <a:off x="6196432" y="4327636"/>
+            <a:ext cx="2577008" cy="1236964"/>
+          </a:xfrm>
+          <a:prstGeom prst="roundRect">
+            <a:avLst>
+              <a:gd name="adj" fmla="val 7392"/>
+            </a:avLst>
+          </a:prstGeom>
+          <a:solidFill>
+            <a:srgbClr val="12305F"/>
+          </a:solidFill>
+          <a:ln w="12700">
+            <a:solidFill>
+              <a:srgbClr val="1F5FD0"/>
+            </a:solidFill>
+            <a:prstDash val="dash"/>
+          </a:ln>
+        </p:spPr>
+      </p:sp>
+      <p:pic>
+        <p:nvPicPr>
+          <p:cNvPr id="60" name="Image 6" descr="preencoded.png">    </p:cNvPr>
+          <p:cNvPicPr>
+            <a:picLocks noChangeAspect="1"/>
+          </p:cNvPicPr>
+          <p:nvPr/>
+        </p:nvPicPr>
+        <p:blipFill>
+          <a:blip r:embed="rId7"/>
+          <a:stretch>
+            <a:fillRect/>
+          </a:stretch>
+        </p:blipFill>
+        <p:spPr>
+          <a:xfrm>
+            <a:off x="7299391" y="4650845"/>
+            <a:ext cx="371089" cy="371089"/>
+          </a:xfrm>
+          <a:prstGeom prst="rect">
+            <a:avLst/>
+          </a:prstGeom>
+        </p:spPr>
+      </p:pic>
+      <p:sp>
+        <p:nvSpPr>
+          <p:cNvPr id="61" name="Text 52"/>
+          <p:cNvSpPr txBox="1"/>
+          <p:nvPr/>
+        </p:nvSpPr>
+        <p:spPr>
+          <a:xfrm>
+            <a:off x="6196432" y="5058510"/>
+            <a:ext cx="2577008" cy="228600"/>
+          </a:xfrm>
+          <a:prstGeom prst="rect">
+            <a:avLst/>
+          </a:prstGeom>
+          <a:noFill/>
+          <a:ln/>
+        </p:spPr>
+        <p:txBody>
+          <a:bodyPr wrap="square" lIns="0" tIns="0" rIns="0" bIns="0" rtlCol="0" anchor="t"/>
+          <a:lstStyle/>
+          <a:p>
+            <a:pPr algn="ctr" indent="0" marL="0">
+              <a:buNone/>
+            </a:pPr>
+            <a:r>
+              <a:rPr lang="en-US" sz="850" dirty="0">
+                <a:solidFill>
+                  <a:srgbClr val="93C5FD"/>
+                </a:solidFill>
+                <a:latin typeface="Malgun Gothic" pitchFamily="34" charset="0"/>
+                <a:ea typeface="Malgun Gothic" pitchFamily="34" charset="-122"/>
+                <a:cs typeface="Malgun Gothic" pitchFamily="34" charset="-120"/>
+              </a:rPr>
+              <a:t>현장 사진</a:t>
+            </a:r>
+            <a:endParaRPr lang="en-US" sz="850" dirty="0"/>
+          </a:p>
+        </p:txBody>
+      </p:sp>
+      <p:sp>
+        <p:nvSpPr>
+          <p:cNvPr id="62" name="Shape 53"/>
+          <p:cNvSpPr/>
+          <p:nvPr/>
+        </p:nvSpPr>
+        <p:spPr>
+          <a:xfrm>
+            <a:off x="6333592" y="4464796"/>
+            <a:ext cx="914400" cy="237744"/>
           </a:xfrm>
           <a:prstGeom prst="roundRect">
             <a:avLst>
@@ -9371,14 +9749,14 @@
       </p:sp>
       <p:sp>
         <p:nvSpPr>
-          <p:cNvPr id="48" name="Text 46"/>
-          <p:cNvSpPr txBox="1"/>
-          <p:nvPr/>
-        </p:nvSpPr>
-        <p:spPr>
-          <a:xfrm>
-            <a:off x="6438748" y="4617720"/>
-            <a:ext cx="1051560" cy="256032"/>
+          <p:cNvPr id="63" name="Text 54"/>
+          <p:cNvSpPr txBox="1"/>
+          <p:nvPr/>
+        </p:nvSpPr>
+        <p:spPr>
+          <a:xfrm>
+            <a:off x="6333592" y="4464796"/>
+            <a:ext cx="914400" cy="237744"/>
           </a:xfrm>
           <a:prstGeom prst="rect">
             <a:avLst/>
@@ -9394,7 +9772,7 @@
               <a:buNone/>
             </a:pPr>
             <a:r>
-              <a:rPr lang="en-US" sz="850" b="1" dirty="0">
+              <a:rPr lang="en-US" sz="800" b="1" dirty="0">
                 <a:solidFill>
                   <a:srgbClr val="FFFFFF"/>
                 </a:solidFill>
@@ -9404,32 +9782,71 @@
               </a:rPr>
               <a:t>대형 축제</a:t>
             </a:r>
-            <a:endParaRPr lang="en-US" sz="850" dirty="0"/>
-          </a:p>
-        </p:txBody>
-      </p:sp>
-      <p:sp>
-        <p:nvSpPr>
-          <p:cNvPr id="49" name="Text 47"/>
-          <p:cNvSpPr txBox="1"/>
-          <p:nvPr/>
-        </p:nvSpPr>
-        <p:spPr>
-          <a:xfrm>
-            <a:off x="7581748" y="4617720"/>
-            <a:ext cx="1001954" cy="256032"/>
-          </a:xfrm>
-          <a:prstGeom prst="rect">
-            <a:avLst/>
-          </a:prstGeom>
-          <a:noFill/>
-          <a:ln/>
-        </p:spPr>
-        <p:txBody>
-          <a:bodyPr wrap="square" lIns="0" tIns="0" rIns="0" bIns="0" rtlCol="0" anchor="ctr"/>
-          <a:lstStyle/>
-          <a:p>
-            <a:pPr algn="r" indent="0" marL="0">
+            <a:endParaRPr lang="en-US" sz="800" dirty="0"/>
+          </a:p>
+        </p:txBody>
+      </p:sp>
+      <p:sp>
+        <p:nvSpPr>
+          <p:cNvPr id="64" name="Text 55"/>
+          <p:cNvSpPr txBox="1"/>
+          <p:nvPr/>
+        </p:nvSpPr>
+        <p:spPr>
+          <a:xfrm>
+            <a:off x="6379312" y="5674327"/>
+            <a:ext cx="2211248" cy="274320"/>
+          </a:xfrm>
+          <a:prstGeom prst="rect">
+            <a:avLst/>
+          </a:prstGeom>
+          <a:noFill/>
+          <a:ln/>
+        </p:spPr>
+        <p:txBody>
+          <a:bodyPr wrap="square" lIns="0" tIns="0" rIns="0" bIns="0" rtlCol="0" anchor="t"/>
+          <a:lstStyle/>
+          <a:p>
+            <a:pPr indent="0" marL="0">
+              <a:buNone/>
+            </a:pPr>
+            <a:r>
+              <a:rPr lang="en-US" sz="1050" b="1" dirty="0">
+                <a:solidFill>
+                  <a:srgbClr val="0F172A"/>
+                </a:solidFill>
+                <a:latin typeface="Malgun Gothic" pitchFamily="34" charset="0"/>
+                <a:ea typeface="Malgun Gothic" pitchFamily="34" charset="-122"/>
+                <a:cs typeface="Malgun Gothic" pitchFamily="34" charset="-120"/>
+              </a:rPr>
+              <a:t>충청 소재 대형 축제 부스 운영</a:t>
+            </a:r>
+            <a:endParaRPr lang="en-US" sz="1050" dirty="0"/>
+          </a:p>
+        </p:txBody>
+      </p:sp>
+      <p:sp>
+        <p:nvSpPr>
+          <p:cNvPr id="65" name="Text 56"/>
+          <p:cNvSpPr txBox="1"/>
+          <p:nvPr/>
+        </p:nvSpPr>
+        <p:spPr>
+          <a:xfrm>
+            <a:off x="6379312" y="5930359"/>
+            <a:ext cx="2211248" cy="228600"/>
+          </a:xfrm>
+          <a:prstGeom prst="rect">
+            <a:avLst/>
+          </a:prstGeom>
+          <a:noFill/>
+          <a:ln/>
+        </p:spPr>
+        <p:txBody>
+          <a:bodyPr wrap="square" lIns="0" tIns="0" rIns="0" bIns="0" rtlCol="0" anchor="t"/>
+          <a:lstStyle/>
+          <a:p>
+            <a:pPr indent="0" marL="0">
               <a:buNone/>
             </a:pPr>
             <a:r>
@@ -9449,99 +9866,18 @@
       </p:sp>
       <p:sp>
         <p:nvSpPr>
-          <p:cNvPr id="50" name="Text 48"/>
-          <p:cNvSpPr txBox="1"/>
-          <p:nvPr/>
-        </p:nvSpPr>
-        <p:spPr>
-          <a:xfrm>
-            <a:off x="6438748" y="4983480"/>
-            <a:ext cx="2099234" cy="320040"/>
-          </a:xfrm>
-          <a:prstGeom prst="rect">
-            <a:avLst/>
-          </a:prstGeom>
-          <a:noFill/>
-          <a:ln/>
-        </p:spPr>
-        <p:txBody>
-          <a:bodyPr wrap="square" lIns="0" tIns="0" rIns="0" bIns="0" rtlCol="0" anchor="t"/>
-          <a:lstStyle/>
-          <a:p>
-            <a:pPr indent="0" marL="0">
-              <a:buNone/>
-            </a:pPr>
-            <a:r>
-              <a:rPr lang="en-US" sz="1150" b="1" dirty="0">
-                <a:solidFill>
-                  <a:srgbClr val="0F172A"/>
-                </a:solidFill>
-                <a:latin typeface="Malgun Gothic" pitchFamily="34" charset="0"/>
-                <a:ea typeface="Malgun Gothic" pitchFamily="34" charset="-122"/>
-                <a:cs typeface="Malgun Gothic" pitchFamily="34" charset="-120"/>
-              </a:rPr>
-              <a:t>충청 소재 대형 축제 부스 운영</a:t>
-            </a:r>
-            <a:endParaRPr lang="en-US" sz="1150" dirty="0"/>
-          </a:p>
-        </p:txBody>
-      </p:sp>
-      <p:sp>
-        <p:nvSpPr>
-          <p:cNvPr id="51" name="Text 49"/>
-          <p:cNvSpPr txBox="1"/>
-          <p:nvPr/>
-        </p:nvSpPr>
-        <p:spPr>
-          <a:xfrm>
-            <a:off x="6438748" y="5321808"/>
-            <a:ext cx="2099234" cy="777240"/>
-          </a:xfrm>
-          <a:prstGeom prst="rect">
-            <a:avLst/>
-          </a:prstGeom>
-          <a:noFill/>
-          <a:ln/>
-        </p:spPr>
-        <p:txBody>
-          <a:bodyPr wrap="square" lIns="0" tIns="0" rIns="0" bIns="0" rtlCol="0" anchor="t"/>
-          <a:lstStyle/>
-          <a:p>
-            <a:pPr indent="0" marL="0">
-              <a:lnSpc>
-                <a:spcPct val="120000"/>
-              </a:lnSpc>
-              <a:buNone/>
-            </a:pPr>
-            <a:r>
-              <a:rPr lang="en-US" sz="950" dirty="0">
-                <a:solidFill>
-                  <a:srgbClr val="475569"/>
-                </a:solidFill>
-                <a:latin typeface="Malgun Gothic" pitchFamily="34" charset="0"/>
-                <a:ea typeface="Malgun Gothic" pitchFamily="34" charset="-122"/>
-                <a:cs typeface="Malgun Gothic" pitchFamily="34" charset="-120"/>
-              </a:rPr>
-              <a:t>지역 특산물·공예 셀러와 플릿 셀러를 조합하고 장비 렌탈을 일괄 제공하였습니다.</a:t>
-            </a:r>
-            <a:endParaRPr lang="en-US" sz="950" dirty="0"/>
-          </a:p>
-        </p:txBody>
-      </p:sp>
-      <p:sp>
-        <p:nvSpPr>
-          <p:cNvPr id="52" name="Shape 50"/>
+          <p:cNvPr id="66" name="Shape 57"/>
           <p:cNvSpPr/>
           <p:nvPr/>
         </p:nvSpPr>
         <p:spPr>
           <a:xfrm>
-            <a:off x="8995181" y="4389120"/>
-            <a:ext cx="2556434" cy="1783080"/>
+            <a:off x="8974607" y="4327636"/>
+            <a:ext cx="2577008" cy="1858756"/>
           </a:xfrm>
           <a:prstGeom prst="roundRect">
             <a:avLst>
-              <a:gd name="adj" fmla="val 5128"/>
+              <a:gd name="adj" fmla="val 4919"/>
             </a:avLst>
           </a:prstGeom>
           <a:solidFill>
@@ -9557,14 +9893,104 @@
       </p:sp>
       <p:sp>
         <p:nvSpPr>
-          <p:cNvPr id="53" name="Shape 51"/>
+          <p:cNvPr id="67" name="Shape 58"/>
           <p:cNvSpPr/>
           <p:nvPr/>
         </p:nvSpPr>
         <p:spPr>
           <a:xfrm>
-            <a:off x="9223781" y="4617720"/>
-            <a:ext cx="1051560" cy="256032"/>
+            <a:off x="8974607" y="4327636"/>
+            <a:ext cx="2577008" cy="1236964"/>
+          </a:xfrm>
+          <a:prstGeom prst="roundRect">
+            <a:avLst>
+              <a:gd name="adj" fmla="val 7392"/>
+            </a:avLst>
+          </a:prstGeom>
+          <a:solidFill>
+            <a:srgbClr val="12305F"/>
+          </a:solidFill>
+          <a:ln w="12700">
+            <a:solidFill>
+              <a:srgbClr val="1F5FD0"/>
+            </a:solidFill>
+            <a:prstDash val="dash"/>
+          </a:ln>
+        </p:spPr>
+      </p:sp>
+      <p:pic>
+        <p:nvPicPr>
+          <p:cNvPr id="68" name="Image 7" descr="preencoded.png">    </p:cNvPr>
+          <p:cNvPicPr>
+            <a:picLocks noChangeAspect="1"/>
+          </p:cNvPicPr>
+          <p:nvPr/>
+        </p:nvPicPr>
+        <p:blipFill>
+          <a:blip r:embed="rId8"/>
+          <a:stretch>
+            <a:fillRect/>
+          </a:stretch>
+        </p:blipFill>
+        <p:spPr>
+          <a:xfrm>
+            <a:off x="10077567" y="4650845"/>
+            <a:ext cx="371089" cy="371089"/>
+          </a:xfrm>
+          <a:prstGeom prst="rect">
+            <a:avLst/>
+          </a:prstGeom>
+        </p:spPr>
+      </p:pic>
+      <p:sp>
+        <p:nvSpPr>
+          <p:cNvPr id="69" name="Text 59"/>
+          <p:cNvSpPr txBox="1"/>
+          <p:nvPr/>
+        </p:nvSpPr>
+        <p:spPr>
+          <a:xfrm>
+            <a:off x="8974607" y="5058510"/>
+            <a:ext cx="2577008" cy="228600"/>
+          </a:xfrm>
+          <a:prstGeom prst="rect">
+            <a:avLst/>
+          </a:prstGeom>
+          <a:noFill/>
+          <a:ln/>
+        </p:spPr>
+        <p:txBody>
+          <a:bodyPr wrap="square" lIns="0" tIns="0" rIns="0" bIns="0" rtlCol="0" anchor="t"/>
+          <a:lstStyle/>
+          <a:p>
+            <a:pPr algn="ctr" indent="0" marL="0">
+              <a:buNone/>
+            </a:pPr>
+            <a:r>
+              <a:rPr lang="en-US" sz="850" dirty="0">
+                <a:solidFill>
+                  <a:srgbClr val="93C5FD"/>
+                </a:solidFill>
+                <a:latin typeface="Malgun Gothic" pitchFamily="34" charset="0"/>
+                <a:ea typeface="Malgun Gothic" pitchFamily="34" charset="-122"/>
+                <a:cs typeface="Malgun Gothic" pitchFamily="34" charset="-120"/>
+              </a:rPr>
+              <a:t>현장 사진</a:t>
+            </a:r>
+            <a:endParaRPr lang="en-US" sz="850" dirty="0"/>
+          </a:p>
+        </p:txBody>
+      </p:sp>
+      <p:sp>
+        <p:nvSpPr>
+          <p:cNvPr id="70" name="Shape 60"/>
+          <p:cNvSpPr/>
+          <p:nvPr/>
+        </p:nvSpPr>
+        <p:spPr>
+          <a:xfrm>
+            <a:off x="9111767" y="4464796"/>
+            <a:ext cx="914400" cy="237744"/>
           </a:xfrm>
           <a:prstGeom prst="roundRect">
             <a:avLst>
@@ -9584,14 +10010,14 @@
       </p:sp>
       <p:sp>
         <p:nvSpPr>
-          <p:cNvPr id="54" name="Text 52"/>
-          <p:cNvSpPr txBox="1"/>
-          <p:nvPr/>
-        </p:nvSpPr>
-        <p:spPr>
-          <a:xfrm>
-            <a:off x="9223781" y="4617720"/>
-            <a:ext cx="1051560" cy="256032"/>
+          <p:cNvPr id="71" name="Text 61"/>
+          <p:cNvSpPr txBox="1"/>
+          <p:nvPr/>
+        </p:nvSpPr>
+        <p:spPr>
+          <a:xfrm>
+            <a:off x="9111767" y="4464796"/>
+            <a:ext cx="914400" cy="237744"/>
           </a:xfrm>
           <a:prstGeom prst="rect">
             <a:avLst/>
@@ -9607,7 +10033,7 @@
               <a:buNone/>
             </a:pPr>
             <a:r>
-              <a:rPr lang="en-US" sz="850" b="1" dirty="0">
+              <a:rPr lang="en-US" sz="800" b="1" dirty="0">
                 <a:solidFill>
                   <a:srgbClr val="FFFFFF"/>
                 </a:solidFill>
@@ -9617,32 +10043,71 @@
               </a:rPr>
               <a:t>민속 축제</a:t>
             </a:r>
-            <a:endParaRPr lang="en-US" sz="850" dirty="0"/>
-          </a:p>
-        </p:txBody>
-      </p:sp>
-      <p:sp>
-        <p:nvSpPr>
-          <p:cNvPr id="55" name="Text 53"/>
-          <p:cNvSpPr txBox="1"/>
-          <p:nvPr/>
-        </p:nvSpPr>
-        <p:spPr>
-          <a:xfrm>
-            <a:off x="10366781" y="4617720"/>
-            <a:ext cx="1001954" cy="256032"/>
-          </a:xfrm>
-          <a:prstGeom prst="rect">
-            <a:avLst/>
-          </a:prstGeom>
-          <a:noFill/>
-          <a:ln/>
-        </p:spPr>
-        <p:txBody>
-          <a:bodyPr wrap="square" lIns="0" tIns="0" rIns="0" bIns="0" rtlCol="0" anchor="ctr"/>
-          <a:lstStyle/>
-          <a:p>
-            <a:pPr algn="r" indent="0" marL="0">
+            <a:endParaRPr lang="en-US" sz="800" dirty="0"/>
+          </a:p>
+        </p:txBody>
+      </p:sp>
+      <p:sp>
+        <p:nvSpPr>
+          <p:cNvPr id="72" name="Text 62"/>
+          <p:cNvSpPr txBox="1"/>
+          <p:nvPr/>
+        </p:nvSpPr>
+        <p:spPr>
+          <a:xfrm>
+            <a:off x="9157487" y="5674327"/>
+            <a:ext cx="2211248" cy="274320"/>
+          </a:xfrm>
+          <a:prstGeom prst="rect">
+            <a:avLst/>
+          </a:prstGeom>
+          <a:noFill/>
+          <a:ln/>
+        </p:spPr>
+        <p:txBody>
+          <a:bodyPr wrap="square" lIns="0" tIns="0" rIns="0" bIns="0" rtlCol="0" anchor="t"/>
+          <a:lstStyle/>
+          <a:p>
+            <a:pPr indent="0" marL="0">
+              <a:buNone/>
+            </a:pPr>
+            <a:r>
+              <a:rPr lang="en-US" sz="1050" b="1" dirty="0">
+                <a:solidFill>
+                  <a:srgbClr val="0F172A"/>
+                </a:solidFill>
+                <a:latin typeface="Malgun Gothic" pitchFamily="34" charset="0"/>
+                <a:ea typeface="Malgun Gothic" pitchFamily="34" charset="-122"/>
+                <a:cs typeface="Malgun Gothic" pitchFamily="34" charset="-120"/>
+              </a:rPr>
+              <a:t>서울 소재 민속 축제 부스 운영</a:t>
+            </a:r>
+            <a:endParaRPr lang="en-US" sz="1050" dirty="0"/>
+          </a:p>
+        </p:txBody>
+      </p:sp>
+      <p:sp>
+        <p:nvSpPr>
+          <p:cNvPr id="73" name="Text 63"/>
+          <p:cNvSpPr txBox="1"/>
+          <p:nvPr/>
+        </p:nvSpPr>
+        <p:spPr>
+          <a:xfrm>
+            <a:off x="9157487" y="5930359"/>
+            <a:ext cx="2211248" cy="228600"/>
+          </a:xfrm>
+          <a:prstGeom prst="rect">
+            <a:avLst/>
+          </a:prstGeom>
+          <a:noFill/>
+          <a:ln/>
+        </p:spPr>
+        <p:txBody>
+          <a:bodyPr wrap="square" lIns="0" tIns="0" rIns="0" bIns="0" rtlCol="0" anchor="t"/>
+          <a:lstStyle/>
+          <a:p>
+            <a:pPr indent="0" marL="0">
               <a:buNone/>
             </a:pPr>
             <a:r>
@@ -9657,87 +10122,6 @@
               <a:t>서울특별시</a:t>
             </a:r>
             <a:endParaRPr lang="en-US" sz="900" dirty="0"/>
-          </a:p>
-        </p:txBody>
-      </p:sp>
-      <p:sp>
-        <p:nvSpPr>
-          <p:cNvPr id="56" name="Text 54"/>
-          <p:cNvSpPr txBox="1"/>
-          <p:nvPr/>
-        </p:nvSpPr>
-        <p:spPr>
-          <a:xfrm>
-            <a:off x="9223781" y="4983480"/>
-            <a:ext cx="2099234" cy="320040"/>
-          </a:xfrm>
-          <a:prstGeom prst="rect">
-            <a:avLst/>
-          </a:prstGeom>
-          <a:noFill/>
-          <a:ln/>
-        </p:spPr>
-        <p:txBody>
-          <a:bodyPr wrap="square" lIns="0" tIns="0" rIns="0" bIns="0" rtlCol="0" anchor="t"/>
-          <a:lstStyle/>
-          <a:p>
-            <a:pPr indent="0" marL="0">
-              <a:buNone/>
-            </a:pPr>
-            <a:r>
-              <a:rPr lang="en-US" sz="1150" b="1" dirty="0">
-                <a:solidFill>
-                  <a:srgbClr val="0F172A"/>
-                </a:solidFill>
-                <a:latin typeface="Malgun Gothic" pitchFamily="34" charset="0"/>
-                <a:ea typeface="Malgun Gothic" pitchFamily="34" charset="-122"/>
-                <a:cs typeface="Malgun Gothic" pitchFamily="34" charset="-120"/>
-              </a:rPr>
-              <a:t>서울 소재 민속 축제 부스 운영</a:t>
-            </a:r>
-            <a:endParaRPr lang="en-US" sz="1150" dirty="0"/>
-          </a:p>
-        </p:txBody>
-      </p:sp>
-      <p:sp>
-        <p:nvSpPr>
-          <p:cNvPr id="57" name="Text 55"/>
-          <p:cNvSpPr txBox="1"/>
-          <p:nvPr/>
-        </p:nvSpPr>
-        <p:spPr>
-          <a:xfrm>
-            <a:off x="9223781" y="5321808"/>
-            <a:ext cx="2099234" cy="777240"/>
-          </a:xfrm>
-          <a:prstGeom prst="rect">
-            <a:avLst/>
-          </a:prstGeom>
-          <a:noFill/>
-          <a:ln/>
-        </p:spPr>
-        <p:txBody>
-          <a:bodyPr wrap="square" lIns="0" tIns="0" rIns="0" bIns="0" rtlCol="0" anchor="t"/>
-          <a:lstStyle/>
-          <a:p>
-            <a:pPr indent="0" marL="0">
-              <a:lnSpc>
-                <a:spcPct val="120000"/>
-              </a:lnSpc>
-              <a:buNone/>
-            </a:pPr>
-            <a:r>
-              <a:rPr lang="en-US" sz="950" dirty="0">
-                <a:solidFill>
-                  <a:srgbClr val="475569"/>
-                </a:solidFill>
-                <a:latin typeface="Malgun Gothic" pitchFamily="34" charset="0"/>
-                <a:ea typeface="Malgun Gothic" pitchFamily="34" charset="-122"/>
-                <a:cs typeface="Malgun Gothic" pitchFamily="34" charset="-120"/>
-              </a:rPr>
-              <a:t>전통 공예·먹거리·체험 셀러 중심으로 축제 정체성에 부합하는 부스 존을 연출하였습니다.</a:t>
-            </a:r>
-            <a:endParaRPr lang="en-US" sz="950" dirty="0"/>
           </a:p>
         </p:txBody>
       </p:sp>
@@ -10080,7 +10464,7 @@
         <p:spPr>
           <a:xfrm>
             <a:off x="640080" y="2377440"/>
-            <a:ext cx="2834640" cy="1783080"/>
+            <a:ext cx="3108960" cy="1783080"/>
           </a:xfrm>
           <a:prstGeom prst="roundRect">
             <a:avLst>
@@ -10088,11 +10472,103 @@
             </a:avLst>
           </a:prstGeom>
           <a:solidFill>
-            <a:srgbClr val="3182F6"/>
+            <a:srgbClr val="12305F"/>
           </a:solidFill>
           <a:ln w="12700">
             <a:solidFill>
-              <a:srgbClr val="3182F6"/>
+              <a:srgbClr val="1F5FD0"/>
+            </a:solidFill>
+            <a:prstDash val="dash"/>
+          </a:ln>
+        </p:spPr>
+      </p:sp>
+      <p:pic>
+        <p:nvPicPr>
+          <p:cNvPr id="11" name="Image 0" descr="preencoded.png">    </p:cNvPr>
+          <p:cNvPicPr>
+            <a:picLocks noChangeAspect="1"/>
+          </p:cNvPicPr>
+          <p:nvPr/>
+        </p:nvPicPr>
+        <p:blipFill>
+          <a:blip r:embed="rId1"/>
+          <a:stretch>
+            <a:fillRect/>
+          </a:stretch>
+        </p:blipFill>
+        <p:spPr>
+          <a:xfrm>
+            <a:off x="1965960" y="2656332"/>
+            <a:ext cx="457200" cy="457200"/>
+          </a:xfrm>
+          <a:prstGeom prst="rect">
+            <a:avLst/>
+          </a:prstGeom>
+        </p:spPr>
+      </p:pic>
+      <p:sp>
+        <p:nvSpPr>
+          <p:cNvPr id="12" name="Text 9"/>
+          <p:cNvSpPr txBox="1"/>
+          <p:nvPr/>
+        </p:nvSpPr>
+        <p:spPr>
+          <a:xfrm>
+            <a:off x="640080" y="3150108"/>
+            <a:ext cx="3108960" cy="228600"/>
+          </a:xfrm>
+          <a:prstGeom prst="rect">
+            <a:avLst/>
+          </a:prstGeom>
+          <a:noFill/>
+          <a:ln/>
+        </p:spPr>
+        <p:txBody>
+          <a:bodyPr wrap="square" lIns="0" tIns="0" rIns="0" bIns="0" rtlCol="0" anchor="t"/>
+          <a:lstStyle/>
+          <a:p>
+            <a:pPr algn="ctr" indent="0" marL="0">
+              <a:buNone/>
+            </a:pPr>
+            <a:r>
+              <a:rPr lang="en-US" sz="850" dirty="0">
+                <a:solidFill>
+                  <a:srgbClr val="93C5FD"/>
+                </a:solidFill>
+                <a:latin typeface="Malgun Gothic" pitchFamily="34" charset="0"/>
+                <a:ea typeface="Malgun Gothic" pitchFamily="34" charset="-122"/>
+                <a:cs typeface="Malgun Gothic" pitchFamily="34" charset="-120"/>
+              </a:rPr>
+              <a:t>현장 사진</a:t>
+            </a:r>
+            <a:endParaRPr lang="en-US" sz="850" dirty="0"/>
+          </a:p>
+        </p:txBody>
+      </p:sp>
+      <p:sp>
+        <p:nvSpPr>
+          <p:cNvPr id="13" name="Shape 10"/>
+          <p:cNvSpPr/>
+          <p:nvPr/>
+        </p:nvSpPr>
+        <p:spPr>
+          <a:xfrm>
+            <a:off x="640080" y="3474720"/>
+            <a:ext cx="3108960" cy="685800"/>
+          </a:xfrm>
+          <a:prstGeom prst="roundRect">
+            <a:avLst/>
+          </a:prstGeom>
+          <a:solidFill>
+            <a:srgbClr val="0B1F44">
+              <a:alpha val="75000"/>
+            </a:srgbClr>
+          </a:solidFill>
+          <a:ln w="12700">
+            <a:solidFill>
+              <a:srgbClr val="0B1F44">
+                <a:alpha val="0"/>
+              </a:srgbClr>
             </a:solidFill>
             <a:prstDash val="solid"/>
           </a:ln>
@@ -10100,14 +10576,14 @@
       </p:sp>
       <p:sp>
         <p:nvSpPr>
-          <p:cNvPr id="11" name="Shape 9"/>
+          <p:cNvPr id="14" name="Shape 11"/>
           <p:cNvSpPr/>
           <p:nvPr/>
         </p:nvSpPr>
         <p:spPr>
           <a:xfrm>
-            <a:off x="914400" y="2651760"/>
-            <a:ext cx="914400" cy="256032"/>
+            <a:off x="822960" y="2560320"/>
+            <a:ext cx="822960" cy="237744"/>
           </a:xfrm>
           <a:prstGeom prst="roundRect">
             <a:avLst>
@@ -10127,14 +10603,14 @@
       </p:sp>
       <p:sp>
         <p:nvSpPr>
-          <p:cNvPr id="12" name="Text 10"/>
-          <p:cNvSpPr txBox="1"/>
-          <p:nvPr/>
-        </p:nvSpPr>
-        <p:spPr>
-          <a:xfrm>
-            <a:off x="914400" y="2651760"/>
-            <a:ext cx="914400" cy="256032"/>
+          <p:cNvPr id="15" name="Text 12"/>
+          <p:cNvSpPr txBox="1"/>
+          <p:nvPr/>
+        </p:nvSpPr>
+        <p:spPr>
+          <a:xfrm>
+            <a:off x="822960" y="2560320"/>
+            <a:ext cx="822960" cy="237744"/>
           </a:xfrm>
           <a:prstGeom prst="rect">
             <a:avLst/>
@@ -10150,7 +10626,7 @@
               <a:buNone/>
             </a:pPr>
             <a:r>
-              <a:rPr lang="en-US" sz="850" b="1" dirty="0">
+              <a:rPr lang="en-US" sz="800" b="1" dirty="0">
                 <a:solidFill>
                   <a:srgbClr val="3182F6"/>
                 </a:solidFill>
@@ -10160,39 +10636,36 @@
               </a:rPr>
               <a:t>야시장</a:t>
             </a:r>
-            <a:endParaRPr lang="en-US" sz="850" dirty="0"/>
-          </a:p>
-        </p:txBody>
-      </p:sp>
-      <p:sp>
-        <p:nvSpPr>
-          <p:cNvPr id="13" name="Text 11"/>
-          <p:cNvSpPr txBox="1"/>
-          <p:nvPr/>
-        </p:nvSpPr>
-        <p:spPr>
-          <a:xfrm>
-            <a:off x="914400" y="3063240"/>
-            <a:ext cx="2377440" cy="640080"/>
-          </a:xfrm>
-          <a:prstGeom prst="rect">
-            <a:avLst/>
-          </a:prstGeom>
-          <a:noFill/>
-          <a:ln/>
-        </p:spPr>
-        <p:txBody>
-          <a:bodyPr wrap="square" lIns="0" tIns="0" rIns="0" bIns="0" rtlCol="0" anchor="t"/>
-          <a:lstStyle/>
-          <a:p>
-            <a:pPr indent="0" marL="0">
-              <a:lnSpc>
-                <a:spcPct val="115000"/>
-              </a:lnSpc>
-              <a:buNone/>
-            </a:pPr>
-            <a:r>
-              <a:rPr lang="en-US" sz="1500" b="1" dirty="0">
+            <a:endParaRPr lang="en-US" sz="800" dirty="0"/>
+          </a:p>
+        </p:txBody>
+      </p:sp>
+      <p:sp>
+        <p:nvSpPr>
+          <p:cNvPr id="16" name="Text 13"/>
+          <p:cNvSpPr txBox="1"/>
+          <p:nvPr/>
+        </p:nvSpPr>
+        <p:spPr>
+          <a:xfrm>
+            <a:off x="822960" y="3538728"/>
+            <a:ext cx="2743200" cy="292608"/>
+          </a:xfrm>
+          <a:prstGeom prst="rect">
+            <a:avLst/>
+          </a:prstGeom>
+          <a:noFill/>
+          <a:ln/>
+        </p:spPr>
+        <p:txBody>
+          <a:bodyPr wrap="square" lIns="0" tIns="0" rIns="0" bIns="0" rtlCol="0" anchor="t"/>
+          <a:lstStyle/>
+          <a:p>
+            <a:pPr indent="0" marL="0">
+              <a:buNone/>
+            </a:pPr>
+            <a:r>
+              <a:rPr lang="en-US" sz="1300" b="1" dirty="0">
                 <a:solidFill>
                   <a:srgbClr val="FFFFFF"/>
                 </a:solidFill>
@@ -10202,36 +10675,36 @@
               </a:rPr>
               <a:t>원주 소재 대학교 야시장</a:t>
             </a:r>
-            <a:endParaRPr lang="en-US" sz="1500" dirty="0"/>
-          </a:p>
-        </p:txBody>
-      </p:sp>
-      <p:sp>
-        <p:nvSpPr>
-          <p:cNvPr id="14" name="Text 12"/>
-          <p:cNvSpPr txBox="1"/>
-          <p:nvPr/>
-        </p:nvSpPr>
-        <p:spPr>
-          <a:xfrm>
-            <a:off x="914400" y="3657600"/>
-            <a:ext cx="2377440" cy="274320"/>
-          </a:xfrm>
-          <a:prstGeom prst="rect">
-            <a:avLst/>
-          </a:prstGeom>
-          <a:noFill/>
-          <a:ln/>
-        </p:spPr>
-        <p:txBody>
-          <a:bodyPr wrap="square" lIns="0" tIns="0" rIns="0" bIns="0" rtlCol="0" anchor="t"/>
-          <a:lstStyle/>
-          <a:p>
-            <a:pPr indent="0" marL="0">
-              <a:buNone/>
-            </a:pPr>
-            <a:r>
-              <a:rPr lang="en-US" sz="950" dirty="0">
+            <a:endParaRPr lang="en-US" sz="1300" dirty="0"/>
+          </a:p>
+        </p:txBody>
+      </p:sp>
+      <p:sp>
+        <p:nvSpPr>
+          <p:cNvPr id="17" name="Text 14"/>
+          <p:cNvSpPr txBox="1"/>
+          <p:nvPr/>
+        </p:nvSpPr>
+        <p:spPr>
+          <a:xfrm>
+            <a:off x="822960" y="3831336"/>
+            <a:ext cx="2743200" cy="228600"/>
+          </a:xfrm>
+          <a:prstGeom prst="rect">
+            <a:avLst/>
+          </a:prstGeom>
+          <a:noFill/>
+          <a:ln/>
+        </p:spPr>
+        <p:txBody>
+          <a:bodyPr wrap="square" lIns="0" tIns="0" rIns="0" bIns="0" rtlCol="0" anchor="t"/>
+          <a:lstStyle/>
+          <a:p>
+            <a:pPr indent="0" marL="0">
+              <a:buNone/>
+            </a:pPr>
+            <a:r>
+              <a:rPr lang="en-US" sz="900" dirty="0">
                 <a:solidFill>
                   <a:srgbClr val="D6E4F8"/>
                 </a:solidFill>
@@ -10241,20 +10714,20 @@
               </a:rPr>
               <a:t>강원 원주시 · 대학 축제 기간</a:t>
             </a:r>
-            <a:endParaRPr lang="en-US" sz="950" dirty="0"/>
-          </a:p>
-        </p:txBody>
-      </p:sp>
-      <p:sp>
-        <p:nvSpPr>
-          <p:cNvPr id="15" name="Shape 13"/>
+            <a:endParaRPr lang="en-US" sz="900" dirty="0"/>
+          </a:p>
+        </p:txBody>
+      </p:sp>
+      <p:sp>
+        <p:nvSpPr>
+          <p:cNvPr id="18" name="Shape 15"/>
           <p:cNvSpPr/>
           <p:nvPr/>
         </p:nvSpPr>
         <p:spPr>
           <a:xfrm>
-            <a:off x="3703320" y="2377440"/>
-            <a:ext cx="2494178" cy="1783080"/>
+            <a:off x="3977640" y="2377440"/>
+            <a:ext cx="2402738" cy="1783080"/>
           </a:xfrm>
           <a:prstGeom prst="roundRect">
             <a:avLst>
@@ -10274,14 +10747,14 @@
       </p:sp>
       <p:sp>
         <p:nvSpPr>
-          <p:cNvPr id="16" name="Text 14"/>
-          <p:cNvSpPr txBox="1"/>
-          <p:nvPr/>
-        </p:nvSpPr>
-        <p:spPr>
-          <a:xfrm>
-            <a:off x="3931920" y="2606040"/>
-            <a:ext cx="2036978" cy="274320"/>
+          <p:cNvPr id="19" name="Text 16"/>
+          <p:cNvSpPr txBox="1"/>
+          <p:nvPr/>
+        </p:nvSpPr>
+        <p:spPr>
+          <a:xfrm>
+            <a:off x="4206240" y="2606040"/>
+            <a:ext cx="1945538" cy="274320"/>
           </a:xfrm>
           <a:prstGeom prst="rect">
             <a:avLst/>
@@ -10313,14 +10786,14 @@
       </p:sp>
       <p:sp>
         <p:nvSpPr>
-          <p:cNvPr id="17" name="Text 15"/>
-          <p:cNvSpPr txBox="1"/>
-          <p:nvPr/>
-        </p:nvSpPr>
-        <p:spPr>
-          <a:xfrm>
-            <a:off x="3931920" y="2926080"/>
-            <a:ext cx="2036978" cy="1097280"/>
+          <p:cNvPr id="20" name="Text 17"/>
+          <p:cNvSpPr txBox="1"/>
+          <p:nvPr/>
+        </p:nvSpPr>
+        <p:spPr>
+          <a:xfrm>
+            <a:off x="4206240" y="2926080"/>
+            <a:ext cx="1945538" cy="1097280"/>
           </a:xfrm>
           <a:prstGeom prst="rect">
             <a:avLst/>
@@ -10355,14 +10828,14 @@
       </p:sp>
       <p:sp>
         <p:nvSpPr>
-          <p:cNvPr id="18" name="Shape 16"/>
+          <p:cNvPr id="21" name="Shape 18"/>
           <p:cNvSpPr/>
           <p:nvPr/>
         </p:nvSpPr>
         <p:spPr>
           <a:xfrm>
-            <a:off x="6380378" y="2377440"/>
-            <a:ext cx="2494178" cy="1783080"/>
+            <a:off x="6563258" y="2377440"/>
+            <a:ext cx="2402738" cy="1783080"/>
           </a:xfrm>
           <a:prstGeom prst="roundRect">
             <a:avLst>
@@ -10382,14 +10855,14 @@
       </p:sp>
       <p:sp>
         <p:nvSpPr>
-          <p:cNvPr id="19" name="Text 17"/>
-          <p:cNvSpPr txBox="1"/>
-          <p:nvPr/>
-        </p:nvSpPr>
-        <p:spPr>
-          <a:xfrm>
-            <a:off x="6608978" y="2606040"/>
-            <a:ext cx="2036978" cy="274320"/>
+          <p:cNvPr id="22" name="Text 19"/>
+          <p:cNvSpPr txBox="1"/>
+          <p:nvPr/>
+        </p:nvSpPr>
+        <p:spPr>
+          <a:xfrm>
+            <a:off x="6791858" y="2606040"/>
+            <a:ext cx="1945538" cy="274320"/>
           </a:xfrm>
           <a:prstGeom prst="rect">
             <a:avLst/>
@@ -10421,14 +10894,14 @@
       </p:sp>
       <p:sp>
         <p:nvSpPr>
-          <p:cNvPr id="20" name="Text 18"/>
-          <p:cNvSpPr txBox="1"/>
-          <p:nvPr/>
-        </p:nvSpPr>
-        <p:spPr>
-          <a:xfrm>
-            <a:off x="6608978" y="2926080"/>
-            <a:ext cx="2036978" cy="1097280"/>
+          <p:cNvPr id="23" name="Text 20"/>
+          <p:cNvSpPr txBox="1"/>
+          <p:nvPr/>
+        </p:nvSpPr>
+        <p:spPr>
+          <a:xfrm>
+            <a:off x="6791858" y="2926080"/>
+            <a:ext cx="1945538" cy="1097280"/>
           </a:xfrm>
           <a:prstGeom prst="rect">
             <a:avLst/>
@@ -10463,14 +10936,14 @@
       </p:sp>
       <p:sp>
         <p:nvSpPr>
-          <p:cNvPr id="21" name="Shape 19"/>
+          <p:cNvPr id="24" name="Shape 21"/>
           <p:cNvSpPr/>
           <p:nvPr/>
         </p:nvSpPr>
         <p:spPr>
           <a:xfrm>
-            <a:off x="9057437" y="2377440"/>
-            <a:ext cx="2494178" cy="1783080"/>
+            <a:off x="9148877" y="2377440"/>
+            <a:ext cx="2402738" cy="1783080"/>
           </a:xfrm>
           <a:prstGeom prst="roundRect">
             <a:avLst>
@@ -10490,14 +10963,14 @@
       </p:sp>
       <p:sp>
         <p:nvSpPr>
-          <p:cNvPr id="22" name="Text 20"/>
-          <p:cNvSpPr txBox="1"/>
-          <p:nvPr/>
-        </p:nvSpPr>
-        <p:spPr>
-          <a:xfrm>
-            <a:off x="9286037" y="2606040"/>
-            <a:ext cx="2036978" cy="274320"/>
+          <p:cNvPr id="25" name="Text 22"/>
+          <p:cNvSpPr txBox="1"/>
+          <p:nvPr/>
+        </p:nvSpPr>
+        <p:spPr>
+          <a:xfrm>
+            <a:off x="9377477" y="2606040"/>
+            <a:ext cx="1945538" cy="274320"/>
           </a:xfrm>
           <a:prstGeom prst="rect">
             <a:avLst/>
@@ -10529,14 +11002,14 @@
       </p:sp>
       <p:sp>
         <p:nvSpPr>
-          <p:cNvPr id="23" name="Text 21"/>
-          <p:cNvSpPr txBox="1"/>
-          <p:nvPr/>
-        </p:nvSpPr>
-        <p:spPr>
-          <a:xfrm>
-            <a:off x="9286037" y="2926080"/>
-            <a:ext cx="2036978" cy="1097280"/>
+          <p:cNvPr id="26" name="Text 23"/>
+          <p:cNvSpPr txBox="1"/>
+          <p:nvPr/>
+        </p:nvSpPr>
+        <p:spPr>
+          <a:xfrm>
+            <a:off x="9377477" y="2926080"/>
+            <a:ext cx="1945538" cy="1097280"/>
           </a:xfrm>
           <a:prstGeom prst="rect">
             <a:avLst/>
@@ -10571,14 +11044,14 @@
       </p:sp>
       <p:sp>
         <p:nvSpPr>
-          <p:cNvPr id="24" name="Shape 22"/>
+          <p:cNvPr id="27" name="Shape 24"/>
           <p:cNvSpPr/>
           <p:nvPr/>
         </p:nvSpPr>
         <p:spPr>
           <a:xfrm>
             <a:off x="640080" y="4389120"/>
-            <a:ext cx="2834640" cy="1783080"/>
+            <a:ext cx="3108960" cy="1783080"/>
           </a:xfrm>
           <a:prstGeom prst="roundRect">
             <a:avLst>
@@ -10586,11 +11059,103 @@
             </a:avLst>
           </a:prstGeom>
           <a:solidFill>
-            <a:srgbClr val="3182F6"/>
+            <a:srgbClr val="12305F"/>
           </a:solidFill>
           <a:ln w="12700">
             <a:solidFill>
-              <a:srgbClr val="3182F6"/>
+              <a:srgbClr val="1F5FD0"/>
+            </a:solidFill>
+            <a:prstDash val="dash"/>
+          </a:ln>
+        </p:spPr>
+      </p:sp>
+      <p:pic>
+        <p:nvPicPr>
+          <p:cNvPr id="28" name="Image 1" descr="preencoded.png">    </p:cNvPr>
+          <p:cNvPicPr>
+            <a:picLocks noChangeAspect="1"/>
+          </p:cNvPicPr>
+          <p:nvPr/>
+        </p:nvPicPr>
+        <p:blipFill>
+          <a:blip r:embed="rId2"/>
+          <a:stretch>
+            <a:fillRect/>
+          </a:stretch>
+        </p:blipFill>
+        <p:spPr>
+          <a:xfrm>
+            <a:off x="1965960" y="4668012"/>
+            <a:ext cx="457200" cy="457200"/>
+          </a:xfrm>
+          <a:prstGeom prst="rect">
+            <a:avLst/>
+          </a:prstGeom>
+        </p:spPr>
+      </p:pic>
+      <p:sp>
+        <p:nvSpPr>
+          <p:cNvPr id="29" name="Text 25"/>
+          <p:cNvSpPr txBox="1"/>
+          <p:nvPr/>
+        </p:nvSpPr>
+        <p:spPr>
+          <a:xfrm>
+            <a:off x="640080" y="5161788"/>
+            <a:ext cx="3108960" cy="228600"/>
+          </a:xfrm>
+          <a:prstGeom prst="rect">
+            <a:avLst/>
+          </a:prstGeom>
+          <a:noFill/>
+          <a:ln/>
+        </p:spPr>
+        <p:txBody>
+          <a:bodyPr wrap="square" lIns="0" tIns="0" rIns="0" bIns="0" rtlCol="0" anchor="t"/>
+          <a:lstStyle/>
+          <a:p>
+            <a:pPr algn="ctr" indent="0" marL="0">
+              <a:buNone/>
+            </a:pPr>
+            <a:r>
+              <a:rPr lang="en-US" sz="850" dirty="0">
+                <a:solidFill>
+                  <a:srgbClr val="93C5FD"/>
+                </a:solidFill>
+                <a:latin typeface="Malgun Gothic" pitchFamily="34" charset="0"/>
+                <a:ea typeface="Malgun Gothic" pitchFamily="34" charset="-122"/>
+                <a:cs typeface="Malgun Gothic" pitchFamily="34" charset="-120"/>
+              </a:rPr>
+              <a:t>현장 사진</a:t>
+            </a:r>
+            <a:endParaRPr lang="en-US" sz="850" dirty="0"/>
+          </a:p>
+        </p:txBody>
+      </p:sp>
+      <p:sp>
+        <p:nvSpPr>
+          <p:cNvPr id="30" name="Shape 26"/>
+          <p:cNvSpPr/>
+          <p:nvPr/>
+        </p:nvSpPr>
+        <p:spPr>
+          <a:xfrm>
+            <a:off x="640080" y="5486400"/>
+            <a:ext cx="3108960" cy="685800"/>
+          </a:xfrm>
+          <a:prstGeom prst="roundRect">
+            <a:avLst/>
+          </a:prstGeom>
+          <a:solidFill>
+            <a:srgbClr val="0B1F44">
+              <a:alpha val="75000"/>
+            </a:srgbClr>
+          </a:solidFill>
+          <a:ln w="12700">
+            <a:solidFill>
+              <a:srgbClr val="0B1F44">
+                <a:alpha val="0"/>
+              </a:srgbClr>
             </a:solidFill>
             <a:prstDash val="solid"/>
           </a:ln>
@@ -10598,14 +11163,14 @@
       </p:sp>
       <p:sp>
         <p:nvSpPr>
-          <p:cNvPr id="25" name="Shape 23"/>
+          <p:cNvPr id="31" name="Shape 27"/>
           <p:cNvSpPr/>
           <p:nvPr/>
         </p:nvSpPr>
         <p:spPr>
           <a:xfrm>
-            <a:off x="914400" y="4663440"/>
-            <a:ext cx="914400" cy="256032"/>
+            <a:off x="822960" y="4572000"/>
+            <a:ext cx="822960" cy="237744"/>
           </a:xfrm>
           <a:prstGeom prst="roundRect">
             <a:avLst>
@@ -10625,14 +11190,14 @@
       </p:sp>
       <p:sp>
         <p:nvSpPr>
-          <p:cNvPr id="26" name="Text 24"/>
-          <p:cNvSpPr txBox="1"/>
-          <p:nvPr/>
-        </p:nvSpPr>
-        <p:spPr>
-          <a:xfrm>
-            <a:off x="914400" y="4663440"/>
-            <a:ext cx="914400" cy="256032"/>
+          <p:cNvPr id="32" name="Text 28"/>
+          <p:cNvSpPr txBox="1"/>
+          <p:nvPr/>
+        </p:nvSpPr>
+        <p:spPr>
+          <a:xfrm>
+            <a:off x="822960" y="4572000"/>
+            <a:ext cx="822960" cy="237744"/>
           </a:xfrm>
           <a:prstGeom prst="rect">
             <a:avLst/>
@@ -10648,7 +11213,7 @@
               <a:buNone/>
             </a:pPr>
             <a:r>
-              <a:rPr lang="en-US" sz="850" b="1" dirty="0">
+              <a:rPr lang="en-US" sz="800" b="1" dirty="0">
                 <a:solidFill>
                   <a:srgbClr val="3182F6"/>
                 </a:solidFill>
@@ -10658,39 +11223,36 @@
               </a:rPr>
               <a:t>야시장</a:t>
             </a:r>
-            <a:endParaRPr lang="en-US" sz="850" dirty="0"/>
-          </a:p>
-        </p:txBody>
-      </p:sp>
-      <p:sp>
-        <p:nvSpPr>
-          <p:cNvPr id="27" name="Text 25"/>
-          <p:cNvSpPr txBox="1"/>
-          <p:nvPr/>
-        </p:nvSpPr>
-        <p:spPr>
-          <a:xfrm>
-            <a:off x="914400" y="5074920"/>
-            <a:ext cx="2377440" cy="640080"/>
-          </a:xfrm>
-          <a:prstGeom prst="rect">
-            <a:avLst/>
-          </a:prstGeom>
-          <a:noFill/>
-          <a:ln/>
-        </p:spPr>
-        <p:txBody>
-          <a:bodyPr wrap="square" lIns="0" tIns="0" rIns="0" bIns="0" rtlCol="0" anchor="t"/>
-          <a:lstStyle/>
-          <a:p>
-            <a:pPr indent="0" marL="0">
-              <a:lnSpc>
-                <a:spcPct val="115000"/>
-              </a:lnSpc>
-              <a:buNone/>
-            </a:pPr>
-            <a:r>
-              <a:rPr lang="en-US" sz="1500" b="1" dirty="0">
+            <a:endParaRPr lang="en-US" sz="800" dirty="0"/>
+          </a:p>
+        </p:txBody>
+      </p:sp>
+      <p:sp>
+        <p:nvSpPr>
+          <p:cNvPr id="33" name="Text 29"/>
+          <p:cNvSpPr txBox="1"/>
+          <p:nvPr/>
+        </p:nvSpPr>
+        <p:spPr>
+          <a:xfrm>
+            <a:off x="822960" y="5550408"/>
+            <a:ext cx="2743200" cy="292608"/>
+          </a:xfrm>
+          <a:prstGeom prst="rect">
+            <a:avLst/>
+          </a:prstGeom>
+          <a:noFill/>
+          <a:ln/>
+        </p:spPr>
+        <p:txBody>
+          <a:bodyPr wrap="square" lIns="0" tIns="0" rIns="0" bIns="0" rtlCol="0" anchor="t"/>
+          <a:lstStyle/>
+          <a:p>
+            <a:pPr indent="0" marL="0">
+              <a:buNone/>
+            </a:pPr>
+            <a:r>
+              <a:rPr lang="en-US" sz="1300" b="1" dirty="0">
                 <a:solidFill>
                   <a:srgbClr val="FFFFFF"/>
                 </a:solidFill>
@@ -10700,36 +11262,36 @@
               </a:rPr>
               <a:t>하남 소재 아파트 야시장</a:t>
             </a:r>
-            <a:endParaRPr lang="en-US" sz="1500" dirty="0"/>
-          </a:p>
-        </p:txBody>
-      </p:sp>
-      <p:sp>
-        <p:nvSpPr>
-          <p:cNvPr id="28" name="Text 26"/>
-          <p:cNvSpPr txBox="1"/>
-          <p:nvPr/>
-        </p:nvSpPr>
-        <p:spPr>
-          <a:xfrm>
-            <a:off x="914400" y="5669280"/>
-            <a:ext cx="2377440" cy="274320"/>
-          </a:xfrm>
-          <a:prstGeom prst="rect">
-            <a:avLst/>
-          </a:prstGeom>
-          <a:noFill/>
-          <a:ln/>
-        </p:spPr>
-        <p:txBody>
-          <a:bodyPr wrap="square" lIns="0" tIns="0" rIns="0" bIns="0" rtlCol="0" anchor="t"/>
-          <a:lstStyle/>
-          <a:p>
-            <a:pPr indent="0" marL="0">
-              <a:buNone/>
-            </a:pPr>
-            <a:r>
-              <a:rPr lang="en-US" sz="950" dirty="0">
+            <a:endParaRPr lang="en-US" sz="1300" dirty="0"/>
+          </a:p>
+        </p:txBody>
+      </p:sp>
+      <p:sp>
+        <p:nvSpPr>
+          <p:cNvPr id="34" name="Text 30"/>
+          <p:cNvSpPr txBox="1"/>
+          <p:nvPr/>
+        </p:nvSpPr>
+        <p:spPr>
+          <a:xfrm>
+            <a:off x="822960" y="5843016"/>
+            <a:ext cx="2743200" cy="228600"/>
+          </a:xfrm>
+          <a:prstGeom prst="rect">
+            <a:avLst/>
+          </a:prstGeom>
+          <a:noFill/>
+          <a:ln/>
+        </p:spPr>
+        <p:txBody>
+          <a:bodyPr wrap="square" lIns="0" tIns="0" rIns="0" bIns="0" rtlCol="0" anchor="t"/>
+          <a:lstStyle/>
+          <a:p>
+            <a:pPr indent="0" marL="0">
+              <a:buNone/>
+            </a:pPr>
+            <a:r>
+              <a:rPr lang="en-US" sz="900" dirty="0">
                 <a:solidFill>
                   <a:srgbClr val="D6E4F8"/>
                 </a:solidFill>
@@ -10739,20 +11301,20 @@
               </a:rPr>
               <a:t>경기 하남시 · 대규모 아파트 단지</a:t>
             </a:r>
-            <a:endParaRPr lang="en-US" sz="950" dirty="0"/>
-          </a:p>
-        </p:txBody>
-      </p:sp>
-      <p:sp>
-        <p:nvSpPr>
-          <p:cNvPr id="29" name="Shape 27"/>
+            <a:endParaRPr lang="en-US" sz="900" dirty="0"/>
+          </a:p>
+        </p:txBody>
+      </p:sp>
+      <p:sp>
+        <p:nvSpPr>
+          <p:cNvPr id="35" name="Shape 31"/>
           <p:cNvSpPr/>
           <p:nvPr/>
         </p:nvSpPr>
         <p:spPr>
           <a:xfrm>
-            <a:off x="3703320" y="4389120"/>
-            <a:ext cx="2494178" cy="1783080"/>
+            <a:off x="3977640" y="4389120"/>
+            <a:ext cx="2402738" cy="1783080"/>
           </a:xfrm>
           <a:prstGeom prst="roundRect">
             <a:avLst>
@@ -10772,14 +11334,14 @@
       </p:sp>
       <p:sp>
         <p:nvSpPr>
-          <p:cNvPr id="30" name="Text 28"/>
-          <p:cNvSpPr txBox="1"/>
-          <p:nvPr/>
-        </p:nvSpPr>
-        <p:spPr>
-          <a:xfrm>
-            <a:off x="3931920" y="4617720"/>
-            <a:ext cx="2036978" cy="274320"/>
+          <p:cNvPr id="36" name="Text 32"/>
+          <p:cNvSpPr txBox="1"/>
+          <p:nvPr/>
+        </p:nvSpPr>
+        <p:spPr>
+          <a:xfrm>
+            <a:off x="4206240" y="4617720"/>
+            <a:ext cx="1945538" cy="274320"/>
           </a:xfrm>
           <a:prstGeom prst="rect">
             <a:avLst/>
@@ -10811,14 +11373,14 @@
       </p:sp>
       <p:sp>
         <p:nvSpPr>
-          <p:cNvPr id="31" name="Text 29"/>
-          <p:cNvSpPr txBox="1"/>
-          <p:nvPr/>
-        </p:nvSpPr>
-        <p:spPr>
-          <a:xfrm>
-            <a:off x="3931920" y="4937760"/>
-            <a:ext cx="2036978" cy="1097280"/>
+          <p:cNvPr id="37" name="Text 33"/>
+          <p:cNvSpPr txBox="1"/>
+          <p:nvPr/>
+        </p:nvSpPr>
+        <p:spPr>
+          <a:xfrm>
+            <a:off x="4206240" y="4937760"/>
+            <a:ext cx="1945538" cy="1097280"/>
           </a:xfrm>
           <a:prstGeom prst="rect">
             <a:avLst/>
@@ -10853,14 +11415,14 @@
       </p:sp>
       <p:sp>
         <p:nvSpPr>
-          <p:cNvPr id="32" name="Shape 30"/>
+          <p:cNvPr id="38" name="Shape 34"/>
           <p:cNvSpPr/>
           <p:nvPr/>
         </p:nvSpPr>
         <p:spPr>
           <a:xfrm>
-            <a:off x="6380378" y="4389120"/>
-            <a:ext cx="2494178" cy="1783080"/>
+            <a:off x="6563258" y="4389120"/>
+            <a:ext cx="2402738" cy="1783080"/>
           </a:xfrm>
           <a:prstGeom prst="roundRect">
             <a:avLst>
@@ -10880,14 +11442,14 @@
       </p:sp>
       <p:sp>
         <p:nvSpPr>
-          <p:cNvPr id="33" name="Text 31"/>
-          <p:cNvSpPr txBox="1"/>
-          <p:nvPr/>
-        </p:nvSpPr>
-        <p:spPr>
-          <a:xfrm>
-            <a:off x="6608978" y="4617720"/>
-            <a:ext cx="2036978" cy="274320"/>
+          <p:cNvPr id="39" name="Text 35"/>
+          <p:cNvSpPr txBox="1"/>
+          <p:nvPr/>
+        </p:nvSpPr>
+        <p:spPr>
+          <a:xfrm>
+            <a:off x="6791858" y="4617720"/>
+            <a:ext cx="1945538" cy="274320"/>
           </a:xfrm>
           <a:prstGeom prst="rect">
             <a:avLst/>
@@ -10919,14 +11481,14 @@
       </p:sp>
       <p:sp>
         <p:nvSpPr>
-          <p:cNvPr id="34" name="Text 32"/>
-          <p:cNvSpPr txBox="1"/>
-          <p:nvPr/>
-        </p:nvSpPr>
-        <p:spPr>
-          <a:xfrm>
-            <a:off x="6608978" y="4937760"/>
-            <a:ext cx="2036978" cy="1097280"/>
+          <p:cNvPr id="40" name="Text 36"/>
+          <p:cNvSpPr txBox="1"/>
+          <p:nvPr/>
+        </p:nvSpPr>
+        <p:spPr>
+          <a:xfrm>
+            <a:off x="6791858" y="4937760"/>
+            <a:ext cx="1945538" cy="1097280"/>
           </a:xfrm>
           <a:prstGeom prst="rect">
             <a:avLst/>
@@ -10961,14 +11523,14 @@
       </p:sp>
       <p:sp>
         <p:nvSpPr>
-          <p:cNvPr id="35" name="Shape 33"/>
+          <p:cNvPr id="41" name="Shape 37"/>
           <p:cNvSpPr/>
           <p:nvPr/>
         </p:nvSpPr>
         <p:spPr>
           <a:xfrm>
-            <a:off x="9057437" y="4389120"/>
-            <a:ext cx="2494178" cy="1783080"/>
+            <a:off x="9148877" y="4389120"/>
+            <a:ext cx="2402738" cy="1783080"/>
           </a:xfrm>
           <a:prstGeom prst="roundRect">
             <a:avLst>
@@ -10988,14 +11550,14 @@
       </p:sp>
       <p:sp>
         <p:nvSpPr>
-          <p:cNvPr id="36" name="Text 34"/>
-          <p:cNvSpPr txBox="1"/>
-          <p:nvPr/>
-        </p:nvSpPr>
-        <p:spPr>
-          <a:xfrm>
-            <a:off x="9286037" y="4617720"/>
-            <a:ext cx="2036978" cy="274320"/>
+          <p:cNvPr id="42" name="Text 38"/>
+          <p:cNvSpPr txBox="1"/>
+          <p:nvPr/>
+        </p:nvSpPr>
+        <p:spPr>
+          <a:xfrm>
+            <a:off x="9377477" y="4617720"/>
+            <a:ext cx="1945538" cy="274320"/>
           </a:xfrm>
           <a:prstGeom prst="rect">
             <a:avLst/>
@@ -11027,14 +11589,14 @@
       </p:sp>
       <p:sp>
         <p:nvSpPr>
-          <p:cNvPr id="37" name="Text 35"/>
-          <p:cNvSpPr txBox="1"/>
-          <p:nvPr/>
-        </p:nvSpPr>
-        <p:spPr>
-          <a:xfrm>
-            <a:off x="9286037" y="4937760"/>
-            <a:ext cx="2036978" cy="1097280"/>
+          <p:cNvPr id="43" name="Text 39"/>
+          <p:cNvSpPr txBox="1"/>
+          <p:nvPr/>
+        </p:nvSpPr>
+        <p:spPr>
+          <a:xfrm>
+            <a:off x="9377477" y="4937760"/>
+            <a:ext cx="1945538" cy="1097280"/>
           </a:xfrm>
           <a:prstGeom prst="rect">
             <a:avLst/>
